--- a/schedule/02-vibe-coding-vs-context-engineering/02-vibe-coding-vs-context-engineering.pptx
+++ b/schedule/02-vibe-coding-vs-context-engineering/02-vibe-coding-vs-context-engineering.pptx
@@ -6,7 +6,7 @@
     <p:sldMasterId id="2147483650" r:id="rId2"/>
   </p:sldMasterIdLst>
   <p:notesMasterIdLst>
-    <p:notesMasterId r:id="rId30"/>
+    <p:notesMasterId r:id="rId32"/>
   </p:notesMasterIdLst>
   <p:sldIdLst>
     <p:sldId id="256" r:id="rId3"/>
@@ -35,31 +35,33 @@
     <p:sldId id="301" r:id="rId26"/>
     <p:sldId id="274" r:id="rId27"/>
     <p:sldId id="302" r:id="rId28"/>
-    <p:sldId id="303" r:id="rId29"/>
+    <p:sldId id="304" r:id="rId29"/>
+    <p:sldId id="305" r:id="rId30"/>
+    <p:sldId id="303" r:id="rId31"/>
   </p:sldIdLst>
   <p:sldSz cx="18288000" cy="10287000"/>
   <p:notesSz cx="10287000" cy="18288000"/>
   <p:embeddedFontLst>
     <p:embeddedFont>
-      <p:font typeface="Inter" panose="020B0604020202020204" charset="0"/>
-      <p:regular r:id="rId31"/>
-      <p:bold r:id="rId32"/>
-      <p:italic r:id="rId33"/>
-      <p:boldItalic r:id="rId34"/>
+      <p:font typeface="Inter" panose="02000503000000020004"/>
+      <p:regular r:id="rId33"/>
+      <p:bold r:id="rId34"/>
+      <p:italic r:id="rId35"/>
+      <p:boldItalic r:id="rId36"/>
     </p:embeddedFont>
     <p:embeddedFont>
-      <p:font typeface="JetBrains Mono" panose="020B0604020202020204" charset="0"/>
-      <p:regular r:id="rId35"/>
-      <p:bold r:id="rId36"/>
-      <p:italic r:id="rId37"/>
-      <p:boldItalic r:id="rId38"/>
+      <p:font typeface="JetBrains Mono" panose="02000009000000000000"/>
+      <p:regular r:id="rId37"/>
+      <p:bold r:id="rId38"/>
+      <p:italic r:id="rId39"/>
+      <p:boldItalic r:id="rId40"/>
     </p:embeddedFont>
     <p:embeddedFont>
-      <p:font typeface="Montserrat" panose="00000500000000000000" pitchFamily="2" charset="0"/>
-      <p:regular r:id="rId39"/>
-      <p:bold r:id="rId40"/>
-      <p:italic r:id="rId41"/>
-      <p:boldItalic r:id="rId42"/>
+      <p:font typeface="Montserrat" pitchFamily="2" charset="77"/>
+      <p:regular r:id="rId41"/>
+      <p:bold r:id="rId42"/>
+      <p:italic r:id="rId43"/>
+      <p:boldItalic r:id="rId44"/>
     </p:embeddedFont>
   </p:embeddedFontLst>
   <p:defaultTextStyle>
@@ -292,6 +294,9 @@
     </a:lvl9pPr>
   </p:defaultTextStyle>
   <p:extLst>
+    <p:ext uri="{EFAFB233-063F-42B5-8137-9DF3F51BA10A}">
+      <p15:sldGuideLst xmlns:p15="http://schemas.microsoft.com/office/powerpoint/2012/main"/>
+    </p:ext>
     <p:ext uri="GoogleSlidesCustomDataVersion2">
       <go:slidesCustomData xmlns:go="http://customooxmlschemas.google.com/" xmlns:ahyp="http://schemas.microsoft.com/office/drawing/2018/hyperlinkcolor" xmlns:p15="http://schemas.microsoft.com/office/powerpoint/2012/main" xmlns:p14="http://schemas.microsoft.com/office/powerpoint/2010/main" xmlns:com="http://schemas.openxmlformats.org/drawingml/2006/compatibility" xmlns:pvml="urn:schemas-microsoft-com:office:powerpoint" xmlns:v="urn:schemas-microsoft-com:vml" xmlns:o="urn:schemas-microsoft-com:office:office" xmlns:dgm="http://schemas.openxmlformats.org/drawingml/2006/diagram" xmlns:c="http://schemas.openxmlformats.org/drawingml/2006/chart" xmlns:mv="urn:schemas-microsoft-com:mac:vml" xmlns:mc="http://schemas.openxmlformats.org/markup-compatibility/2006" xmlns="" r:id="rId60" roundtripDataSignature="AMtx7mgvBL9m8TJysEvjfbWLYgqaddpdWw=="/>
     </p:ext>
@@ -8528,6 +8533,39 @@
       </p:grpSpPr>
       <p:sp>
         <p:nvSpPr>
+          <p:cNvPr id="6" name="Shape 0">
+            <a:extLst>
+              <a:ext uri="{FF2B5EF4-FFF2-40B4-BE49-F238E27FC236}">
+                <a16:creationId xmlns:a16="http://schemas.microsoft.com/office/drawing/2014/main" id="{BE5BF16A-57FD-86F5-BD00-2715CB0725A2}"/>
+              </a:ext>
+            </a:extLst>
+          </p:cNvPr>
+          <p:cNvSpPr/>
+          <p:nvPr/>
+        </p:nvSpPr>
+        <p:spPr>
+          <a:xfrm>
+            <a:off x="0" y="0"/>
+            <a:ext cx="18288000" cy="10287000"/>
+          </a:xfrm>
+          <a:prstGeom prst="rect">
+            <a:avLst/>
+          </a:prstGeom>
+          <a:solidFill>
+            <a:srgbClr val="1B1D24"/>
+          </a:solidFill>
+          <a:ln/>
+        </p:spPr>
+        <p:txBody>
+          <a:bodyPr/>
+          <a:lstStyle/>
+          <a:p>
+            <a:endParaRPr lang="en-US"/>
+          </a:p>
+        </p:txBody>
+      </p:sp>
+      <p:sp>
+        <p:nvSpPr>
           <p:cNvPr id="2" name="Text 0"/>
           <p:cNvSpPr/>
           <p:nvPr/>
@@ -11926,7 +11964,7 @@
                 <a:ea typeface="Inter" pitchFamily="34" charset="-122"/>
                 <a:cs typeface="Inter" pitchFamily="34" charset="-120"/>
               </a:rPr>
-              <a:t>State the user outcome and the problem it solves. Lets the model make trade-offs in your favor when it has to choose.</a:t>
+              <a:t>State the user outcome and the problem it solves. Let’s the model make trade-offs in your favor when it has to choose.</a:t>
             </a:r>
             <a:endParaRPr lang="en-US" sz="1800" dirty="0"/>
           </a:p>
@@ -12575,7 +12613,7 @@
                 <a:ea typeface="Montserrat" pitchFamily="34" charset="-122"/>
                 <a:cs typeface="Montserrat" pitchFamily="34" charset="-120"/>
               </a:rPr>
-              <a:t>...continued.</a:t>
+              <a:t>Anatomy, continued.</a:t>
             </a:r>
             <a:endParaRPr lang="en-US" sz="5700" dirty="0"/>
           </a:p>
@@ -12583,43 +12621,133 @@
       </p:sp>
       <p:sp>
         <p:nvSpPr>
-          <p:cNvPr id="4" name="Shape 2"/>
-          <p:cNvSpPr/>
-          <p:nvPr/>
-        </p:nvSpPr>
-        <p:spPr>
-          <a:xfrm>
-            <a:off x="952500" y="2703165"/>
-            <a:ext cx="914400" cy="38100"/>
+          <p:cNvPr id="4" name="Text 2"/>
+          <p:cNvSpPr/>
+          <p:nvPr/>
+        </p:nvSpPr>
+        <p:spPr>
+          <a:xfrm>
+            <a:off x="952500" y="2398365"/>
+            <a:ext cx="13735050" cy="491430"/>
+          </a:xfrm>
+          <a:prstGeom prst="rect">
+            <a:avLst/>
+          </a:prstGeom>
+          <a:noFill/>
+          <a:ln/>
+        </p:spPr>
+        <p:txBody>
+          <a:bodyPr wrap="square" lIns="25400" tIns="25400" rIns="25400" bIns="25400" rtlCol="0" anchor="t">
+            <a:normAutofit fontScale="77500" lnSpcReduction="20000"/>
+          </a:bodyPr>
+          <a:lstStyle/>
+          <a:p>
+            <a:pPr marL="0" indent="0" algn="l">
+              <a:lnSpc>
+                <a:spcPct val="140000"/>
+              </a:lnSpc>
+              <a:buNone/>
+            </a:pPr>
+            <a:r>
+              <a:rPr lang="en-US" sz="2550" dirty="0">
+                <a:solidFill>
+                  <a:srgbClr val="6B6E78"/>
+                </a:solidFill>
+                <a:latin typeface="Inter" pitchFamily="34" charset="0"/>
+                <a:ea typeface="Inter" pitchFamily="34" charset="-122"/>
+                <a:cs typeface="Inter" pitchFamily="34" charset="-120"/>
+              </a:rPr>
+              <a:t>Three more criteria. Every prompt that lands has all seven. (1–4 on the previous slide.)</a:t>
+            </a:r>
+            <a:endParaRPr lang="en-US" sz="2550" dirty="0"/>
+          </a:p>
+        </p:txBody>
+      </p:sp>
+      <p:sp>
+        <p:nvSpPr>
+          <p:cNvPr id="5" name="Shape 3"/>
+          <p:cNvSpPr/>
+          <p:nvPr/>
+        </p:nvSpPr>
+        <p:spPr>
+          <a:xfrm>
+            <a:off x="1028777" y="3499396"/>
+            <a:ext cx="5232349" cy="6305550"/>
           </a:xfrm>
           <a:prstGeom prst="roundRect">
             <a:avLst>
-              <a:gd name="adj" fmla="val 50000"/>
+              <a:gd name="adj" fmla="val 3912"/>
             </a:avLst>
           </a:prstGeom>
           <a:solidFill>
-            <a:srgbClr val="F58220"/>
+            <a:srgbClr val="F7F5F1"/>
           </a:solidFill>
+          <a:ln w="9525">
+            <a:solidFill>
+              <a:srgbClr val="E5E5E7"/>
+            </a:solidFill>
+            <a:prstDash val="solid"/>
+          </a:ln>
+        </p:spPr>
+        <p:txBody>
+          <a:bodyPr/>
+          <a:lstStyle/>
+          <a:p>
+            <a:endParaRPr lang="en-US"/>
+          </a:p>
+        </p:txBody>
+      </p:sp>
+      <p:sp>
+        <p:nvSpPr>
+          <p:cNvPr id="6" name="Text 4"/>
+          <p:cNvSpPr/>
+          <p:nvPr/>
+        </p:nvSpPr>
+        <p:spPr>
+          <a:xfrm>
+            <a:off x="1343102" y="3851821"/>
+            <a:ext cx="4603699" cy="333375"/>
+          </a:xfrm>
+          <a:prstGeom prst="rect">
+            <a:avLst/>
+          </a:prstGeom>
+          <a:noFill/>
           <a:ln/>
         </p:spPr>
         <p:txBody>
-          <a:bodyPr/>
-          <a:lstStyle/>
-          <a:p>
-            <a:endParaRPr lang="en-US"/>
-          </a:p>
-        </p:txBody>
-      </p:sp>
-      <p:sp>
-        <p:nvSpPr>
-          <p:cNvPr id="5" name="Text 3"/>
-          <p:cNvSpPr/>
-          <p:nvPr/>
-        </p:nvSpPr>
-        <p:spPr>
-          <a:xfrm>
-            <a:off x="952500" y="3236565"/>
-            <a:ext cx="5232349" cy="1478161"/>
+          <a:bodyPr wrap="square" lIns="25400" tIns="25400" rIns="25400" bIns="25400" rtlCol="0" anchor="t">
+            <a:normAutofit/>
+          </a:bodyPr>
+          <a:lstStyle/>
+          <a:p>
+            <a:pPr marL="0" indent="0" algn="l">
+              <a:buNone/>
+            </a:pPr>
+            <a:r>
+              <a:rPr lang="en-US" sz="1800" kern="0" spc="324" dirty="0">
+                <a:solidFill>
+                  <a:srgbClr val="3FE0D0"/>
+                </a:solidFill>
+                <a:latin typeface="JetBrains Mono" pitchFamily="34" charset="0"/>
+                <a:ea typeface="JetBrains Mono" pitchFamily="34" charset="-122"/>
+                <a:cs typeface="JetBrains Mono" pitchFamily="34" charset="-120"/>
+              </a:rPr>
+              <a:t>05 / EXAMPLES &amp; FORMAT</a:t>
+            </a:r>
+            <a:endParaRPr lang="en-US" sz="1800" dirty="0"/>
+          </a:p>
+        </p:txBody>
+      </p:sp>
+      <p:sp>
+        <p:nvSpPr>
+          <p:cNvPr id="7" name="Text 5"/>
+          <p:cNvSpPr/>
+          <p:nvPr/>
+        </p:nvSpPr>
+        <p:spPr>
+          <a:xfrm>
+            <a:off x="1343102" y="4337596"/>
+            <a:ext cx="4603699" cy="457200"/>
           </a:xfrm>
           <a:prstGeom prst="rect">
             <a:avLst/>
@@ -12635,35 +12763,35 @@
           <a:p>
             <a:pPr marL="0" indent="0" algn="l">
               <a:lnSpc>
-                <a:spcPct val="90000"/>
+                <a:spcPct val="100000"/>
               </a:lnSpc>
               <a:buNone/>
             </a:pPr>
             <a:r>
-              <a:rPr lang="en-US" sz="12600" b="1" kern="0" spc="-504" dirty="0">
-                <a:solidFill>
-                  <a:srgbClr val="F58220"/>
+              <a:rPr lang="en-US" sz="3300" b="1" kern="0" spc="-33" dirty="0">
+                <a:solidFill>
+                  <a:srgbClr val="2A2D38"/>
                 </a:solidFill>
                 <a:latin typeface="Montserrat" pitchFamily="34" charset="0"/>
                 <a:ea typeface="Montserrat" pitchFamily="34" charset="-122"/>
                 <a:cs typeface="Montserrat" pitchFamily="34" charset="-120"/>
               </a:rPr>
-              <a:t>5</a:t>
-            </a:r>
-            <a:endParaRPr lang="en-US" sz="12600" dirty="0"/>
-          </a:p>
-        </p:txBody>
-      </p:sp>
-      <p:sp>
-        <p:nvSpPr>
-          <p:cNvPr id="6" name="Text 4"/>
-          <p:cNvSpPr/>
-          <p:nvPr/>
-        </p:nvSpPr>
-        <p:spPr>
-          <a:xfrm>
-            <a:off x="952500" y="4943326"/>
-            <a:ext cx="5232349" cy="342900"/>
+              <a:t>Show, don't tell.</a:t>
+            </a:r>
+            <a:endParaRPr lang="en-US" sz="3300" dirty="0"/>
+          </a:p>
+        </p:txBody>
+      </p:sp>
+      <p:sp>
+        <p:nvSpPr>
+          <p:cNvPr id="8" name="Text 6"/>
+          <p:cNvSpPr/>
+          <p:nvPr/>
+        </p:nvSpPr>
+        <p:spPr>
+          <a:xfrm>
+            <a:off x="1343102" y="4947196"/>
+            <a:ext cx="4603699" cy="1752600"/>
           </a:xfrm>
           <a:prstGeom prst="rect">
             <a:avLst/>
@@ -12673,38 +12801,231 @@
         </p:spPr>
         <p:txBody>
           <a:bodyPr wrap="square" lIns="25400" tIns="25400" rIns="25400" bIns="25400" rtlCol="0" anchor="t">
-            <a:normAutofit lnSpcReduction="10000"/>
+            <a:normAutofit fontScale="92500" lnSpcReduction="20000"/>
           </a:bodyPr>
           <a:lstStyle/>
           <a:p>
             <a:pPr marL="0" indent="0" algn="l">
-              <a:buNone/>
-            </a:pPr>
-            <a:r>
-              <a:rPr lang="en-US" sz="1950" b="1" kern="0" spc="117" dirty="0">
+              <a:lnSpc>
+                <a:spcPct val="150000"/>
+              </a:lnSpc>
+              <a:buNone/>
+            </a:pPr>
+            <a:r>
+              <a:rPr lang="en-US" sz="1800" dirty="0">
+                <a:solidFill>
+                  <a:srgbClr val="3D404A"/>
+                </a:solidFill>
+                <a:latin typeface="Inter" pitchFamily="34" charset="0"/>
+                <a:ea typeface="Inter" pitchFamily="34" charset="-122"/>
+                <a:cs typeface="Inter" pitchFamily="34" charset="-120"/>
+              </a:rPr>
+              <a:t>Show what good looks like. A short before/after, a sample shape, an existing file to mirror. Examples beat adjectives every time.</a:t>
+            </a:r>
+            <a:endParaRPr lang="en-US" sz="1800" dirty="0"/>
+          </a:p>
+        </p:txBody>
+      </p:sp>
+      <p:sp>
+        <p:nvSpPr>
+          <p:cNvPr id="9" name="Shape 7"/>
+          <p:cNvSpPr/>
+          <p:nvPr/>
+        </p:nvSpPr>
+        <p:spPr>
+          <a:xfrm>
+            <a:off x="1343102" y="7271296"/>
+            <a:ext cx="4505687" cy="9525"/>
+          </a:xfrm>
+          <a:prstGeom prst="rect">
+            <a:avLst/>
+          </a:prstGeom>
+          <a:solidFill>
+            <a:srgbClr val="C9CBD1"/>
+          </a:solidFill>
+          <a:ln/>
+        </p:spPr>
+        <p:txBody>
+          <a:bodyPr/>
+          <a:lstStyle/>
+          <a:p>
+            <a:endParaRPr lang="en-US"/>
+          </a:p>
+        </p:txBody>
+      </p:sp>
+      <p:sp>
+        <p:nvSpPr>
+          <p:cNvPr id="10" name="Text 8"/>
+          <p:cNvSpPr/>
+          <p:nvPr/>
+        </p:nvSpPr>
+        <p:spPr>
+          <a:xfrm>
+            <a:off x="1343102" y="7509421"/>
+            <a:ext cx="4603699" cy="1752600"/>
+          </a:xfrm>
+          <a:prstGeom prst="rect">
+            <a:avLst/>
+          </a:prstGeom>
+          <a:noFill/>
+          <a:ln/>
+        </p:spPr>
+        <p:txBody>
+          <a:bodyPr wrap="square" lIns="25400" tIns="25400" rIns="25400" bIns="25400" rtlCol="0" anchor="t">
+            <a:normAutofit fontScale="92500" lnSpcReduction="20000"/>
+          </a:bodyPr>
+          <a:lstStyle/>
+          <a:p>
+            <a:pPr marL="0" indent="0" algn="l">
+              <a:lnSpc>
+                <a:spcPct val="150000"/>
+              </a:lnSpc>
+              <a:buNone/>
+            </a:pPr>
+            <a:r>
+              <a:rPr lang="en-US" sz="1800" b="1" dirty="0">
                 <a:solidFill>
                   <a:srgbClr val="6B6E78"/>
+                </a:solidFill>
+                <a:latin typeface="JetBrains Mono" pitchFamily="34" charset="0"/>
+                <a:ea typeface="JetBrains Mono" pitchFamily="34" charset="-122"/>
+                <a:cs typeface="JetBrains Mono" pitchFamily="34" charset="-120"/>
+              </a:rPr>
+              <a:t>Test: Did you give one concrete example or file the model can mirror? Adjectives are not examples.</a:t>
+            </a:r>
+            <a:endParaRPr lang="en-US" sz="1800" dirty="0"/>
+          </a:p>
+        </p:txBody>
+      </p:sp>
+      <p:sp>
+        <p:nvSpPr>
+          <p:cNvPr id="11" name="Shape 9"/>
+          <p:cNvSpPr/>
+          <p:nvPr/>
+        </p:nvSpPr>
+        <p:spPr>
+          <a:xfrm>
+            <a:off x="6527826" y="3499396"/>
+            <a:ext cx="5232349" cy="6305550"/>
+          </a:xfrm>
+          <a:prstGeom prst="roundRect">
+            <a:avLst>
+              <a:gd name="adj" fmla="val 3912"/>
+            </a:avLst>
+          </a:prstGeom>
+          <a:solidFill>
+            <a:srgbClr val="F7F5F1"/>
+          </a:solidFill>
+          <a:ln w="9525">
+            <a:solidFill>
+              <a:srgbClr val="E5E5E7"/>
+            </a:solidFill>
+            <a:prstDash val="solid"/>
+          </a:ln>
+        </p:spPr>
+        <p:txBody>
+          <a:bodyPr/>
+          <a:lstStyle/>
+          <a:p>
+            <a:endParaRPr lang="en-US"/>
+          </a:p>
+        </p:txBody>
+      </p:sp>
+      <p:sp>
+        <p:nvSpPr>
+          <p:cNvPr id="12" name="Text 10"/>
+          <p:cNvSpPr/>
+          <p:nvPr/>
+        </p:nvSpPr>
+        <p:spPr>
+          <a:xfrm>
+            <a:off x="6842151" y="3851821"/>
+            <a:ext cx="4603699" cy="333375"/>
+          </a:xfrm>
+          <a:prstGeom prst="rect">
+            <a:avLst/>
+          </a:prstGeom>
+          <a:noFill/>
+          <a:ln/>
+        </p:spPr>
+        <p:txBody>
+          <a:bodyPr wrap="square" lIns="25400" tIns="25400" rIns="25400" bIns="25400" rtlCol="0" anchor="t">
+            <a:normAutofit/>
+          </a:bodyPr>
+          <a:lstStyle/>
+          <a:p>
+            <a:pPr marL="0" indent="0" algn="l">
+              <a:buNone/>
+            </a:pPr>
+            <a:r>
+              <a:rPr lang="en-US" sz="1800" kern="0" spc="324" dirty="0">
+                <a:solidFill>
+                  <a:srgbClr val="3FE0D0"/>
+                </a:solidFill>
+                <a:latin typeface="JetBrains Mono" pitchFamily="34" charset="0"/>
+                <a:ea typeface="JetBrains Mono" pitchFamily="34" charset="-122"/>
+                <a:cs typeface="JetBrains Mono" pitchFamily="34" charset="-120"/>
+              </a:rPr>
+              <a:t>06 / AUDIENCE · PERSONA</a:t>
+            </a:r>
+            <a:endParaRPr lang="en-US" sz="1800" dirty="0"/>
+          </a:p>
+        </p:txBody>
+      </p:sp>
+      <p:sp>
+        <p:nvSpPr>
+          <p:cNvPr id="13" name="Text 11"/>
+          <p:cNvSpPr/>
+          <p:nvPr/>
+        </p:nvSpPr>
+        <p:spPr>
+          <a:xfrm>
+            <a:off x="6842151" y="4337596"/>
+            <a:ext cx="4603699" cy="457200"/>
+          </a:xfrm>
+          <a:prstGeom prst="rect">
+            <a:avLst/>
+          </a:prstGeom>
+          <a:noFill/>
+          <a:ln/>
+        </p:spPr>
+        <p:txBody>
+          <a:bodyPr wrap="square" lIns="25400" tIns="25400" rIns="25400" bIns="25400" rtlCol="0" anchor="t">
+            <a:normAutofit fontScale="92500" lnSpcReduction="20000"/>
+          </a:bodyPr>
+          <a:lstStyle/>
+          <a:p>
+            <a:pPr marL="0" indent="0" algn="l">
+              <a:lnSpc>
+                <a:spcPct val="100000"/>
+              </a:lnSpc>
+              <a:buNone/>
+            </a:pPr>
+            <a:r>
+              <a:rPr lang="en-US" sz="3300" b="1" kern="0" spc="-33" dirty="0">
+                <a:solidFill>
+                  <a:srgbClr val="2A2D38"/>
                 </a:solidFill>
                 <a:latin typeface="Montserrat" pitchFamily="34" charset="0"/>
                 <a:ea typeface="Montserrat" pitchFamily="34" charset="-122"/>
                 <a:cs typeface="Montserrat" pitchFamily="34" charset="-120"/>
               </a:rPr>
-              <a:t>EXAMPLES &amp; FORMAT</a:t>
-            </a:r>
-            <a:endParaRPr lang="en-US" sz="1950" dirty="0"/>
-          </a:p>
-        </p:txBody>
-      </p:sp>
-      <p:sp>
-        <p:nvSpPr>
-          <p:cNvPr id="7" name="Text 5"/>
-          <p:cNvSpPr/>
-          <p:nvPr/>
-        </p:nvSpPr>
-        <p:spPr>
-          <a:xfrm>
-            <a:off x="952500" y="5514826"/>
-            <a:ext cx="5232349" cy="700980"/>
+              <a:t>Voice locked.</a:t>
+            </a:r>
+            <a:endParaRPr lang="en-US" sz="3300" dirty="0"/>
+          </a:p>
+        </p:txBody>
+      </p:sp>
+      <p:sp>
+        <p:nvSpPr>
+          <p:cNvPr id="14" name="Text 12"/>
+          <p:cNvSpPr/>
+          <p:nvPr/>
+        </p:nvSpPr>
+        <p:spPr>
+          <a:xfrm>
+            <a:off x="6842151" y="4947196"/>
+            <a:ext cx="4603699" cy="1752600"/>
           </a:xfrm>
           <a:prstGeom prst="rect">
             <a:avLst/>
@@ -12714,26 +13035,26 @@
         </p:spPr>
         <p:txBody>
           <a:bodyPr wrap="square" lIns="25400" tIns="25400" rIns="25400" bIns="25400" rtlCol="0" anchor="t">
-            <a:normAutofit fontScale="62500" lnSpcReduction="20000"/>
+            <a:normAutofit fontScale="92500" lnSpcReduction="20000"/>
           </a:bodyPr>
           <a:lstStyle/>
           <a:p>
             <a:pPr marL="0" indent="0" algn="l">
               <a:lnSpc>
-                <a:spcPct val="145000"/>
+                <a:spcPct val="150000"/>
               </a:lnSpc>
               <a:buNone/>
             </a:pPr>
             <a:r>
               <a:rPr lang="en-US" sz="1800" dirty="0">
                 <a:solidFill>
-                  <a:srgbClr val="6B6E78"/>
+                  <a:srgbClr val="3D404A"/>
                 </a:solidFill>
                 <a:latin typeface="Inter" pitchFamily="34" charset="0"/>
                 <a:ea typeface="Inter" pitchFamily="34" charset="-122"/>
                 <a:cs typeface="Inter" pitchFamily="34" charset="-120"/>
               </a:rPr>
-              <a:t>Show what good looks like. A short before/after, a sample shape, an existing file to mirror. Examples beat adjectives every time.</a:t>
+              <a:t>Who reads it, who writes it. "Write like our internal devs talking to each other" yields wildly different output than the same prompt without that line.</a:t>
             </a:r>
             <a:endParaRPr lang="en-US" sz="1800" dirty="0"/>
           </a:p>
@@ -12741,14 +13062,41 @@
       </p:sp>
       <p:sp>
         <p:nvSpPr>
-          <p:cNvPr id="8" name="Text 6"/>
-          <p:cNvSpPr/>
-          <p:nvPr/>
-        </p:nvSpPr>
-        <p:spPr>
-          <a:xfrm>
-            <a:off x="6603950" y="3236565"/>
-            <a:ext cx="5232349" cy="1478161"/>
+          <p:cNvPr id="15" name="Shape 13"/>
+          <p:cNvSpPr/>
+          <p:nvPr/>
+        </p:nvSpPr>
+        <p:spPr>
+          <a:xfrm>
+            <a:off x="6842151" y="7271296"/>
+            <a:ext cx="4505687" cy="9525"/>
+          </a:xfrm>
+          <a:prstGeom prst="rect">
+            <a:avLst/>
+          </a:prstGeom>
+          <a:solidFill>
+            <a:srgbClr val="C9CBD1"/>
+          </a:solidFill>
+          <a:ln/>
+        </p:spPr>
+        <p:txBody>
+          <a:bodyPr/>
+          <a:lstStyle/>
+          <a:p>
+            <a:endParaRPr lang="en-US"/>
+          </a:p>
+        </p:txBody>
+      </p:sp>
+      <p:sp>
+        <p:nvSpPr>
+          <p:cNvPr id="16" name="Text 14"/>
+          <p:cNvSpPr/>
+          <p:nvPr/>
+        </p:nvSpPr>
+        <p:spPr>
+          <a:xfrm>
+            <a:off x="6842151" y="7509421"/>
+            <a:ext cx="4603699" cy="1752600"/>
           </a:xfrm>
           <a:prstGeom prst="rect">
             <a:avLst/>
@@ -12764,35 +13112,154 @@
           <a:p>
             <a:pPr marL="0" indent="0" algn="l">
               <a:lnSpc>
-                <a:spcPct val="90000"/>
+                <a:spcPct val="150000"/>
               </a:lnSpc>
               <a:buNone/>
             </a:pPr>
             <a:r>
-              <a:rPr lang="en-US" sz="12600" b="1" kern="0" spc="-504" dirty="0">
-                <a:solidFill>
-                  <a:srgbClr val="F58220"/>
+              <a:rPr lang="en-US" sz="1800" b="1" dirty="0">
+                <a:solidFill>
+                  <a:srgbClr val="6B6E78"/>
+                </a:solidFill>
+                <a:latin typeface="JetBrains Mono" pitchFamily="34" charset="0"/>
+                <a:ea typeface="JetBrains Mono" pitchFamily="34" charset="-122"/>
+                <a:cs typeface="JetBrains Mono" pitchFamily="34" charset="-120"/>
+              </a:rPr>
+              <a:t>Test: If you stripped the audience line, would the tone still be right? If yes, it isn't doing work.</a:t>
+            </a:r>
+            <a:endParaRPr lang="en-US" sz="1800" dirty="0"/>
+          </a:p>
+        </p:txBody>
+      </p:sp>
+      <p:sp>
+        <p:nvSpPr>
+          <p:cNvPr id="17" name="Shape 15"/>
+          <p:cNvSpPr/>
+          <p:nvPr/>
+        </p:nvSpPr>
+        <p:spPr>
+          <a:xfrm>
+            <a:off x="12026875" y="3499396"/>
+            <a:ext cx="5232349" cy="6305550"/>
+          </a:xfrm>
+          <a:prstGeom prst="roundRect">
+            <a:avLst>
+              <a:gd name="adj" fmla="val 3912"/>
+            </a:avLst>
+          </a:prstGeom>
+          <a:solidFill>
+            <a:srgbClr val="F7F5F1"/>
+          </a:solidFill>
+          <a:ln w="9525">
+            <a:solidFill>
+              <a:srgbClr val="E5E5E7"/>
+            </a:solidFill>
+            <a:prstDash val="solid"/>
+          </a:ln>
+        </p:spPr>
+        <p:txBody>
+          <a:bodyPr/>
+          <a:lstStyle/>
+          <a:p>
+            <a:endParaRPr lang="en-US"/>
+          </a:p>
+        </p:txBody>
+      </p:sp>
+      <p:sp>
+        <p:nvSpPr>
+          <p:cNvPr id="18" name="Text 16"/>
+          <p:cNvSpPr/>
+          <p:nvPr/>
+        </p:nvSpPr>
+        <p:spPr>
+          <a:xfrm>
+            <a:off x="12341200" y="3851821"/>
+            <a:ext cx="4603699" cy="333375"/>
+          </a:xfrm>
+          <a:prstGeom prst="rect">
+            <a:avLst/>
+          </a:prstGeom>
+          <a:noFill/>
+          <a:ln/>
+        </p:spPr>
+        <p:txBody>
+          <a:bodyPr wrap="square" lIns="25400" tIns="25400" rIns="25400" bIns="25400" rtlCol="0" anchor="t">
+            <a:normAutofit/>
+          </a:bodyPr>
+          <a:lstStyle/>
+          <a:p>
+            <a:pPr marL="0" indent="0" algn="l">
+              <a:buNone/>
+            </a:pPr>
+            <a:r>
+              <a:rPr lang="en-US" sz="1800" kern="0" spc="324" dirty="0">
+                <a:solidFill>
+                  <a:srgbClr val="3FE0D0"/>
+                </a:solidFill>
+                <a:latin typeface="JetBrains Mono" pitchFamily="34" charset="0"/>
+                <a:ea typeface="JetBrains Mono" pitchFamily="34" charset="-122"/>
+                <a:cs typeface="JetBrains Mono" pitchFamily="34" charset="-120"/>
+              </a:rPr>
+              <a:t>07 / SCOPE</a:t>
+            </a:r>
+            <a:endParaRPr lang="en-US" sz="1800" dirty="0"/>
+          </a:p>
+        </p:txBody>
+      </p:sp>
+      <p:sp>
+        <p:nvSpPr>
+          <p:cNvPr id="19" name="Text 17"/>
+          <p:cNvSpPr/>
+          <p:nvPr/>
+        </p:nvSpPr>
+        <p:spPr>
+          <a:xfrm>
+            <a:off x="12341200" y="4337596"/>
+            <a:ext cx="4603699" cy="457200"/>
+          </a:xfrm>
+          <a:prstGeom prst="rect">
+            <a:avLst/>
+          </a:prstGeom>
+          <a:noFill/>
+          <a:ln/>
+        </p:spPr>
+        <p:txBody>
+          <a:bodyPr wrap="square" lIns="25400" tIns="25400" rIns="25400" bIns="25400" rtlCol="0" anchor="t">
+            <a:normAutofit fontScale="92500" lnSpcReduction="20000"/>
+          </a:bodyPr>
+          <a:lstStyle/>
+          <a:p>
+            <a:pPr marL="0" indent="0" algn="l">
+              <a:lnSpc>
+                <a:spcPct val="100000"/>
+              </a:lnSpc>
+              <a:buNone/>
+            </a:pPr>
+            <a:r>
+              <a:rPr lang="en-US" sz="3300" b="1" kern="0" spc="-33" dirty="0">
+                <a:solidFill>
+                  <a:srgbClr val="2A2D38"/>
                 </a:solidFill>
                 <a:latin typeface="Montserrat" pitchFamily="34" charset="0"/>
                 <a:ea typeface="Montserrat" pitchFamily="34" charset="-122"/>
                 <a:cs typeface="Montserrat" pitchFamily="34" charset="-120"/>
               </a:rPr>
-              <a:t>6</a:t>
-            </a:r>
-            <a:endParaRPr lang="en-US" sz="12600" dirty="0"/>
-          </a:p>
-        </p:txBody>
-      </p:sp>
-      <p:sp>
-        <p:nvSpPr>
-          <p:cNvPr id="9" name="Text 7"/>
-          <p:cNvSpPr/>
-          <p:nvPr/>
-        </p:nvSpPr>
-        <p:spPr>
-          <a:xfrm>
-            <a:off x="6603950" y="4943326"/>
-            <a:ext cx="5232349" cy="342900"/>
+              <a:t>Boxed in.</a:t>
+            </a:r>
+            <a:endParaRPr lang="en-US" sz="3300" dirty="0"/>
+          </a:p>
+        </p:txBody>
+      </p:sp>
+      <p:sp>
+        <p:nvSpPr>
+          <p:cNvPr id="20" name="Text 18"/>
+          <p:cNvSpPr/>
+          <p:nvPr/>
+        </p:nvSpPr>
+        <p:spPr>
+          <a:xfrm>
+            <a:off x="12341200" y="4947196"/>
+            <a:ext cx="4603699" cy="1752600"/>
           </a:xfrm>
           <a:prstGeom prst="rect">
             <a:avLst/>
@@ -12802,67 +13269,26 @@
         </p:spPr>
         <p:txBody>
           <a:bodyPr wrap="square" lIns="25400" tIns="25400" rIns="25400" bIns="25400" rtlCol="0" anchor="t">
-            <a:normAutofit lnSpcReduction="10000"/>
-          </a:bodyPr>
-          <a:lstStyle/>
-          <a:p>
-            <a:pPr marL="0" indent="0" algn="l">
-              <a:buNone/>
-            </a:pPr>
-            <a:r>
-              <a:rPr lang="en-US" sz="1950" b="1" kern="0" spc="117" dirty="0">
-                <a:solidFill>
-                  <a:srgbClr val="6B6E78"/>
-                </a:solidFill>
-                <a:latin typeface="Montserrat" pitchFamily="34" charset="0"/>
-                <a:ea typeface="Montserrat" pitchFamily="34" charset="-122"/>
-                <a:cs typeface="Montserrat" pitchFamily="34" charset="-120"/>
-              </a:rPr>
-              <a:t>AUDIENCE &amp; PERSONA</a:t>
-            </a:r>
-            <a:endParaRPr lang="en-US" sz="1950" dirty="0"/>
-          </a:p>
-        </p:txBody>
-      </p:sp>
-      <p:sp>
-        <p:nvSpPr>
-          <p:cNvPr id="10" name="Text 8"/>
-          <p:cNvSpPr/>
-          <p:nvPr/>
-        </p:nvSpPr>
-        <p:spPr>
-          <a:xfrm>
-            <a:off x="6603950" y="5514826"/>
-            <a:ext cx="5232349" cy="700980"/>
-          </a:xfrm>
-          <a:prstGeom prst="rect">
-            <a:avLst/>
-          </a:prstGeom>
-          <a:noFill/>
-          <a:ln/>
-        </p:spPr>
-        <p:txBody>
-          <a:bodyPr wrap="square" lIns="25400" tIns="25400" rIns="25400" bIns="25400" rtlCol="0" anchor="t">
-            <a:normAutofit fontScale="62500" lnSpcReduction="20000"/>
+            <a:normAutofit fontScale="92500" lnSpcReduction="20000"/>
           </a:bodyPr>
           <a:lstStyle/>
           <a:p>
             <a:pPr marL="0" indent="0" algn="l">
               <a:lnSpc>
-                <a:spcPct val="145000"/>
+                <a:spcPct val="150000"/>
               </a:lnSpc>
               <a:buNone/>
             </a:pPr>
             <a:r>
               <a:rPr lang="en-US" sz="1800" dirty="0">
                 <a:solidFill>
-                  <a:srgbClr val="6B6E78"/>
+                  <a:srgbClr val="3D404A"/>
                 </a:solidFill>
                 <a:latin typeface="Inter" pitchFamily="34" charset="0"/>
                 <a:ea typeface="Inter" pitchFamily="34" charset="-122"/>
                 <a:cs typeface="Inter" pitchFamily="34" charset="-120"/>
               </a:rPr>
-              <a:t>Who reads it, who writes it. "Write like our internal devs talking to each other" yields wildly different output than the same prompt without that line.</a:t>
+              <a:t>Where the task starts and stops. Without a scope, the model expands. "Just the login route" prevents drift into signup, password-reset, and a refactor you didn't ask for.</a:t>
             </a:r>
             <a:endParaRPr lang="en-US" sz="1800" dirty="0"/>
           </a:p>
@@ -12870,14 +13296,41 @@
       </p:sp>
       <p:sp>
         <p:nvSpPr>
-          <p:cNvPr id="11" name="Text 9"/>
-          <p:cNvSpPr/>
-          <p:nvPr/>
-        </p:nvSpPr>
-        <p:spPr>
-          <a:xfrm>
-            <a:off x="12255401" y="3236565"/>
-            <a:ext cx="5232349" cy="1478161"/>
+          <p:cNvPr id="21" name="Shape 19"/>
+          <p:cNvSpPr/>
+          <p:nvPr/>
+        </p:nvSpPr>
+        <p:spPr>
+          <a:xfrm>
+            <a:off x="12341200" y="7271296"/>
+            <a:ext cx="4505687" cy="9525"/>
+          </a:xfrm>
+          <a:prstGeom prst="rect">
+            <a:avLst/>
+          </a:prstGeom>
+          <a:solidFill>
+            <a:srgbClr val="C9CBD1"/>
+          </a:solidFill>
+          <a:ln/>
+        </p:spPr>
+        <p:txBody>
+          <a:bodyPr/>
+          <a:lstStyle/>
+          <a:p>
+            <a:endParaRPr lang="en-US"/>
+          </a:p>
+        </p:txBody>
+      </p:sp>
+      <p:sp>
+        <p:nvSpPr>
+          <p:cNvPr id="22" name="Text 20"/>
+          <p:cNvSpPr/>
+          <p:nvPr/>
+        </p:nvSpPr>
+        <p:spPr>
+          <a:xfrm>
+            <a:off x="12341200" y="7509421"/>
+            <a:ext cx="4603699" cy="1752600"/>
           </a:xfrm>
           <a:prstGeom prst="rect">
             <a:avLst/>
@@ -12893,105 +13346,20 @@
           <a:p>
             <a:pPr marL="0" indent="0" algn="l">
               <a:lnSpc>
-                <a:spcPct val="90000"/>
+                <a:spcPct val="150000"/>
               </a:lnSpc>
               <a:buNone/>
             </a:pPr>
             <a:r>
-              <a:rPr lang="en-US" sz="12600" b="1" kern="0" spc="-504" dirty="0">
-                <a:solidFill>
-                  <a:srgbClr val="F58220"/>
-                </a:solidFill>
-                <a:latin typeface="Montserrat" pitchFamily="34" charset="0"/>
-                <a:ea typeface="Montserrat" pitchFamily="34" charset="-122"/>
-                <a:cs typeface="Montserrat" pitchFamily="34" charset="-120"/>
-              </a:rPr>
-              <a:t>7</a:t>
-            </a:r>
-            <a:endParaRPr lang="en-US" sz="12600" dirty="0"/>
-          </a:p>
-        </p:txBody>
-      </p:sp>
-      <p:sp>
-        <p:nvSpPr>
-          <p:cNvPr id="12" name="Text 10"/>
-          <p:cNvSpPr/>
-          <p:nvPr/>
-        </p:nvSpPr>
-        <p:spPr>
-          <a:xfrm>
-            <a:off x="12255401" y="4943326"/>
-            <a:ext cx="5232349" cy="342900"/>
-          </a:xfrm>
-          <a:prstGeom prst="rect">
-            <a:avLst/>
-          </a:prstGeom>
-          <a:noFill/>
-          <a:ln/>
-        </p:spPr>
-        <p:txBody>
-          <a:bodyPr wrap="square" lIns="25400" tIns="25400" rIns="25400" bIns="25400" rtlCol="0" anchor="t">
-            <a:normAutofit lnSpcReduction="10000"/>
-          </a:bodyPr>
-          <a:lstStyle/>
-          <a:p>
-            <a:pPr marL="0" indent="0" algn="l">
-              <a:buNone/>
-            </a:pPr>
-            <a:r>
-              <a:rPr lang="en-US" sz="1950" b="1" kern="0" spc="117" dirty="0">
+              <a:rPr lang="en-US" sz="1800" b="1" dirty="0">
                 <a:solidFill>
                   <a:srgbClr val="6B6E78"/>
                 </a:solidFill>
-                <a:latin typeface="Montserrat" pitchFamily="34" charset="0"/>
-                <a:ea typeface="Montserrat" pitchFamily="34" charset="-122"/>
-                <a:cs typeface="Montserrat" pitchFamily="34" charset="-120"/>
-              </a:rPr>
-              <a:t>SCOPE</a:t>
-            </a:r>
-            <a:endParaRPr lang="en-US" sz="1950" dirty="0"/>
-          </a:p>
-        </p:txBody>
-      </p:sp>
-      <p:sp>
-        <p:nvSpPr>
-          <p:cNvPr id="13" name="Text 11"/>
-          <p:cNvSpPr/>
-          <p:nvPr/>
-        </p:nvSpPr>
-        <p:spPr>
-          <a:xfrm>
-            <a:off x="12255401" y="5514826"/>
-            <a:ext cx="5232349" cy="700980"/>
-          </a:xfrm>
-          <a:prstGeom prst="rect">
-            <a:avLst/>
-          </a:prstGeom>
-          <a:noFill/>
-          <a:ln/>
-        </p:spPr>
-        <p:txBody>
-          <a:bodyPr wrap="square" lIns="25400" tIns="25400" rIns="25400" bIns="25400" rtlCol="0" anchor="t">
-            <a:normAutofit fontScale="62500" lnSpcReduction="20000"/>
-          </a:bodyPr>
-          <a:lstStyle/>
-          <a:p>
-            <a:pPr marL="0" indent="0" algn="l">
-              <a:lnSpc>
-                <a:spcPct val="145000"/>
-              </a:lnSpc>
-              <a:buNone/>
-            </a:pPr>
-            <a:r>
-              <a:rPr lang="en-US" sz="1800" dirty="0">
-                <a:solidFill>
-                  <a:srgbClr val="6B6E78"/>
-                </a:solidFill>
-                <a:latin typeface="Inter" pitchFamily="34" charset="0"/>
-                <a:ea typeface="Inter" pitchFamily="34" charset="-122"/>
-                <a:cs typeface="Inter" pitchFamily="34" charset="-120"/>
-              </a:rPr>
-              <a:t>Where the task starts and stops. Without a scope, the model expands. "Just the login route" prevents drift into signup, password-reset, and a refactor you didn't ask for.</a:t>
+                <a:latin typeface="JetBrains Mono" pitchFamily="34" charset="0"/>
+                <a:ea typeface="JetBrains Mono" pitchFamily="34" charset="-122"/>
+                <a:cs typeface="JetBrains Mono" pitchFamily="34" charset="-120"/>
+              </a:rPr>
+              <a:t>Test: Did you say where the task ends? Without it, the model will keep going.</a:t>
             </a:r>
             <a:endParaRPr lang="en-US" sz="1800" dirty="0"/>
           </a:p>
@@ -14876,6 +15244,1786 @@
 </file>
 
 <file path=ppt/slides/slide27.xml><?xml version="1.0" encoding="utf-8"?>
+<p:sld xmlns:a="http://schemas.openxmlformats.org/drawingml/2006/main" xmlns:r="http://schemas.openxmlformats.org/officeDocument/2006/relationships" xmlns:p="http://schemas.openxmlformats.org/presentationml/2006/main">
+  <p:cSld>
+    <p:spTree>
+      <p:nvGrpSpPr>
+        <p:cNvPr id="1" name=""/>
+        <p:cNvGrpSpPr/>
+        <p:nvPr/>
+      </p:nvGrpSpPr>
+      <p:grpSpPr>
+        <a:xfrm>
+          <a:off x="0" y="0"/>
+          <a:ext cx="0" cy="0"/>
+          <a:chOff x="0" y="0"/>
+          <a:chExt cx="0" cy="0"/>
+        </a:xfrm>
+      </p:grpSpPr>
+      <p:sp>
+        <p:nvSpPr>
+          <p:cNvPr id="2" name="Text 0"/>
+          <p:cNvSpPr/>
+          <p:nvPr/>
+        </p:nvSpPr>
+        <p:spPr>
+          <a:xfrm>
+            <a:off x="952500" y="952500"/>
+            <a:ext cx="16874490" cy="342900"/>
+          </a:xfrm>
+          <a:prstGeom prst="rect">
+            <a:avLst/>
+          </a:prstGeom>
+          <a:noFill/>
+          <a:ln/>
+        </p:spPr>
+        <p:txBody>
+          <a:bodyPr wrap="square" lIns="25400" tIns="25400" rIns="25400" bIns="25400" rtlCol="0" anchor="t">
+            <a:normAutofit lnSpcReduction="10000"/>
+          </a:bodyPr>
+          <a:lstStyle/>
+          <a:p>
+            <a:pPr marL="0" indent="0" algn="l">
+              <a:buNone/>
+            </a:pPr>
+            <a:r>
+              <a:rPr lang="en-US" sz="1950" b="1" kern="0" spc="429" dirty="0">
+                <a:solidFill>
+                  <a:srgbClr val="F58220"/>
+                </a:solidFill>
+                <a:latin typeface="Montserrat" pitchFamily="34" charset="0"/>
+                <a:ea typeface="Montserrat" pitchFamily="34" charset="-122"/>
+                <a:cs typeface="Montserrat" pitchFamily="34" charset="-120"/>
+              </a:rPr>
+              <a:t>SCOPE NOTE · WHAT WE WON'T COVER</a:t>
+            </a:r>
+            <a:endParaRPr lang="en-US" sz="1950" dirty="0"/>
+          </a:p>
+        </p:txBody>
+      </p:sp>
+      <p:sp>
+        <p:nvSpPr>
+          <p:cNvPr id="3" name="Text 1"/>
+          <p:cNvSpPr/>
+          <p:nvPr/>
+        </p:nvSpPr>
+        <p:spPr>
+          <a:xfrm>
+            <a:off x="952500" y="1447800"/>
+            <a:ext cx="16874490" cy="798165"/>
+          </a:xfrm>
+          <a:prstGeom prst="rect">
+            <a:avLst/>
+          </a:prstGeom>
+          <a:noFill/>
+          <a:ln/>
+        </p:spPr>
+        <p:txBody>
+          <a:bodyPr wrap="square" lIns="25400" tIns="25400" rIns="25400" bIns="25400" rtlCol="0" anchor="t">
+            <a:normAutofit fontScale="92500" lnSpcReduction="20000"/>
+          </a:bodyPr>
+          <a:lstStyle/>
+          <a:p>
+            <a:pPr marL="0" indent="0" algn="l">
+              <a:lnSpc>
+                <a:spcPct val="105000"/>
+              </a:lnSpc>
+              <a:buNone/>
+            </a:pPr>
+            <a:r>
+              <a:rPr lang="en-US" sz="5700" b="1" kern="0" spc="-85" dirty="0">
+                <a:solidFill>
+                  <a:srgbClr val="2A2D38"/>
+                </a:solidFill>
+                <a:latin typeface="Montserrat" pitchFamily="34" charset="0"/>
+                <a:ea typeface="Montserrat" pitchFamily="34" charset="-122"/>
+                <a:cs typeface="Montserrat" pitchFamily="34" charset="-120"/>
+              </a:rPr>
+              <a:t>This is a Jumpstart, not the tour.</a:t>
+            </a:r>
+            <a:endParaRPr lang="en-US" sz="5700" dirty="0"/>
+          </a:p>
+        </p:txBody>
+      </p:sp>
+      <p:sp>
+        <p:nvSpPr>
+          <p:cNvPr id="4" name="Text 2"/>
+          <p:cNvSpPr/>
+          <p:nvPr/>
+        </p:nvSpPr>
+        <p:spPr>
+          <a:xfrm>
+            <a:off x="952500" y="2398365"/>
+            <a:ext cx="13735050" cy="491430"/>
+          </a:xfrm>
+          <a:prstGeom prst="rect">
+            <a:avLst/>
+          </a:prstGeom>
+          <a:noFill/>
+          <a:ln/>
+        </p:spPr>
+        <p:txBody>
+          <a:bodyPr wrap="square" lIns="25400" tIns="25400" rIns="25400" bIns="25400" rtlCol="0" anchor="t">
+            <a:normAutofit fontScale="77500" lnSpcReduction="20000"/>
+          </a:bodyPr>
+          <a:lstStyle/>
+          <a:p>
+            <a:pPr marL="0" indent="0" algn="l">
+              <a:lnSpc>
+                <a:spcPct val="140000"/>
+              </a:lnSpc>
+              <a:buNone/>
+            </a:pPr>
+            <a:r>
+              <a:rPr lang="en-US" sz="2550" dirty="0">
+                <a:solidFill>
+                  <a:srgbClr val="6B6E78"/>
+                </a:solidFill>
+                <a:latin typeface="Inter" pitchFamily="34" charset="0"/>
+                <a:ea typeface="Inter" pitchFamily="34" charset="-122"/>
+                <a:cs typeface="Inter" pitchFamily="34" charset="-120"/>
+              </a:rPr>
+              <a:t>Claude Code and Cowork ship new capabilities every week. We're laying the foundation — not touring every advanced feature. Some we may graze. Most we won't.</a:t>
+            </a:r>
+            <a:endParaRPr lang="en-US" sz="2550" dirty="0"/>
+          </a:p>
+        </p:txBody>
+      </p:sp>
+      <p:sp>
+        <p:nvSpPr>
+          <p:cNvPr id="5" name="Shape 3"/>
+          <p:cNvSpPr/>
+          <p:nvPr/>
+        </p:nvSpPr>
+        <p:spPr>
+          <a:xfrm>
+            <a:off x="952500" y="3499396"/>
+            <a:ext cx="3895725" cy="6305550"/>
+          </a:xfrm>
+          <a:prstGeom prst="roundRect">
+            <a:avLst>
+              <a:gd name="adj" fmla="val 3912"/>
+            </a:avLst>
+          </a:prstGeom>
+          <a:solidFill>
+            <a:srgbClr val="F7F5F1"/>
+          </a:solidFill>
+          <a:ln w="9525">
+            <a:solidFill>
+              <a:srgbClr val="E5E5E7"/>
+            </a:solidFill>
+            <a:prstDash val="solid"/>
+          </a:ln>
+        </p:spPr>
+        <p:txBody>
+          <a:bodyPr/>
+          <a:lstStyle/>
+          <a:p>
+            <a:endParaRPr lang="en-US"/>
+          </a:p>
+        </p:txBody>
+      </p:sp>
+      <p:sp>
+        <p:nvSpPr>
+          <p:cNvPr id="6" name="Text 4"/>
+          <p:cNvSpPr/>
+          <p:nvPr/>
+        </p:nvSpPr>
+        <p:spPr>
+          <a:xfrm>
+            <a:off x="1266825" y="3851821"/>
+            <a:ext cx="3365087" cy="333375"/>
+          </a:xfrm>
+          <a:prstGeom prst="rect">
+            <a:avLst/>
+          </a:prstGeom>
+          <a:noFill/>
+          <a:ln/>
+        </p:spPr>
+        <p:txBody>
+          <a:bodyPr wrap="square" lIns="25400" tIns="25400" rIns="25400" bIns="25400" rtlCol="0" anchor="t">
+            <a:normAutofit/>
+          </a:bodyPr>
+          <a:lstStyle/>
+          <a:p>
+            <a:pPr marL="0" indent="0" algn="l">
+              <a:buNone/>
+            </a:pPr>
+            <a:r>
+              <a:rPr lang="en-US" sz="1800" kern="0" spc="324" dirty="0">
+                <a:solidFill>
+                  <a:srgbClr val="3FE0D0"/>
+                </a:solidFill>
+                <a:latin typeface="JetBrains Mono" pitchFamily="34" charset="0"/>
+                <a:ea typeface="JetBrains Mono" pitchFamily="34" charset="-122"/>
+                <a:cs typeface="JetBrains Mono" pitchFamily="34" charset="-120"/>
+              </a:rPr>
+              <a:t>01 / SUBAGENTS &amp; HOOKS</a:t>
+            </a:r>
+            <a:endParaRPr lang="en-US" sz="1800" dirty="0"/>
+          </a:p>
+        </p:txBody>
+      </p:sp>
+      <p:sp>
+        <p:nvSpPr>
+          <p:cNvPr id="7" name="Text 5"/>
+          <p:cNvSpPr/>
+          <p:nvPr/>
+        </p:nvSpPr>
+        <p:spPr>
+          <a:xfrm>
+            <a:off x="1266825" y="4337596"/>
+            <a:ext cx="3365087" cy="457200"/>
+          </a:xfrm>
+          <a:prstGeom prst="rect">
+            <a:avLst/>
+          </a:prstGeom>
+          <a:noFill/>
+          <a:ln/>
+        </p:spPr>
+        <p:txBody>
+          <a:bodyPr wrap="square" lIns="25400" tIns="25400" rIns="25400" bIns="25400" rtlCol="0" anchor="t">
+            <a:normAutofit fontScale="92500" lnSpcReduction="20000"/>
+          </a:bodyPr>
+          <a:lstStyle/>
+          <a:p>
+            <a:pPr marL="0" indent="0" algn="l">
+              <a:lnSpc>
+                <a:spcPct val="100000"/>
+              </a:lnSpc>
+              <a:buNone/>
+            </a:pPr>
+            <a:r>
+              <a:rPr lang="en-US" sz="3300" b="1" kern="0" spc="-33" dirty="0">
+                <a:solidFill>
+                  <a:srgbClr val="2A2D38"/>
+                </a:solidFill>
+                <a:latin typeface="Montserrat" pitchFamily="34" charset="0"/>
+                <a:ea typeface="Montserrat" pitchFamily="34" charset="-122"/>
+                <a:cs typeface="Montserrat" pitchFamily="34" charset="-120"/>
+              </a:rPr>
+              <a:t>Skim only.</a:t>
+            </a:r>
+            <a:endParaRPr lang="en-US" sz="3300" dirty="0"/>
+          </a:p>
+        </p:txBody>
+      </p:sp>
+      <p:sp>
+        <p:nvSpPr>
+          <p:cNvPr id="8" name="Text 6"/>
+          <p:cNvSpPr/>
+          <p:nvPr/>
+        </p:nvSpPr>
+        <p:spPr>
+          <a:xfrm>
+            <a:off x="1266825" y="4947196"/>
+            <a:ext cx="3365087" cy="1752600"/>
+          </a:xfrm>
+          <a:prstGeom prst="rect">
+            <a:avLst/>
+          </a:prstGeom>
+          <a:noFill/>
+          <a:ln/>
+        </p:spPr>
+        <p:txBody>
+          <a:bodyPr wrap="square" lIns="25400" tIns="25400" rIns="25400" bIns="25400" rtlCol="0" anchor="t">
+            <a:normAutofit fontScale="92500" lnSpcReduction="20000"/>
+          </a:bodyPr>
+          <a:lstStyle/>
+          <a:p>
+            <a:pPr marL="0" indent="0" algn="l">
+              <a:lnSpc>
+                <a:spcPct val="150000"/>
+              </a:lnSpc>
+              <a:buNone/>
+            </a:pPr>
+            <a:r>
+              <a:rPr lang="en-US" sz="1800" dirty="0">
+                <a:solidFill>
+                  <a:srgbClr val="3D404A"/>
+                </a:solidFill>
+                <a:latin typeface="Inter" pitchFamily="34" charset="0"/>
+                <a:ea typeface="Inter" pitchFamily="34" charset="-122"/>
+                <a:cs typeface="Inter" pitchFamily="34" charset="-120"/>
+              </a:rPr>
+              <a:t>Spawning specialized subagents in parallel. Wiring hooks that fire on tool calls. Powerful — but a rabbit hole that eats a workshop.</a:t>
+            </a:r>
+            <a:endParaRPr lang="en-US" sz="1800" dirty="0"/>
+          </a:p>
+        </p:txBody>
+      </p:sp>
+      <p:sp>
+        <p:nvSpPr>
+          <p:cNvPr id="9" name="Shape 7"/>
+          <p:cNvSpPr/>
+          <p:nvPr/>
+        </p:nvSpPr>
+        <p:spPr>
+          <a:xfrm>
+            <a:off x="1266825" y="7271296"/>
+            <a:ext cx="3267075" cy="9525"/>
+          </a:xfrm>
+          <a:prstGeom prst="rect">
+            <a:avLst/>
+          </a:prstGeom>
+          <a:solidFill>
+            <a:srgbClr val="C9CBD1"/>
+          </a:solidFill>
+          <a:ln/>
+        </p:spPr>
+        <p:txBody>
+          <a:bodyPr/>
+          <a:lstStyle/>
+          <a:p>
+            <a:endParaRPr lang="en-US"/>
+          </a:p>
+        </p:txBody>
+      </p:sp>
+      <p:sp>
+        <p:nvSpPr>
+          <p:cNvPr id="10" name="Text 8"/>
+          <p:cNvSpPr/>
+          <p:nvPr/>
+        </p:nvSpPr>
+        <p:spPr>
+          <a:xfrm>
+            <a:off x="1266825" y="7509421"/>
+            <a:ext cx="3365087" cy="1752600"/>
+          </a:xfrm>
+          <a:prstGeom prst="rect">
+            <a:avLst/>
+          </a:prstGeom>
+          <a:noFill/>
+          <a:ln/>
+        </p:spPr>
+        <p:txBody>
+          <a:bodyPr wrap="square" lIns="25400" tIns="25400" rIns="25400" bIns="25400" rtlCol="0" anchor="t">
+            <a:normAutofit fontScale="92500" lnSpcReduction="20000"/>
+          </a:bodyPr>
+          <a:lstStyle/>
+          <a:p>
+            <a:pPr marL="0" indent="0" algn="l">
+              <a:lnSpc>
+                <a:spcPct val="150000"/>
+              </a:lnSpc>
+              <a:buNone/>
+            </a:pPr>
+            <a:r>
+              <a:rPr lang="en-US" sz="1800" b="1" dirty="0">
+                <a:solidFill>
+                  <a:srgbClr val="6B6E78"/>
+                </a:solidFill>
+                <a:latin typeface="JetBrains Mono" pitchFamily="34" charset="0"/>
+                <a:ea typeface="JetBrains Mono" pitchFamily="34" charset="-122"/>
+                <a:cs typeface="JetBrains Mono" pitchFamily="34" charset="-120"/>
+              </a:rPr>
+              <a:t>Why later: get fluent with one agent before you orchestrate ten.</a:t>
+            </a:r>
+            <a:endParaRPr lang="en-US" sz="1800" dirty="0"/>
+          </a:p>
+        </p:txBody>
+      </p:sp>
+      <p:sp>
+        <p:nvSpPr>
+          <p:cNvPr id="11" name="Shape 9"/>
+          <p:cNvSpPr/>
+          <p:nvPr/>
+        </p:nvSpPr>
+        <p:spPr>
+          <a:xfrm>
+            <a:off x="5114925" y="3499396"/>
+            <a:ext cx="3895725" cy="6305550"/>
+          </a:xfrm>
+          <a:prstGeom prst="roundRect">
+            <a:avLst>
+              <a:gd name="adj" fmla="val 3912"/>
+            </a:avLst>
+          </a:prstGeom>
+          <a:solidFill>
+            <a:srgbClr val="F7F5F1"/>
+          </a:solidFill>
+          <a:ln w="9525">
+            <a:solidFill>
+              <a:srgbClr val="E5E5E7"/>
+            </a:solidFill>
+            <a:prstDash val="solid"/>
+          </a:ln>
+        </p:spPr>
+        <p:txBody>
+          <a:bodyPr/>
+          <a:lstStyle/>
+          <a:p>
+            <a:endParaRPr lang="en-US"/>
+          </a:p>
+        </p:txBody>
+      </p:sp>
+      <p:sp>
+        <p:nvSpPr>
+          <p:cNvPr id="12" name="Text 10"/>
+          <p:cNvSpPr/>
+          <p:nvPr/>
+        </p:nvSpPr>
+        <p:spPr>
+          <a:xfrm>
+            <a:off x="5429250" y="3851821"/>
+            <a:ext cx="3365087" cy="333375"/>
+          </a:xfrm>
+          <a:prstGeom prst="rect">
+            <a:avLst/>
+          </a:prstGeom>
+          <a:noFill/>
+          <a:ln/>
+        </p:spPr>
+        <p:txBody>
+          <a:bodyPr wrap="square" lIns="25400" tIns="25400" rIns="25400" bIns="25400" rtlCol="0" anchor="t">
+            <a:normAutofit/>
+          </a:bodyPr>
+          <a:lstStyle/>
+          <a:p>
+            <a:pPr marL="0" indent="0" algn="l">
+              <a:buNone/>
+            </a:pPr>
+            <a:r>
+              <a:rPr lang="en-US" sz="1800" kern="0" spc="324" dirty="0">
+                <a:solidFill>
+                  <a:srgbClr val="3FE0D0"/>
+                </a:solidFill>
+                <a:latin typeface="JetBrains Mono" pitchFamily="34" charset="0"/>
+                <a:ea typeface="JetBrains Mono" pitchFamily="34" charset="-122"/>
+                <a:cs typeface="JetBrains Mono" pitchFamily="34" charset="-120"/>
+              </a:rPr>
+              <a:t>02 / MCPs &amp; CONNECTORS</a:t>
+            </a:r>
+            <a:endParaRPr lang="en-US" sz="1800" dirty="0"/>
+          </a:p>
+        </p:txBody>
+      </p:sp>
+      <p:sp>
+        <p:nvSpPr>
+          <p:cNvPr id="13" name="Text 11"/>
+          <p:cNvSpPr/>
+          <p:nvPr/>
+        </p:nvSpPr>
+        <p:spPr>
+          <a:xfrm>
+            <a:off x="5429250" y="4337596"/>
+            <a:ext cx="3365087" cy="457200"/>
+          </a:xfrm>
+          <a:prstGeom prst="rect">
+            <a:avLst/>
+          </a:prstGeom>
+          <a:noFill/>
+          <a:ln/>
+        </p:spPr>
+        <p:txBody>
+          <a:bodyPr wrap="square" lIns="25400" tIns="25400" rIns="25400" bIns="25400" rtlCol="0" anchor="t">
+            <a:normAutofit fontScale="92500" lnSpcReduction="20000"/>
+          </a:bodyPr>
+          <a:lstStyle/>
+          <a:p>
+            <a:pPr marL="0" indent="0" algn="l">
+              <a:lnSpc>
+                <a:spcPct val="100000"/>
+              </a:lnSpc>
+              <a:buNone/>
+            </a:pPr>
+            <a:r>
+              <a:rPr lang="en-US" sz="3300" b="1" kern="0" spc="-33" dirty="0">
+                <a:solidFill>
+                  <a:srgbClr val="2A2D38"/>
+                </a:solidFill>
+                <a:latin typeface="Montserrat" pitchFamily="34" charset="0"/>
+                <a:ea typeface="Montserrat" pitchFamily="34" charset="-122"/>
+                <a:cs typeface="Montserrat" pitchFamily="34" charset="-120"/>
+              </a:rPr>
+              <a:t>We may graze.</a:t>
+            </a:r>
+            <a:endParaRPr lang="en-US" sz="3300" dirty="0"/>
+          </a:p>
+        </p:txBody>
+      </p:sp>
+      <p:sp>
+        <p:nvSpPr>
+          <p:cNvPr id="14" name="Text 12"/>
+          <p:cNvSpPr/>
+          <p:nvPr/>
+        </p:nvSpPr>
+        <p:spPr>
+          <a:xfrm>
+            <a:off x="5429250" y="4947196"/>
+            <a:ext cx="3365087" cy="1752600"/>
+          </a:xfrm>
+          <a:prstGeom prst="rect">
+            <a:avLst/>
+          </a:prstGeom>
+          <a:noFill/>
+          <a:ln/>
+        </p:spPr>
+        <p:txBody>
+          <a:bodyPr wrap="square" lIns="25400" tIns="25400" rIns="25400" bIns="25400" rtlCol="0" anchor="t">
+            <a:normAutofit fontScale="92500" lnSpcReduction="20000"/>
+          </a:bodyPr>
+          <a:lstStyle/>
+          <a:p>
+            <a:pPr marL="0" indent="0" algn="l">
+              <a:lnSpc>
+                <a:spcPct val="150000"/>
+              </a:lnSpc>
+              <a:buNone/>
+            </a:pPr>
+            <a:r>
+              <a:rPr lang="en-US" sz="1800" dirty="0">
+                <a:solidFill>
+                  <a:srgbClr val="3D404A"/>
+                </a:solidFill>
+                <a:latin typeface="Inter" pitchFamily="34" charset="0"/>
+                <a:ea typeface="Inter" pitchFamily="34" charset="-122"/>
+                <a:cs typeface="Inter" pitchFamily="34" charset="-120"/>
+              </a:rPr>
+              <a:t>Plugging Claude into Slack, Asana, your church database, your CMS. Useful, expanding fast — but the registry shifts week to week.</a:t>
+            </a:r>
+            <a:endParaRPr lang="en-US" sz="1800" dirty="0"/>
+          </a:p>
+        </p:txBody>
+      </p:sp>
+      <p:sp>
+        <p:nvSpPr>
+          <p:cNvPr id="15" name="Shape 13"/>
+          <p:cNvSpPr/>
+          <p:nvPr/>
+        </p:nvSpPr>
+        <p:spPr>
+          <a:xfrm>
+            <a:off x="5429250" y="7271296"/>
+            <a:ext cx="3267075" cy="9525"/>
+          </a:xfrm>
+          <a:prstGeom prst="rect">
+            <a:avLst/>
+          </a:prstGeom>
+          <a:solidFill>
+            <a:srgbClr val="C9CBD1"/>
+          </a:solidFill>
+          <a:ln/>
+        </p:spPr>
+        <p:txBody>
+          <a:bodyPr/>
+          <a:lstStyle/>
+          <a:p>
+            <a:endParaRPr lang="en-US"/>
+          </a:p>
+        </p:txBody>
+      </p:sp>
+      <p:sp>
+        <p:nvSpPr>
+          <p:cNvPr id="16" name="Text 14"/>
+          <p:cNvSpPr/>
+          <p:nvPr/>
+        </p:nvSpPr>
+        <p:spPr>
+          <a:xfrm>
+            <a:off x="5429250" y="7509421"/>
+            <a:ext cx="3365087" cy="1752600"/>
+          </a:xfrm>
+          <a:prstGeom prst="rect">
+            <a:avLst/>
+          </a:prstGeom>
+          <a:noFill/>
+          <a:ln/>
+        </p:spPr>
+        <p:txBody>
+          <a:bodyPr wrap="square" lIns="25400" tIns="25400" rIns="25400" bIns="25400" rtlCol="0" anchor="t">
+            <a:normAutofit fontScale="92500" lnSpcReduction="20000"/>
+          </a:bodyPr>
+          <a:lstStyle/>
+          <a:p>
+            <a:pPr marL="0" indent="0" algn="l">
+              <a:lnSpc>
+                <a:spcPct val="150000"/>
+              </a:lnSpc>
+              <a:buNone/>
+            </a:pPr>
+            <a:r>
+              <a:rPr lang="en-US" sz="1800" b="1" dirty="0">
+                <a:solidFill>
+                  <a:srgbClr val="6B6E78"/>
+                </a:solidFill>
+                <a:latin typeface="JetBrains Mono" pitchFamily="34" charset="0"/>
+                <a:ea typeface="JetBrains Mono" pitchFamily="34" charset="-122"/>
+                <a:cs typeface="JetBrains Mono" pitchFamily="34" charset="-120"/>
+              </a:rPr>
+              <a:t>Why later: today's hot connector is next month's footnote. Foundations first.</a:t>
+            </a:r>
+            <a:endParaRPr lang="en-US" sz="1800" dirty="0"/>
+          </a:p>
+        </p:txBody>
+      </p:sp>
+      <p:sp>
+        <p:nvSpPr>
+          <p:cNvPr id="17" name="Shape 15"/>
+          <p:cNvSpPr/>
+          <p:nvPr/>
+        </p:nvSpPr>
+        <p:spPr>
+          <a:xfrm>
+            <a:off x="9277350" y="3499396"/>
+            <a:ext cx="3895725" cy="6305550"/>
+          </a:xfrm>
+          <a:prstGeom prst="roundRect">
+            <a:avLst>
+              <a:gd name="adj" fmla="val 3912"/>
+            </a:avLst>
+          </a:prstGeom>
+          <a:solidFill>
+            <a:srgbClr val="F7F5F1"/>
+          </a:solidFill>
+          <a:ln w="9525">
+            <a:solidFill>
+              <a:srgbClr val="E5E5E7"/>
+            </a:solidFill>
+            <a:prstDash val="solid"/>
+          </a:ln>
+        </p:spPr>
+        <p:txBody>
+          <a:bodyPr/>
+          <a:lstStyle/>
+          <a:p>
+            <a:endParaRPr lang="en-US"/>
+          </a:p>
+        </p:txBody>
+      </p:sp>
+      <p:sp>
+        <p:nvSpPr>
+          <p:cNvPr id="18" name="Text 16"/>
+          <p:cNvSpPr/>
+          <p:nvPr/>
+        </p:nvSpPr>
+        <p:spPr>
+          <a:xfrm>
+            <a:off x="9591675" y="3851821"/>
+            <a:ext cx="3365087" cy="333375"/>
+          </a:xfrm>
+          <a:prstGeom prst="rect">
+            <a:avLst/>
+          </a:prstGeom>
+          <a:noFill/>
+          <a:ln/>
+        </p:spPr>
+        <p:txBody>
+          <a:bodyPr wrap="square" lIns="25400" tIns="25400" rIns="25400" bIns="25400" rtlCol="0" anchor="t">
+            <a:normAutofit/>
+          </a:bodyPr>
+          <a:lstStyle/>
+          <a:p>
+            <a:pPr marL="0" indent="0" algn="l">
+              <a:buNone/>
+            </a:pPr>
+            <a:r>
+              <a:rPr lang="en-US" sz="1800" kern="0" spc="324" dirty="0">
+                <a:solidFill>
+                  <a:srgbClr val="3FE0D0"/>
+                </a:solidFill>
+                <a:latin typeface="JetBrains Mono" pitchFamily="34" charset="0"/>
+                <a:ea typeface="JetBrains Mono" pitchFamily="34" charset="-122"/>
+                <a:cs typeface="JetBrains Mono" pitchFamily="34" charset="-120"/>
+              </a:rPr>
+              <a:t>03 / CUSTOM SKILLS</a:t>
+            </a:r>
+            <a:endParaRPr lang="en-US" sz="1800" dirty="0"/>
+          </a:p>
+        </p:txBody>
+      </p:sp>
+      <p:sp>
+        <p:nvSpPr>
+          <p:cNvPr id="19" name="Text 17"/>
+          <p:cNvSpPr/>
+          <p:nvPr/>
+        </p:nvSpPr>
+        <p:spPr>
+          <a:xfrm>
+            <a:off x="9591675" y="4337596"/>
+            <a:ext cx="3365087" cy="457200"/>
+          </a:xfrm>
+          <a:prstGeom prst="rect">
+            <a:avLst/>
+          </a:prstGeom>
+          <a:noFill/>
+          <a:ln/>
+        </p:spPr>
+        <p:txBody>
+          <a:bodyPr wrap="square" lIns="25400" tIns="25400" rIns="25400" bIns="25400" rtlCol="0" anchor="t">
+            <a:normAutofit fontScale="92500" lnSpcReduction="20000"/>
+          </a:bodyPr>
+          <a:lstStyle/>
+          <a:p>
+            <a:pPr marL="0" indent="0" algn="l">
+              <a:lnSpc>
+                <a:spcPct val="100000"/>
+              </a:lnSpc>
+              <a:buNone/>
+            </a:pPr>
+            <a:r>
+              <a:rPr lang="en-US" sz="3300" b="1" kern="0" spc="-33" dirty="0">
+                <a:solidFill>
+                  <a:srgbClr val="2A2D38"/>
+                </a:solidFill>
+                <a:latin typeface="Montserrat" pitchFamily="34" charset="0"/>
+                <a:ea typeface="Montserrat" pitchFamily="34" charset="-122"/>
+                <a:cs typeface="Montserrat" pitchFamily="34" charset="-120"/>
+              </a:rPr>
+              <a:t>We may graze.</a:t>
+            </a:r>
+            <a:endParaRPr lang="en-US" sz="3300" dirty="0"/>
+          </a:p>
+        </p:txBody>
+      </p:sp>
+      <p:sp>
+        <p:nvSpPr>
+          <p:cNvPr id="20" name="Text 18"/>
+          <p:cNvSpPr/>
+          <p:nvPr/>
+        </p:nvSpPr>
+        <p:spPr>
+          <a:xfrm>
+            <a:off x="9591675" y="4947196"/>
+            <a:ext cx="3365087" cy="1752600"/>
+          </a:xfrm>
+          <a:prstGeom prst="rect">
+            <a:avLst/>
+          </a:prstGeom>
+          <a:noFill/>
+          <a:ln/>
+        </p:spPr>
+        <p:txBody>
+          <a:bodyPr wrap="square" lIns="25400" tIns="25400" rIns="25400" bIns="25400" rtlCol="0" anchor="t">
+            <a:normAutofit fontScale="92500" lnSpcReduction="20000"/>
+          </a:bodyPr>
+          <a:lstStyle/>
+          <a:p>
+            <a:pPr marL="0" indent="0" algn="l">
+              <a:lnSpc>
+                <a:spcPct val="150000"/>
+              </a:lnSpc>
+              <a:buNone/>
+            </a:pPr>
+            <a:r>
+              <a:rPr lang="en-US" sz="1800" dirty="0">
+                <a:solidFill>
+                  <a:srgbClr val="3D404A"/>
+                </a:solidFill>
+                <a:latin typeface="Inter" pitchFamily="34" charset="0"/>
+                <a:ea typeface="Inter" pitchFamily="34" charset="-122"/>
+                <a:cs typeface="Inter" pitchFamily="34" charset="-120"/>
+              </a:rPr>
+              <a:t>Authoring your own SKILL.md files so Claude reaches for them automatically. We'll point at the door — we won't build one from scratch on stage.</a:t>
+            </a:r>
+            <a:endParaRPr lang="en-US" sz="1800" dirty="0"/>
+          </a:p>
+        </p:txBody>
+      </p:sp>
+      <p:sp>
+        <p:nvSpPr>
+          <p:cNvPr id="21" name="Shape 19"/>
+          <p:cNvSpPr/>
+          <p:nvPr/>
+        </p:nvSpPr>
+        <p:spPr>
+          <a:xfrm>
+            <a:off x="9591675" y="7271296"/>
+            <a:ext cx="3267075" cy="9525"/>
+          </a:xfrm>
+          <a:prstGeom prst="rect">
+            <a:avLst/>
+          </a:prstGeom>
+          <a:solidFill>
+            <a:srgbClr val="C9CBD1"/>
+          </a:solidFill>
+          <a:ln/>
+        </p:spPr>
+        <p:txBody>
+          <a:bodyPr/>
+          <a:lstStyle/>
+          <a:p>
+            <a:endParaRPr lang="en-US"/>
+          </a:p>
+        </p:txBody>
+      </p:sp>
+      <p:sp>
+        <p:nvSpPr>
+          <p:cNvPr id="22" name="Text 20"/>
+          <p:cNvSpPr/>
+          <p:nvPr/>
+        </p:nvSpPr>
+        <p:spPr>
+          <a:xfrm>
+            <a:off x="9591675" y="7509421"/>
+            <a:ext cx="3365087" cy="1752600"/>
+          </a:xfrm>
+          <a:prstGeom prst="rect">
+            <a:avLst/>
+          </a:prstGeom>
+          <a:noFill/>
+          <a:ln/>
+        </p:spPr>
+        <p:txBody>
+          <a:bodyPr wrap="square" lIns="25400" tIns="25400" rIns="25400" bIns="25400" rtlCol="0" anchor="t">
+            <a:normAutofit fontScale="92500" lnSpcReduction="20000"/>
+          </a:bodyPr>
+          <a:lstStyle/>
+          <a:p>
+            <a:pPr marL="0" indent="0" algn="l">
+              <a:lnSpc>
+                <a:spcPct val="150000"/>
+              </a:lnSpc>
+              <a:buNone/>
+            </a:pPr>
+            <a:r>
+              <a:rPr lang="en-US" sz="1800" b="1" dirty="0">
+                <a:solidFill>
+                  <a:srgbClr val="6B6E78"/>
+                </a:solidFill>
+                <a:latin typeface="JetBrains Mono" pitchFamily="34" charset="0"/>
+                <a:ea typeface="JetBrains Mono" pitchFamily="34" charset="-122"/>
+                <a:cs typeface="JetBrains Mono" pitchFamily="34" charset="-120"/>
+              </a:rPr>
+              <a:t>Why later: write a CLAUDE.md you trust before you write a skill.</a:t>
+            </a:r>
+            <a:endParaRPr lang="en-US" sz="1800" dirty="0"/>
+          </a:p>
+        </p:txBody>
+      </p:sp>
+      <p:sp>
+        <p:nvSpPr>
+          <p:cNvPr id="23" name="Shape 21"/>
+          <p:cNvSpPr/>
+          <p:nvPr/>
+        </p:nvSpPr>
+        <p:spPr>
+          <a:xfrm>
+            <a:off x="13439775" y="3499396"/>
+            <a:ext cx="3895725" cy="6305550"/>
+          </a:xfrm>
+          <a:prstGeom prst="roundRect">
+            <a:avLst>
+              <a:gd name="adj" fmla="val 3912"/>
+            </a:avLst>
+          </a:prstGeom>
+          <a:solidFill>
+            <a:srgbClr val="F7F5F1"/>
+          </a:solidFill>
+          <a:ln w="9525">
+            <a:solidFill>
+              <a:srgbClr val="E5E5E7"/>
+            </a:solidFill>
+            <a:prstDash val="solid"/>
+          </a:ln>
+        </p:spPr>
+        <p:txBody>
+          <a:bodyPr/>
+          <a:lstStyle/>
+          <a:p>
+            <a:endParaRPr lang="en-US"/>
+          </a:p>
+        </p:txBody>
+      </p:sp>
+      <p:sp>
+        <p:nvSpPr>
+          <p:cNvPr id="24" name="Text 22"/>
+          <p:cNvSpPr/>
+          <p:nvPr/>
+        </p:nvSpPr>
+        <p:spPr>
+          <a:xfrm>
+            <a:off x="13754100" y="3851821"/>
+            <a:ext cx="3365087" cy="333375"/>
+          </a:xfrm>
+          <a:prstGeom prst="rect">
+            <a:avLst/>
+          </a:prstGeom>
+          <a:noFill/>
+          <a:ln/>
+        </p:spPr>
+        <p:txBody>
+          <a:bodyPr wrap="square" lIns="25400" tIns="25400" rIns="25400" bIns="25400" rtlCol="0" anchor="t">
+            <a:normAutofit/>
+          </a:bodyPr>
+          <a:lstStyle/>
+          <a:p>
+            <a:pPr marL="0" indent="0" algn="l">
+              <a:buNone/>
+            </a:pPr>
+            <a:r>
+              <a:rPr lang="en-US" sz="1800" kern="0" spc="324" dirty="0">
+                <a:solidFill>
+                  <a:srgbClr val="3FE0D0"/>
+                </a:solidFill>
+                <a:latin typeface="JetBrains Mono" pitchFamily="34" charset="0"/>
+                <a:ea typeface="JetBrains Mono" pitchFamily="34" charset="-122"/>
+                <a:cs typeface="JetBrains Mono" pitchFamily="34" charset="-120"/>
+              </a:rPr>
+              <a:t>04 / PLUGINS &amp; AGENT SDK</a:t>
+            </a:r>
+            <a:endParaRPr lang="en-US" sz="1800" dirty="0"/>
+          </a:p>
+        </p:txBody>
+      </p:sp>
+      <p:sp>
+        <p:nvSpPr>
+          <p:cNvPr id="25" name="Text 23"/>
+          <p:cNvSpPr/>
+          <p:nvPr/>
+        </p:nvSpPr>
+        <p:spPr>
+          <a:xfrm>
+            <a:off x="13754100" y="4337596"/>
+            <a:ext cx="3365087" cy="457200"/>
+          </a:xfrm>
+          <a:prstGeom prst="rect">
+            <a:avLst/>
+          </a:prstGeom>
+          <a:noFill/>
+          <a:ln/>
+        </p:spPr>
+        <p:txBody>
+          <a:bodyPr wrap="square" lIns="25400" tIns="25400" rIns="25400" bIns="25400" rtlCol="0" anchor="t">
+            <a:normAutofit fontScale="92500" lnSpcReduction="20000"/>
+          </a:bodyPr>
+          <a:lstStyle/>
+          <a:p>
+            <a:pPr marL="0" indent="0" algn="l">
+              <a:lnSpc>
+                <a:spcPct val="100000"/>
+              </a:lnSpc>
+              <a:buNone/>
+            </a:pPr>
+            <a:r>
+              <a:rPr lang="en-US" sz="3300" b="1" kern="0" spc="-33" dirty="0">
+                <a:solidFill>
+                  <a:srgbClr val="2A2D38"/>
+                </a:solidFill>
+                <a:latin typeface="Montserrat" pitchFamily="34" charset="0"/>
+                <a:ea typeface="Montserrat" pitchFamily="34" charset="-122"/>
+                <a:cs typeface="Montserrat" pitchFamily="34" charset="-120"/>
+              </a:rPr>
+              <a:t>Not today.</a:t>
+            </a:r>
+            <a:endParaRPr lang="en-US" sz="3300" dirty="0"/>
+          </a:p>
+        </p:txBody>
+      </p:sp>
+      <p:sp>
+        <p:nvSpPr>
+          <p:cNvPr id="26" name="Text 24"/>
+          <p:cNvSpPr/>
+          <p:nvPr/>
+        </p:nvSpPr>
+        <p:spPr>
+          <a:xfrm>
+            <a:off x="13754100" y="4947196"/>
+            <a:ext cx="3365087" cy="1752600"/>
+          </a:xfrm>
+          <a:prstGeom prst="rect">
+            <a:avLst/>
+          </a:prstGeom>
+          <a:noFill/>
+          <a:ln/>
+        </p:spPr>
+        <p:txBody>
+          <a:bodyPr wrap="square" lIns="25400" tIns="25400" rIns="25400" bIns="25400" rtlCol="0" anchor="t">
+            <a:normAutofit fontScale="92500" lnSpcReduction="20000"/>
+          </a:bodyPr>
+          <a:lstStyle/>
+          <a:p>
+            <a:pPr marL="0" indent="0" algn="l">
+              <a:lnSpc>
+                <a:spcPct val="150000"/>
+              </a:lnSpc>
+              <a:buNone/>
+            </a:pPr>
+            <a:r>
+              <a:rPr lang="en-US" sz="1800" dirty="0">
+                <a:solidFill>
+                  <a:srgbClr val="3D404A"/>
+                </a:solidFill>
+                <a:latin typeface="Inter" pitchFamily="34" charset="0"/>
+                <a:ea typeface="Inter" pitchFamily="34" charset="-122"/>
+                <a:cs typeface="Inter" pitchFamily="34" charset="-120"/>
+              </a:rPr>
+              <a:t>Building plugin marketplaces. Shipping autonomous agents on the Agent SDK. Real territory — but a different workshop, on a different day.</a:t>
+            </a:r>
+            <a:endParaRPr lang="en-US" sz="1800" dirty="0"/>
+          </a:p>
+        </p:txBody>
+      </p:sp>
+      <p:sp>
+        <p:nvSpPr>
+          <p:cNvPr id="27" name="Shape 25"/>
+          <p:cNvSpPr/>
+          <p:nvPr/>
+        </p:nvSpPr>
+        <p:spPr>
+          <a:xfrm>
+            <a:off x="13754100" y="7271296"/>
+            <a:ext cx="3267075" cy="9525"/>
+          </a:xfrm>
+          <a:prstGeom prst="rect">
+            <a:avLst/>
+          </a:prstGeom>
+          <a:solidFill>
+            <a:srgbClr val="C9CBD1"/>
+          </a:solidFill>
+          <a:ln/>
+        </p:spPr>
+        <p:txBody>
+          <a:bodyPr/>
+          <a:lstStyle/>
+          <a:p>
+            <a:endParaRPr lang="en-US"/>
+          </a:p>
+        </p:txBody>
+      </p:sp>
+      <p:sp>
+        <p:nvSpPr>
+          <p:cNvPr id="28" name="Text 26"/>
+          <p:cNvSpPr/>
+          <p:nvPr/>
+        </p:nvSpPr>
+        <p:spPr>
+          <a:xfrm>
+            <a:off x="13754100" y="7509421"/>
+            <a:ext cx="3365087" cy="1752600"/>
+          </a:xfrm>
+          <a:prstGeom prst="rect">
+            <a:avLst/>
+          </a:prstGeom>
+          <a:noFill/>
+          <a:ln/>
+        </p:spPr>
+        <p:txBody>
+          <a:bodyPr wrap="square" lIns="25400" tIns="25400" rIns="25400" bIns="25400" rtlCol="0" anchor="t">
+            <a:normAutofit fontScale="92500" lnSpcReduction="20000"/>
+          </a:bodyPr>
+          <a:lstStyle/>
+          <a:p>
+            <a:pPr marL="0" indent="0" algn="l">
+              <a:lnSpc>
+                <a:spcPct val="150000"/>
+              </a:lnSpc>
+              <a:buNone/>
+            </a:pPr>
+            <a:r>
+              <a:rPr lang="en-US" sz="1800" b="1" dirty="0">
+                <a:solidFill>
+                  <a:srgbClr val="6B6E78"/>
+                </a:solidFill>
+                <a:latin typeface="JetBrains Mono" pitchFamily="34" charset="0"/>
+                <a:ea typeface="JetBrains Mono" pitchFamily="34" charset="-122"/>
+                <a:cs typeface="JetBrains Mono" pitchFamily="34" charset="-120"/>
+              </a:rPr>
+              <a:t>Why later: ship one feature with one Claude before you ship a fleet of them.</a:t>
+            </a:r>
+            <a:endParaRPr lang="en-US" sz="1800" dirty="0"/>
+          </a:p>
+        </p:txBody>
+      </p:sp>
+    </p:spTree>
+  </p:cSld>
+  <p:clrMapOvr>
+    <a:masterClrMapping/>
+  </p:clrMapOvr>
+</p:sld>
+</file>
+
+<file path=ppt/slides/slide28.xml><?xml version="1.0" encoding="utf-8"?>
+<p:sld xmlns:a="http://schemas.openxmlformats.org/drawingml/2006/main" xmlns:r="http://schemas.openxmlformats.org/officeDocument/2006/relationships" xmlns:p="http://schemas.openxmlformats.org/presentationml/2006/main">
+  <p:cSld>
+    <p:spTree>
+      <p:nvGrpSpPr>
+        <p:cNvPr id="1" name=""/>
+        <p:cNvGrpSpPr/>
+        <p:nvPr/>
+      </p:nvGrpSpPr>
+      <p:grpSpPr>
+        <a:xfrm>
+          <a:off x="0" y="0"/>
+          <a:ext cx="0" cy="0"/>
+          <a:chOff x="0" y="0"/>
+          <a:chExt cx="0" cy="0"/>
+        </a:xfrm>
+      </p:grpSpPr>
+      <p:sp>
+        <p:nvSpPr>
+          <p:cNvPr id="2" name="Background"/>
+          <p:cNvSpPr/>
+          <p:nvPr/>
+        </p:nvSpPr>
+        <p:spPr>
+          <a:xfrm>
+            <a:off x="0" y="0"/>
+            <a:ext cx="18288000" cy="10287000"/>
+          </a:xfrm>
+          <a:prstGeom prst="rect">
+            <a:avLst/>
+          </a:prstGeom>
+          <a:solidFill>
+            <a:srgbClr val="1B1D24"/>
+          </a:solidFill>
+          <a:ln/>
+        </p:spPr>
+        <p:txBody>
+          <a:bodyPr/>
+          <a:lstStyle/>
+          <a:p>
+            <a:endParaRPr lang="en-US"/>
+          </a:p>
+        </p:txBody>
+      </p:sp>
+      <p:sp>
+        <p:nvSpPr>
+          <p:cNvPr id="3" name="Eyebrow"/>
+          <p:cNvSpPr/>
+          <p:nvPr/>
+        </p:nvSpPr>
+        <p:spPr>
+          <a:xfrm>
+            <a:off x="952500" y="838200"/>
+            <a:ext cx="16383000" cy="400050"/>
+          </a:xfrm>
+          <a:prstGeom prst="rect">
+            <a:avLst/>
+          </a:prstGeom>
+          <a:noFill/>
+          <a:ln/>
+        </p:spPr>
+        <p:txBody>
+          <a:bodyPr wrap="square" lIns="25400" tIns="25400" rIns="25400" bIns="25400" rtlCol="0" anchor="t">
+            <a:normAutofit/>
+          </a:bodyPr>
+          <a:lstStyle/>
+          <a:p>
+            <a:pPr marL="0" indent="0" algn="l">
+              <a:buNone/>
+            </a:pPr>
+            <a:r>
+              <a:rPr lang="en-US" sz="2100" kern="0" spc="840" dirty="0">
+                <a:solidFill>
+                  <a:srgbClr val="3FE0D0"/>
+                </a:solidFill>
+                <a:latin typeface="JetBrains Mono" pitchFamily="34" charset="0"/>
+                <a:ea typeface="JetBrains Mono" pitchFamily="34" charset="-122"/>
+                <a:cs typeface="JetBrains Mono" pitchFamily="34" charset="-120"/>
+              </a:rPr>
+              <a:t>DON'T LEAVE WITHOUT ONE</a:t>
+            </a:r>
+            <a:endParaRPr lang="en-US" sz="2100" dirty="0"/>
+          </a:p>
+        </p:txBody>
+      </p:sp>
+      <p:sp>
+        <p:nvSpPr>
+          <p:cNvPr id="4" name="Title"/>
+          <p:cNvSpPr/>
+          <p:nvPr/>
+        </p:nvSpPr>
+        <p:spPr>
+          <a:xfrm>
+            <a:off x="952500" y="1390650"/>
+            <a:ext cx="16383000" cy="1490475"/>
+          </a:xfrm>
+          <a:prstGeom prst="rect">
+            <a:avLst/>
+          </a:prstGeom>
+          <a:noFill/>
+          <a:ln/>
+        </p:spPr>
+        <p:txBody>
+          <a:bodyPr wrap="square" lIns="25400" tIns="25400" rIns="25400" bIns="25400" rtlCol="0" anchor="t">
+            <a:normAutofit fontScale="92500" lnSpcReduction="20000"/>
+          </a:bodyPr>
+          <a:lstStyle/>
+          <a:p>
+            <a:pPr marL="0" indent="0" algn="l">
+              <a:lnSpc>
+                <a:spcPct val="100000"/>
+              </a:lnSpc>
+              <a:buNone/>
+            </a:pPr>
+            <a:r>
+              <a:rPr lang="en-US" sz="7800" b="1" kern="0" spc="-200" dirty="0">
+                <a:solidFill>
+                  <a:srgbClr val="FFFFFF"/>
+                </a:solidFill>
+                <a:latin typeface="Montserrat" pitchFamily="34" charset="0"/>
+                <a:ea typeface="Montserrat" pitchFamily="34" charset="-122"/>
+                <a:cs typeface="Montserrat" pitchFamily="34" charset="-120"/>
+              </a:rPr>
+              <a:t>Everyone needs an AI Buddy.</a:t>
+            </a:r>
+            <a:endParaRPr lang="en-US" sz="7800" dirty="0"/>
+          </a:p>
+        </p:txBody>
+      </p:sp>
+      <p:sp>
+        <p:nvSpPr>
+          <p:cNvPr id="5" name="Subtitle"/>
+          <p:cNvSpPr/>
+          <p:nvPr/>
+        </p:nvSpPr>
+        <p:spPr>
+          <a:xfrm>
+            <a:off x="952500" y="3000375"/>
+            <a:ext cx="14287500" cy="685800"/>
+          </a:xfrm>
+          <a:prstGeom prst="rect">
+            <a:avLst/>
+          </a:prstGeom>
+          <a:noFill/>
+          <a:ln/>
+        </p:spPr>
+        <p:txBody>
+          <a:bodyPr wrap="square" lIns="25400" tIns="25400" rIns="25400" bIns="25400" rtlCol="0" anchor="t">
+            <a:normAutofit fontScale="92500" lnSpcReduction="10000"/>
+          </a:bodyPr>
+          <a:lstStyle/>
+          <a:p>
+            <a:pPr marL="0" indent="0" algn="l">
+              <a:lnSpc>
+                <a:spcPct val="140000"/>
+              </a:lnSpc>
+              <a:buNone/>
+            </a:pPr>
+            <a:r>
+              <a:rPr lang="en-US" sz="2400" dirty="0">
+                <a:solidFill>
+                  <a:srgbClr val="C9CBD1"/>
+                </a:solidFill>
+                <a:latin typeface="Inter" pitchFamily="34" charset="0"/>
+                <a:ea typeface="Inter" pitchFamily="34" charset="-122"/>
+                <a:cs typeface="Inter" pitchFamily="34" charset="-120"/>
+              </a:rPr>
+              <a:t>You're surrounded by people doing the same thing. Use the time. Don't leave this event without your very own AI Buddy.</a:t>
+            </a:r>
+            <a:endParaRPr lang="en-US" sz="2400" dirty="0"/>
+          </a:p>
+        </p:txBody>
+      </p:sp>
+      <p:sp>
+        <p:nvSpPr>
+          <p:cNvPr id="6" name="Card Paul"/>
+          <p:cNvSpPr/>
+          <p:nvPr/>
+        </p:nvSpPr>
+        <p:spPr>
+          <a:xfrm>
+            <a:off x="952500" y="4076700"/>
+            <a:ext cx="7900000" cy="5067300"/>
+          </a:xfrm>
+          <a:prstGeom prst="roundRect">
+            <a:avLst>
+              <a:gd name="adj" fmla="val 3912"/>
+            </a:avLst>
+          </a:prstGeom>
+          <a:solidFill>
+            <a:srgbClr val="F7F5F1"/>
+          </a:solidFill>
+          <a:ln w="9525">
+            <a:solidFill>
+              <a:srgbClr val="2D2F37"/>
+            </a:solidFill>
+            <a:prstDash val="solid"/>
+          </a:ln>
+        </p:spPr>
+        <p:txBody>
+          <a:bodyPr/>
+          <a:lstStyle/>
+          <a:p>
+            <a:endParaRPr lang="en-US"/>
+          </a:p>
+        </p:txBody>
+      </p:sp>
+      <p:sp>
+        <p:nvSpPr>
+          <p:cNvPr id="7" name="Paul Tag"/>
+          <p:cNvSpPr/>
+          <p:nvPr/>
+        </p:nvSpPr>
+        <p:spPr>
+          <a:xfrm>
+            <a:off x="1352550" y="4429125"/>
+            <a:ext cx="7099900" cy="333375"/>
+          </a:xfrm>
+          <a:prstGeom prst="rect">
+            <a:avLst/>
+          </a:prstGeom>
+          <a:noFill/>
+          <a:ln/>
+        </p:spPr>
+        <p:txBody>
+          <a:bodyPr wrap="square" lIns="25400" tIns="25400" rIns="25400" bIns="25400" rtlCol="0" anchor="t">
+            <a:normAutofit/>
+          </a:bodyPr>
+          <a:lstStyle/>
+          <a:p>
+            <a:pPr marL="0" indent="0" algn="l">
+              <a:buNone/>
+            </a:pPr>
+            <a:r>
+              <a:rPr lang="en-US" sz="1800" kern="0" spc="324" dirty="0">
+                <a:solidFill>
+                  <a:srgbClr val="F58220"/>
+                </a:solidFill>
+                <a:latin typeface="JetBrains Mono" pitchFamily="34" charset="0"/>
+                <a:ea typeface="JetBrains Mono" pitchFamily="34" charset="-122"/>
+                <a:cs typeface="JetBrains Mono" pitchFamily="34" charset="-120"/>
+              </a:rPr>
+              <a:t>BE AN AI PAUL · THE MENTOR</a:t>
+            </a:r>
+            <a:endParaRPr lang="en-US" sz="1800" dirty="0"/>
+          </a:p>
+        </p:txBody>
+      </p:sp>
+      <p:sp>
+        <p:nvSpPr>
+          <p:cNvPr id="8" name="Paul Headline"/>
+          <p:cNvSpPr/>
+          <p:nvPr/>
+        </p:nvSpPr>
+        <p:spPr>
+          <a:xfrm>
+            <a:off x="1352550" y="4914900"/>
+            <a:ext cx="7099900" cy="800100"/>
+          </a:xfrm>
+          <a:prstGeom prst="rect">
+            <a:avLst/>
+          </a:prstGeom>
+          <a:noFill/>
+          <a:ln/>
+        </p:spPr>
+        <p:txBody>
+          <a:bodyPr wrap="square" lIns="25400" tIns="25400" rIns="25400" bIns="25400" rtlCol="0" anchor="t">
+            <a:normAutofit fontScale="92500" lnSpcReduction="20000"/>
+          </a:bodyPr>
+          <a:lstStyle/>
+          <a:p>
+            <a:pPr marL="0" indent="0" algn="l">
+              <a:lnSpc>
+                <a:spcPct val="100000"/>
+              </a:lnSpc>
+              <a:buNone/>
+            </a:pPr>
+            <a:r>
+              <a:rPr lang="en-US" sz="4200" b="1" kern="0" spc="-42" dirty="0">
+                <a:solidFill>
+                  <a:srgbClr val="2A2D38"/>
+                </a:solidFill>
+                <a:latin typeface="Montserrat" pitchFamily="34" charset="0"/>
+                <a:ea typeface="Montserrat" pitchFamily="34" charset="-122"/>
+                <a:cs typeface="Montserrat" pitchFamily="34" charset="-120"/>
+              </a:rPr>
+              <a:t>Pour it forward.</a:t>
+            </a:r>
+            <a:endParaRPr lang="en-US" sz="4200" dirty="0"/>
+          </a:p>
+        </p:txBody>
+      </p:sp>
+      <p:sp>
+        <p:nvSpPr>
+          <p:cNvPr id="9" name="Paul Body"/>
+          <p:cNvSpPr/>
+          <p:nvPr/>
+        </p:nvSpPr>
+        <p:spPr>
+          <a:xfrm>
+            <a:off x="1352550" y="5848350"/>
+            <a:ext cx="7099900" cy="1828800"/>
+          </a:xfrm>
+          <a:prstGeom prst="rect">
+            <a:avLst/>
+          </a:prstGeom>
+          <a:noFill/>
+          <a:ln/>
+        </p:spPr>
+        <p:txBody>
+          <a:bodyPr wrap="square" lIns="25400" tIns="25400" rIns="25400" bIns="25400" rtlCol="0" anchor="t">
+            <a:normAutofit fontScale="92500" lnSpcReduction="20000"/>
+          </a:bodyPr>
+          <a:lstStyle/>
+          <a:p>
+            <a:pPr marL="0" indent="0" algn="l">
+              <a:lnSpc>
+                <a:spcPct val="150000"/>
+              </a:lnSpc>
+              <a:buNone/>
+            </a:pPr>
+            <a:r>
+              <a:rPr lang="en-US" sz="1900" dirty="0">
+                <a:solidFill>
+                  <a:srgbClr val="3D404A"/>
+                </a:solidFill>
+                <a:latin typeface="Inter" pitchFamily="34" charset="0"/>
+                <a:ea typeface="Inter" pitchFamily="34" charset="-122"/>
+                <a:cs typeface="Inter" pitchFamily="34" charset="-120"/>
+              </a:rPr>
+              <a:t>Find someone earlier in the journey and pour into them. Show them your CLAUDE.md. Walk them through a real failure. Your reps become their lift-off.</a:t>
+            </a:r>
+            <a:endParaRPr lang="en-US" sz="1900" dirty="0"/>
+          </a:p>
+        </p:txBody>
+      </p:sp>
+      <p:sp>
+        <p:nvSpPr>
+          <p:cNvPr id="10" name="Paul Divider"/>
+          <p:cNvSpPr/>
+          <p:nvPr/>
+        </p:nvSpPr>
+        <p:spPr>
+          <a:xfrm>
+            <a:off x="1352550" y="7896225"/>
+            <a:ext cx="7099900" cy="9525"/>
+          </a:xfrm>
+          <a:prstGeom prst="rect">
+            <a:avLst/>
+          </a:prstGeom>
+          <a:solidFill>
+            <a:srgbClr val="C9CBD1"/>
+          </a:solidFill>
+          <a:ln/>
+        </p:spPr>
+        <p:txBody>
+          <a:bodyPr/>
+          <a:lstStyle/>
+          <a:p>
+            <a:endParaRPr lang="en-US"/>
+          </a:p>
+        </p:txBody>
+      </p:sp>
+      <p:sp>
+        <p:nvSpPr>
+          <p:cNvPr id="11" name="Paul Verse"/>
+          <p:cNvSpPr/>
+          <p:nvPr/>
+        </p:nvSpPr>
+        <p:spPr>
+          <a:xfrm>
+            <a:off x="1352550" y="8134350"/>
+            <a:ext cx="7099900" cy="838200"/>
+          </a:xfrm>
+          <a:prstGeom prst="rect">
+            <a:avLst/>
+          </a:prstGeom>
+          <a:noFill/>
+          <a:ln/>
+        </p:spPr>
+        <p:txBody>
+          <a:bodyPr wrap="square" lIns="25400" tIns="25400" rIns="25400" bIns="25400" rtlCol="0" anchor="t">
+            <a:normAutofit fontScale="92500" lnSpcReduction="20000"/>
+          </a:bodyPr>
+          <a:lstStyle/>
+          <a:p>
+            <a:pPr marL="0" indent="0" algn="l">
+              <a:lnSpc>
+                <a:spcPct val="150000"/>
+              </a:lnSpc>
+              <a:buNone/>
+            </a:pPr>
+            <a:r>
+              <a:rPr lang="en-US" sz="1700" b="1" dirty="0">
+                <a:solidFill>
+                  <a:srgbClr val="6B6E78"/>
+                </a:solidFill>
+                <a:latin typeface="JetBrains Mono" pitchFamily="34" charset="0"/>
+                <a:ea typeface="JetBrains Mono" pitchFamily="34" charset="-122"/>
+                <a:cs typeface="JetBrains Mono" pitchFamily="34" charset="-120"/>
+              </a:rPr>
+              <a:t>"...entrust to faithful people who will be able to teach others also." — 2 Tim 2:2</a:t>
+            </a:r>
+            <a:endParaRPr lang="en-US" sz="1700" dirty="0"/>
+          </a:p>
+        </p:txBody>
+      </p:sp>
+      <p:sp>
+        <p:nvSpPr>
+          <p:cNvPr id="12" name="Card Tim"/>
+          <p:cNvSpPr/>
+          <p:nvPr/>
+        </p:nvSpPr>
+        <p:spPr>
+          <a:xfrm>
+            <a:off x="9435500" y="4076700"/>
+            <a:ext cx="7900000" cy="5067300"/>
+          </a:xfrm>
+          <a:prstGeom prst="roundRect">
+            <a:avLst>
+              <a:gd name="adj" fmla="val 3912"/>
+            </a:avLst>
+          </a:prstGeom>
+          <a:solidFill>
+            <a:srgbClr val="F7F5F1"/>
+          </a:solidFill>
+          <a:ln w="9525">
+            <a:solidFill>
+              <a:srgbClr val="2D2F37"/>
+            </a:solidFill>
+            <a:prstDash val="solid"/>
+          </a:ln>
+        </p:spPr>
+        <p:txBody>
+          <a:bodyPr/>
+          <a:lstStyle/>
+          <a:p>
+            <a:endParaRPr lang="en-US"/>
+          </a:p>
+        </p:txBody>
+      </p:sp>
+      <p:sp>
+        <p:nvSpPr>
+          <p:cNvPr id="13" name="Tim Tag"/>
+          <p:cNvSpPr/>
+          <p:nvPr/>
+        </p:nvSpPr>
+        <p:spPr>
+          <a:xfrm>
+            <a:off x="9835550" y="4429125"/>
+            <a:ext cx="7099900" cy="333375"/>
+          </a:xfrm>
+          <a:prstGeom prst="rect">
+            <a:avLst/>
+          </a:prstGeom>
+          <a:noFill/>
+          <a:ln/>
+        </p:spPr>
+        <p:txBody>
+          <a:bodyPr wrap="square" lIns="25400" tIns="25400" rIns="25400" bIns="25400" rtlCol="0" anchor="t">
+            <a:normAutofit/>
+          </a:bodyPr>
+          <a:lstStyle/>
+          <a:p>
+            <a:pPr marL="0" indent="0" algn="l">
+              <a:buNone/>
+            </a:pPr>
+            <a:r>
+              <a:rPr lang="en-US" sz="1800" kern="0" spc="324" dirty="0">
+                <a:solidFill>
+                  <a:srgbClr val="3FE0D0"/>
+                </a:solidFill>
+                <a:latin typeface="JetBrains Mono" pitchFamily="34" charset="0"/>
+                <a:ea typeface="JetBrains Mono" pitchFamily="34" charset="-122"/>
+                <a:cs typeface="JetBrains Mono" pitchFamily="34" charset="-120"/>
+              </a:rPr>
+              <a:t>BE AN AI TIMOTHY · THE APPRENTICE</a:t>
+            </a:r>
+            <a:endParaRPr lang="en-US" sz="1800" dirty="0"/>
+          </a:p>
+        </p:txBody>
+      </p:sp>
+      <p:sp>
+        <p:nvSpPr>
+          <p:cNvPr id="14" name="Tim Headline"/>
+          <p:cNvSpPr/>
+          <p:nvPr/>
+        </p:nvSpPr>
+        <p:spPr>
+          <a:xfrm>
+            <a:off x="9835550" y="4914900"/>
+            <a:ext cx="7099900" cy="800100"/>
+          </a:xfrm>
+          <a:prstGeom prst="rect">
+            <a:avLst/>
+          </a:prstGeom>
+          <a:noFill/>
+          <a:ln/>
+        </p:spPr>
+        <p:txBody>
+          <a:bodyPr wrap="square" lIns="25400" tIns="25400" rIns="25400" bIns="25400" rtlCol="0" anchor="t">
+            <a:normAutofit fontScale="92500" lnSpcReduction="20000"/>
+          </a:bodyPr>
+          <a:lstStyle/>
+          <a:p>
+            <a:pPr marL="0" indent="0" algn="l">
+              <a:lnSpc>
+                <a:spcPct val="100000"/>
+              </a:lnSpc>
+              <a:buNone/>
+            </a:pPr>
+            <a:r>
+              <a:rPr lang="en-US" sz="4200" b="1" kern="0" spc="-42" dirty="0">
+                <a:solidFill>
+                  <a:srgbClr val="2A2D38"/>
+                </a:solidFill>
+                <a:latin typeface="Montserrat" pitchFamily="34" charset="0"/>
+                <a:ea typeface="Montserrat" pitchFamily="34" charset="-122"/>
+                <a:cs typeface="Montserrat" pitchFamily="34" charset="-120"/>
+              </a:rPr>
+              <a:t>Learn forward.</a:t>
+            </a:r>
+            <a:endParaRPr lang="en-US" sz="4200" dirty="0"/>
+          </a:p>
+        </p:txBody>
+      </p:sp>
+      <p:sp>
+        <p:nvSpPr>
+          <p:cNvPr id="15" name="Tim Body"/>
+          <p:cNvSpPr/>
+          <p:nvPr/>
+        </p:nvSpPr>
+        <p:spPr>
+          <a:xfrm>
+            <a:off x="9835550" y="5848350"/>
+            <a:ext cx="7099900" cy="1828800"/>
+          </a:xfrm>
+          <a:prstGeom prst="rect">
+            <a:avLst/>
+          </a:prstGeom>
+          <a:noFill/>
+          <a:ln/>
+        </p:spPr>
+        <p:txBody>
+          <a:bodyPr wrap="square" lIns="25400" tIns="25400" rIns="25400" bIns="25400" rtlCol="0" anchor="t">
+            <a:normAutofit fontScale="92500" lnSpcReduction="20000"/>
+          </a:bodyPr>
+          <a:lstStyle/>
+          <a:p>
+            <a:pPr marL="0" indent="0" algn="l">
+              <a:lnSpc>
+                <a:spcPct val="150000"/>
+              </a:lnSpc>
+              <a:buNone/>
+            </a:pPr>
+            <a:r>
+              <a:rPr lang="en-US" sz="1900" dirty="0">
+                <a:solidFill>
+                  <a:srgbClr val="3D404A"/>
+                </a:solidFill>
+                <a:latin typeface="Inter" pitchFamily="34" charset="0"/>
+                <a:ea typeface="Inter" pitchFamily="34" charset="-122"/>
+                <a:cs typeface="Inter" pitchFamily="34" charset="-120"/>
+              </a:rPr>
+              <a:t>Find someone two months ahead of you and shadow them. Ask the dumb question. Steal their CLAUDE.md. Their fixes save you twenty hours.</a:t>
+            </a:r>
+            <a:endParaRPr lang="en-US" sz="1900" dirty="0"/>
+          </a:p>
+        </p:txBody>
+      </p:sp>
+      <p:sp>
+        <p:nvSpPr>
+          <p:cNvPr id="16" name="Tim Divider"/>
+          <p:cNvSpPr/>
+          <p:nvPr/>
+        </p:nvSpPr>
+        <p:spPr>
+          <a:xfrm>
+            <a:off x="9835550" y="7896225"/>
+            <a:ext cx="7099900" cy="9525"/>
+          </a:xfrm>
+          <a:prstGeom prst="rect">
+            <a:avLst/>
+          </a:prstGeom>
+          <a:solidFill>
+            <a:srgbClr val="C9CBD1"/>
+          </a:solidFill>
+          <a:ln/>
+        </p:spPr>
+        <p:txBody>
+          <a:bodyPr/>
+          <a:lstStyle/>
+          <a:p>
+            <a:endParaRPr lang="en-US"/>
+          </a:p>
+        </p:txBody>
+      </p:sp>
+      <p:sp>
+        <p:nvSpPr>
+          <p:cNvPr id="17" name="Tim Verse"/>
+          <p:cNvSpPr/>
+          <p:nvPr/>
+        </p:nvSpPr>
+        <p:spPr>
+          <a:xfrm>
+            <a:off x="9835550" y="8134350"/>
+            <a:ext cx="7099900" cy="838200"/>
+          </a:xfrm>
+          <a:prstGeom prst="rect">
+            <a:avLst/>
+          </a:prstGeom>
+          <a:noFill/>
+          <a:ln/>
+        </p:spPr>
+        <p:txBody>
+          <a:bodyPr wrap="square" lIns="25400" tIns="25400" rIns="25400" bIns="25400" rtlCol="0" anchor="t">
+            <a:normAutofit fontScale="92500" lnSpcReduction="20000"/>
+          </a:bodyPr>
+          <a:lstStyle/>
+          <a:p>
+            <a:pPr marL="0" indent="0" algn="l">
+              <a:lnSpc>
+                <a:spcPct val="150000"/>
+              </a:lnSpc>
+              <a:buNone/>
+            </a:pPr>
+            <a:r>
+              <a:rPr lang="en-US" sz="1700" b="1" dirty="0">
+                <a:solidFill>
+                  <a:srgbClr val="6B6E78"/>
+                </a:solidFill>
+                <a:latin typeface="JetBrains Mono" pitchFamily="34" charset="0"/>
+                <a:ea typeface="JetBrains Mono" pitchFamily="34" charset="-122"/>
+                <a:cs typeface="JetBrains Mono" pitchFamily="34" charset="-120"/>
+              </a:rPr>
+              <a:t>"What you have heard from me... entrust..." — every Timothy needs a Paul.</a:t>
+            </a:r>
+            <a:endParaRPr lang="en-US" sz="1700" dirty="0"/>
+          </a:p>
+        </p:txBody>
+      </p:sp>
+      <p:sp>
+        <p:nvSpPr>
+          <p:cNvPr id="18" name="Bottom CTA"/>
+          <p:cNvSpPr/>
+          <p:nvPr/>
+        </p:nvSpPr>
+        <p:spPr>
+          <a:xfrm>
+            <a:off x="952500" y="9343050"/>
+            <a:ext cx="16383000" cy="476250"/>
+          </a:xfrm>
+          <a:prstGeom prst="rect">
+            <a:avLst/>
+          </a:prstGeom>
+          <a:noFill/>
+          <a:ln/>
+        </p:spPr>
+        <p:txBody>
+          <a:bodyPr wrap="square" lIns="25400" tIns="25400" rIns="25400" bIns="25400" rtlCol="0" anchor="t">
+            <a:normAutofit/>
+          </a:bodyPr>
+          <a:lstStyle/>
+          <a:p>
+            <a:pPr marL="0" indent="0" algn="l">
+              <a:buNone/>
+            </a:pPr>
+            <a:r>
+              <a:rPr lang="en-US" sz="2200" b="1" i="1" kern="0" dirty="0">
+                <a:solidFill>
+                  <a:srgbClr val="F58220"/>
+                </a:solidFill>
+                <a:latin typeface="Montserrat" pitchFamily="34" charset="0"/>
+                <a:ea typeface="Montserrat" pitchFamily="34" charset="-122"/>
+                <a:cs typeface="Montserrat" pitchFamily="34" charset="-120"/>
+              </a:rPr>
+              <a:t>You can be — and need to be — both.</a:t>
+            </a:r>
+            <a:endParaRPr lang="en-US" sz="2200" dirty="0"/>
+          </a:p>
+        </p:txBody>
+      </p:sp>
+    </p:spTree>
+  </p:cSld>
+  <p:clrMapOvr>
+    <a:masterClrMapping/>
+  </p:clrMapOvr>
+</p:sld>
+</file>
+
+<file path=ppt/slides/slide29.xml><?xml version="1.0" encoding="utf-8"?>
 <p:sld xmlns:a="http://schemas.openxmlformats.org/drawingml/2006/main" xmlns:r="http://schemas.openxmlformats.org/officeDocument/2006/relationships" xmlns:p="http://schemas.openxmlformats.org/presentationml/2006/main">
   <p:cSld>
     <p:spTree>

--- a/schedule/02-vibe-coding-vs-context-engineering/02-vibe-coding-vs-context-engineering.pptx
+++ b/schedule/02-vibe-coding-vs-context-engineering/02-vibe-coding-vs-context-engineering.pptx
@@ -6,7 +6,7 @@
     <p:sldMasterId id="2147483650" r:id="rId2"/>
   </p:sldMasterIdLst>
   <p:notesMasterIdLst>
-    <p:notesMasterId r:id="rId32"/>
+    <p:notesMasterId r:id="rId33"/>
   </p:notesMasterIdLst>
   <p:sldIdLst>
     <p:sldId id="256" r:id="rId3"/>
@@ -22,46 +22,47 @@
     <p:sldId id="266" r:id="rId13"/>
     <p:sldId id="267" r:id="rId14"/>
     <p:sldId id="268" r:id="rId15"/>
-    <p:sldId id="299" r:id="rId16"/>
-    <p:sldId id="300" r:id="rId17"/>
-    <p:sldId id="290" r:id="rId18"/>
-    <p:sldId id="291" r:id="rId19"/>
-    <p:sldId id="292" r:id="rId20"/>
-    <p:sldId id="293" r:id="rId21"/>
-    <p:sldId id="294" r:id="rId22"/>
-    <p:sldId id="295" r:id="rId23"/>
-    <p:sldId id="296" r:id="rId24"/>
+    <p:sldId id="306" r:id="rId16"/>
+    <p:sldId id="299" r:id="rId17"/>
+    <p:sldId id="300" r:id="rId18"/>
+    <p:sldId id="290" r:id="rId19"/>
+    <p:sldId id="291" r:id="rId20"/>
+    <p:sldId id="292" r:id="rId21"/>
+    <p:sldId id="293" r:id="rId22"/>
+    <p:sldId id="294" r:id="rId23"/>
+    <p:sldId id="295" r:id="rId24"/>
     <p:sldId id="297" r:id="rId25"/>
     <p:sldId id="301" r:id="rId26"/>
     <p:sldId id="274" r:id="rId27"/>
     <p:sldId id="302" r:id="rId28"/>
     <p:sldId id="304" r:id="rId29"/>
     <p:sldId id="305" r:id="rId30"/>
-    <p:sldId id="303" r:id="rId31"/>
+    <p:sldId id="296" r:id="rId31"/>
+    <p:sldId id="303" r:id="rId32"/>
   </p:sldIdLst>
   <p:sldSz cx="18288000" cy="10287000"/>
   <p:notesSz cx="10287000" cy="18288000"/>
   <p:embeddedFontLst>
     <p:embeddedFont>
       <p:font typeface="Inter" panose="02000503000000020004"/>
-      <p:regular r:id="rId33"/>
-      <p:bold r:id="rId34"/>
-      <p:italic r:id="rId35"/>
-      <p:boldItalic r:id="rId36"/>
+      <p:regular r:id="rId34"/>
+      <p:bold r:id="rId35"/>
+      <p:italic r:id="rId36"/>
+      <p:boldItalic r:id="rId37"/>
     </p:embeddedFont>
     <p:embeddedFont>
       <p:font typeface="JetBrains Mono" panose="02000009000000000000"/>
-      <p:regular r:id="rId37"/>
-      <p:bold r:id="rId38"/>
-      <p:italic r:id="rId39"/>
-      <p:boldItalic r:id="rId40"/>
+      <p:regular r:id="rId38"/>
+      <p:bold r:id="rId39"/>
+      <p:italic r:id="rId40"/>
+      <p:boldItalic r:id="rId41"/>
     </p:embeddedFont>
     <p:embeddedFont>
       <p:font typeface="Montserrat" pitchFamily="2" charset="77"/>
-      <p:regular r:id="rId41"/>
-      <p:bold r:id="rId42"/>
-      <p:italic r:id="rId43"/>
-      <p:boldItalic r:id="rId44"/>
+      <p:regular r:id="rId42"/>
+      <p:bold r:id="rId43"/>
+      <p:italic r:id="rId44"/>
+      <p:boldItalic r:id="rId45"/>
     </p:embeddedFont>
   </p:embeddedFontLst>
   <p:defaultTextStyle>
@@ -1625,11 +1626,17 @@
 </file>
 
 <file path=ppt/notesSlides/notesSlide14.xml><?xml version="1.0" encoding="utf-8"?>
-<p:notes xmlns:a="http://schemas.openxmlformats.org/drawingml/2006/main" xmlns:r="http://schemas.openxmlformats.org/officeDocument/2006/relationships" xmlns:p="http://schemas.openxmlformats.org/presentationml/2006/main">
+<p:notes xmlns:a="http://schemas.openxmlformats.org/drawingml/2006/main" xmlns:r="http://schemas.openxmlformats.org/officeDocument/2006/relationships" xmlns:p="http://schemas.openxmlformats.org/presentationml/2006/main" showMasterSp="0" showMasterPhAnim="0">
   <p:cSld>
     <p:spTree>
       <p:nvGrpSpPr>
-        <p:cNvPr id="1" name=""/>
+        <p:cNvPr id="1" name="Shape 123">
+          <a:extLst>
+            <a:ext uri="{FF2B5EF4-FFF2-40B4-BE49-F238E27FC236}">
+              <a16:creationId xmlns:a16="http://schemas.microsoft.com/office/drawing/2014/main" id="{D17725C2-A088-0054-E08D-AD024FE9DFD3}"/>
+            </a:ext>
+          </a:extLst>
+        </p:cNvPr>
         <p:cNvGrpSpPr/>
         <p:nvPr/>
       </p:nvGrpSpPr>
@@ -1643,70 +1650,169 @@
       </p:grpSpPr>
       <p:sp>
         <p:nvSpPr>
-          <p:cNvPr id="2" name="Slide Image Placeholder 1"/>
+          <p:cNvPr id="124" name="Google Shape;124;g3dc15369c17_0_195:notes">
+            <a:extLst>
+              <a:ext uri="{FF2B5EF4-FFF2-40B4-BE49-F238E27FC236}">
+                <a16:creationId xmlns:a16="http://schemas.microsoft.com/office/drawing/2014/main" id="{B97ADEAD-769D-0A73-2184-3C49B9D48AAC}"/>
+              </a:ext>
+            </a:extLst>
+          </p:cNvPr>
           <p:cNvSpPr>
             <a:spLocks noGrp="1" noRot="1" noChangeAspect="1"/>
           </p:cNvSpPr>
           <p:nvPr>
-            <p:ph type="sldImg"/>
+            <p:ph type="sldImg" idx="2"/>
           </p:nvPr>
         </p:nvSpPr>
         <p:spPr>
           <a:xfrm>
-            <a:off x="-952500" y="1371600"/>
-            <a:ext cx="12192000" cy="6858000"/>
-          </a:xfrm>
-        </p:spPr>
-      </p:sp>
-      <p:sp>
-        <p:nvSpPr>
-          <p:cNvPr id="3" name="Notes Placeholder 2"/>
-          <p:cNvSpPr>
+            <a:off x="685800" y="1143000"/>
+            <a:ext cx="5486400" cy="3086100"/>
+          </a:xfrm>
+          <a:custGeom>
+            <a:avLst/>
+            <a:gdLst/>
+            <a:ahLst/>
+            <a:cxnLst/>
+            <a:rect l="l" t="t" r="r" b="b"/>
+            <a:pathLst>
+              <a:path w="120000" h="120000" extrusionOk="0">
+                <a:moveTo>
+                  <a:pt x="0" y="0"/>
+                </a:moveTo>
+                <a:lnTo>
+                  <a:pt x="120000" y="0"/>
+                </a:lnTo>
+                <a:lnTo>
+                  <a:pt x="120000" y="120000"/>
+                </a:lnTo>
+                <a:lnTo>
+                  <a:pt x="0" y="120000"/>
+                </a:lnTo>
+                <a:close/>
+              </a:path>
+            </a:pathLst>
+          </a:custGeom>
+          <a:noFill/>
+          <a:ln w="12700" cap="flat" cmpd="sng">
+            <a:solidFill>
+              <a:srgbClr val="000000"/>
+            </a:solidFill>
+            <a:prstDash val="solid"/>
+            <a:round/>
+            <a:headEnd type="none" w="sm" len="sm"/>
+            <a:tailEnd type="none" w="sm" len="sm"/>
+          </a:ln>
+        </p:spPr>
+      </p:sp>
+      <p:sp>
+        <p:nvSpPr>
+          <p:cNvPr id="125" name="Google Shape;125;g3dc15369c17_0_195:notes">
+            <a:extLst>
+              <a:ext uri="{FF2B5EF4-FFF2-40B4-BE49-F238E27FC236}">
+                <a16:creationId xmlns:a16="http://schemas.microsoft.com/office/drawing/2014/main" id="{5592FDB0-3F1B-6833-195E-31AA7B16D230}"/>
+              </a:ext>
+            </a:extLst>
+          </p:cNvPr>
+          <p:cNvSpPr txBox="1">
             <a:spLocks noGrp="1"/>
           </p:cNvSpPr>
           <p:nvPr>
             <p:ph type="body" idx="1"/>
           </p:nvPr>
         </p:nvSpPr>
-        <p:spPr/>
-        <p:txBody>
-          <a:bodyPr/>
-          <a:lstStyle/>
-          <a:p>
-            <a:r>
-              <a:rPr lang="en-US" dirty="0"/>
-              <a:t>Set up the central pivot of the workshop. 'Prompt engineering was about magic words. Context engineering is about the whole environment. That's the shift.'</a:t>
-            </a:r>
-          </a:p>
-        </p:txBody>
-      </p:sp>
-      <p:sp>
-        <p:nvSpPr>
-          <p:cNvPr id="4" name="Slide Number Placeholder 3"/>
-          <p:cNvSpPr>
+        <p:spPr>
+          <a:xfrm>
+            <a:off x="685800" y="4400550"/>
+            <a:ext cx="5486400" cy="3600600"/>
+          </a:xfrm>
+          <a:prstGeom prst="rect">
+            <a:avLst/>
+          </a:prstGeom>
+          <a:noFill/>
+          <a:ln>
+            <a:noFill/>
+          </a:ln>
+        </p:spPr>
+        <p:txBody>
+          <a:bodyPr spcFirstLastPara="1" wrap="square" lIns="91425" tIns="45700" rIns="91425" bIns="45700" anchor="t" anchorCtr="0">
+            <a:noAutofit/>
+          </a:bodyPr>
+          <a:lstStyle/>
+          <a:p>
+            <a:pPr marL="0" lvl="0" indent="0" algn="l" rtl="0">
+              <a:spcBef>
+                <a:spcPts val="0"/>
+              </a:spcBef>
+              <a:spcAft>
+                <a:spcPts val="0"/>
+              </a:spcAft>
+              <a:buNone/>
+            </a:pPr>
+            <a:r>
+              <a:rPr lang="en-US"/>
+              <a:t>Stage six — the engineer era. This is where I am today. I don't start from a blank prompt anymore. I start from a base repository. A foundation I trust. Same kinds of apps I was building two years ago — but stronger, every single time. It's not a different prompt every time. It's a system. Repeatable, consistent, production-shaped from day one.</a:t>
+            </a:r>
+            <a:endParaRPr/>
+          </a:p>
+        </p:txBody>
+      </p:sp>
+      <p:sp>
+        <p:nvSpPr>
+          <p:cNvPr id="126" name="Google Shape;126;g3dc15369c17_0_195:notes">
+            <a:extLst>
+              <a:ext uri="{FF2B5EF4-FFF2-40B4-BE49-F238E27FC236}">
+                <a16:creationId xmlns:a16="http://schemas.microsoft.com/office/drawing/2014/main" id="{02706042-B037-8F6E-1F37-D06676A7B0A2}"/>
+              </a:ext>
+            </a:extLst>
+          </p:cNvPr>
+          <p:cNvSpPr txBox="1">
             <a:spLocks noGrp="1"/>
           </p:cNvSpPr>
           <p:nvPr>
-            <p:ph type="sldNum" sz="quarter" idx="10"/>
+            <p:ph type="sldNum" idx="12"/>
           </p:nvPr>
         </p:nvSpPr>
-        <p:spPr/>
-        <p:txBody>
-          <a:bodyPr/>
-          <a:lstStyle/>
-          <a:p>
-            <a:fld id="{F7021451-1387-4CA6-816F-3879F97B5CBC}" type="slidenum">
+        <p:spPr>
+          <a:xfrm>
+            <a:off x="3884613" y="8685213"/>
+            <a:ext cx="2971800" cy="458700"/>
+          </a:xfrm>
+          <a:prstGeom prst="rect">
+            <a:avLst/>
+          </a:prstGeom>
+          <a:noFill/>
+          <a:ln>
+            <a:noFill/>
+          </a:ln>
+        </p:spPr>
+        <p:txBody>
+          <a:bodyPr spcFirstLastPara="1" wrap="square" lIns="91425" tIns="45700" rIns="91425" bIns="45700" anchor="b" anchorCtr="0">
+            <a:noAutofit/>
+          </a:bodyPr>
+          <a:lstStyle/>
+          <a:p>
+            <a:pPr marL="0" lvl="0" indent="0" algn="r" rtl="0">
+              <a:spcBef>
+                <a:spcPts val="0"/>
+              </a:spcBef>
+              <a:spcAft>
+                <a:spcPts val="0"/>
+              </a:spcAft>
+              <a:buNone/>
+            </a:pPr>
+            <a:fld id="{00000000-1234-1234-1234-123412341234}" type="slidenum">
               <a:rPr lang="en-US"/>
               <a:t>14</a:t>
             </a:fld>
-            <a:endParaRPr lang="en-US"/>
+            <a:endParaRPr/>
           </a:p>
         </p:txBody>
       </p:sp>
     </p:spTree>
     <p:extLst>
       <p:ext uri="{BB962C8B-B14F-4D97-AF65-F5344CB8AC3E}">
-        <p14:creationId xmlns:p14="http://schemas.microsoft.com/office/powerpoint/2010/main" val="1024086991"/>
+        <p14:creationId xmlns:p14="http://schemas.microsoft.com/office/powerpoint/2010/main" val="2444698842"/>
       </p:ext>
     </p:extLst>
   </p:cSld>
@@ -1767,7 +1873,7 @@
           <a:p>
             <a:r>
               <a:rPr lang="en-US" dirty="0"/>
-              <a:t>Read the definition slowly, twice. Let it land. This is the one sentence you want them to take home.</a:t>
+              <a:t>Set up the central pivot of the workshop. 'Prompt engineering was about magic words. Context engineering is about the whole environment. That's the shift.'</a:t>
             </a:r>
           </a:p>
         </p:txBody>
@@ -1809,6 +1915,98 @@
 </file>
 
 <file path=ppt/notesSlides/notesSlide16.xml><?xml version="1.0" encoding="utf-8"?>
+<p:notes xmlns:a="http://schemas.openxmlformats.org/drawingml/2006/main" xmlns:r="http://schemas.openxmlformats.org/officeDocument/2006/relationships" xmlns:p="http://schemas.openxmlformats.org/presentationml/2006/main">
+  <p:cSld>
+    <p:spTree>
+      <p:nvGrpSpPr>
+        <p:cNvPr id="1" name=""/>
+        <p:cNvGrpSpPr/>
+        <p:nvPr/>
+      </p:nvGrpSpPr>
+      <p:grpSpPr>
+        <a:xfrm>
+          <a:off x="0" y="0"/>
+          <a:ext cx="0" cy="0"/>
+          <a:chOff x="0" y="0"/>
+          <a:chExt cx="0" cy="0"/>
+        </a:xfrm>
+      </p:grpSpPr>
+      <p:sp>
+        <p:nvSpPr>
+          <p:cNvPr id="2" name="Slide Image Placeholder 1"/>
+          <p:cNvSpPr>
+            <a:spLocks noGrp="1" noRot="1" noChangeAspect="1"/>
+          </p:cNvSpPr>
+          <p:nvPr>
+            <p:ph type="sldImg"/>
+          </p:nvPr>
+        </p:nvSpPr>
+        <p:spPr>
+          <a:xfrm>
+            <a:off x="-952500" y="1371600"/>
+            <a:ext cx="12192000" cy="6858000"/>
+          </a:xfrm>
+        </p:spPr>
+      </p:sp>
+      <p:sp>
+        <p:nvSpPr>
+          <p:cNvPr id="3" name="Notes Placeholder 2"/>
+          <p:cNvSpPr>
+            <a:spLocks noGrp="1"/>
+          </p:cNvSpPr>
+          <p:nvPr>
+            <p:ph type="body" idx="1"/>
+          </p:nvPr>
+        </p:nvSpPr>
+        <p:spPr/>
+        <p:txBody>
+          <a:bodyPr/>
+          <a:lstStyle/>
+          <a:p>
+            <a:r>
+              <a:rPr lang="en-US" dirty="0"/>
+              <a:t>Read the definition slowly, twice. Let it land. This is the one sentence you want them to take home.</a:t>
+            </a:r>
+          </a:p>
+        </p:txBody>
+      </p:sp>
+      <p:sp>
+        <p:nvSpPr>
+          <p:cNvPr id="4" name="Slide Number Placeholder 3"/>
+          <p:cNvSpPr>
+            <a:spLocks noGrp="1"/>
+          </p:cNvSpPr>
+          <p:nvPr>
+            <p:ph type="sldNum" sz="quarter" idx="10"/>
+          </p:nvPr>
+        </p:nvSpPr>
+        <p:spPr/>
+        <p:txBody>
+          <a:bodyPr/>
+          <a:lstStyle/>
+          <a:p>
+            <a:fld id="{F7021451-1387-4CA6-816F-3879F97B5CBC}" type="slidenum">
+              <a:rPr lang="en-US"/>
+              <a:t>16</a:t>
+            </a:fld>
+            <a:endParaRPr lang="en-US"/>
+          </a:p>
+        </p:txBody>
+      </p:sp>
+    </p:spTree>
+    <p:extLst>
+      <p:ext uri="{BB962C8B-B14F-4D97-AF65-F5344CB8AC3E}">
+        <p14:creationId xmlns:p14="http://schemas.microsoft.com/office/powerpoint/2010/main" val="1024086991"/>
+      </p:ext>
+    </p:extLst>
+  </p:cSld>
+  <p:clrMapOvr>
+    <a:masterClrMapping/>
+  </p:clrMapOvr>
+</p:notes>
+</file>
+
+<file path=ppt/notesSlides/notesSlide17.xml><?xml version="1.0" encoding="utf-8"?>
 <p:notes xmlns:a="http://schemas.openxmlformats.org/drawingml/2006/main" xmlns:r="http://schemas.openxmlformats.org/officeDocument/2006/relationships" xmlns:p="http://schemas.openxmlformats.org/presentationml/2006/main">
   <p:cSld>
     <p:spTree>
@@ -7958,7 +8156,13 @@
   <p:cSld>
     <p:spTree>
       <p:nvGrpSpPr>
-        <p:cNvPr id="1" name=""/>
+        <p:cNvPr id="1" name="Shape 127">
+          <a:extLst>
+            <a:ext uri="{FF2B5EF4-FFF2-40B4-BE49-F238E27FC236}">
+              <a16:creationId xmlns:a16="http://schemas.microsoft.com/office/drawing/2014/main" id="{C5675352-6DE6-A9A4-4AFA-63B47F095FE3}"/>
+            </a:ext>
+          </a:extLst>
+        </p:cNvPr>
         <p:cNvGrpSpPr/>
         <p:nvPr/>
       </p:nvGrpSpPr>
@@ -7972,541 +8176,799 @@
       </p:grpSpPr>
       <p:sp>
         <p:nvSpPr>
-          <p:cNvPr id="2" name="Text 0"/>
-          <p:cNvSpPr/>
-          <p:nvPr/>
-        </p:nvSpPr>
-        <p:spPr>
-          <a:xfrm>
-            <a:off x="952500" y="952500"/>
-            <a:ext cx="16874490" cy="342900"/>
-          </a:xfrm>
-          <a:prstGeom prst="rect">
-            <a:avLst/>
-          </a:prstGeom>
-          <a:noFill/>
-          <a:ln/>
-        </p:spPr>
-        <p:txBody>
-          <a:bodyPr wrap="square" lIns="25400" tIns="25400" rIns="25400" bIns="25400" rtlCol="0" anchor="t">
-            <a:normAutofit lnSpcReduction="10000"/>
-          </a:bodyPr>
-          <a:lstStyle/>
-          <a:p>
-            <a:pPr marL="0" indent="0" algn="l">
-              <a:buNone/>
-            </a:pPr>
-            <a:r>
-              <a:rPr lang="en-US" sz="1950" b="1" kern="0" spc="429" dirty="0">
+          <p:cNvPr id="128" name="Google Shape;128;g3dc15369c17_0_195">
+            <a:extLst>
+              <a:ext uri="{FF2B5EF4-FFF2-40B4-BE49-F238E27FC236}">
+                <a16:creationId xmlns:a16="http://schemas.microsoft.com/office/drawing/2014/main" id="{652D3F3A-3FFC-549A-6E40-66804C45063D}"/>
+              </a:ext>
+            </a:extLst>
+          </p:cNvPr>
+          <p:cNvSpPr/>
+          <p:nvPr/>
+        </p:nvSpPr>
+        <p:spPr>
+          <a:xfrm>
+            <a:off x="1143000" y="476250"/>
+            <a:ext cx="2080800" cy="236100"/>
+          </a:xfrm>
+          <a:prstGeom prst="rect">
+            <a:avLst/>
+          </a:prstGeom>
+          <a:noFill/>
+          <a:ln>
+            <a:noFill/>
+          </a:ln>
+        </p:spPr>
+        <p:txBody>
+          <a:bodyPr spcFirstLastPara="1" wrap="square" lIns="25400" tIns="25400" rIns="25400" bIns="25400" anchor="t" anchorCtr="0">
+            <a:noAutofit/>
+          </a:bodyPr>
+          <a:lstStyle/>
+          <a:p>
+            <a:pPr marL="0" marR="0" lvl="0" indent="0" algn="l" rtl="0">
+              <a:spcBef>
+                <a:spcPts val="0"/>
+              </a:spcBef>
+              <a:spcAft>
+                <a:spcPts val="0"/>
+              </a:spcAft>
+              <a:buClr>
+                <a:srgbClr val="6B6E78"/>
+              </a:buClr>
+              <a:buSzPts val="1350"/>
+              <a:buFont typeface="Arial"/>
+              <a:buNone/>
+            </a:pPr>
+            <a:r>
+              <a:rPr lang="en-US" sz="1350" b="0" i="0" u="none" strike="noStrike" cap="none">
+                <a:solidFill>
+                  <a:srgbClr val="6B6E78"/>
+                </a:solidFill>
+                <a:latin typeface="Arial"/>
+                <a:ea typeface="Arial"/>
+                <a:cs typeface="Arial"/>
+                <a:sym typeface="Arial"/>
+              </a:rPr>
+              <a:t>VIBE → CONTEXT</a:t>
+            </a:r>
+            <a:endParaRPr sz="1350" b="0" i="0" u="none" strike="noStrike" cap="none">
+              <a:solidFill>
+                <a:schemeClr val="dk1"/>
+              </a:solidFill>
+              <a:latin typeface="Calibri"/>
+              <a:ea typeface="Calibri"/>
+              <a:cs typeface="Calibri"/>
+              <a:sym typeface="Calibri"/>
+            </a:endParaRPr>
+          </a:p>
+        </p:txBody>
+      </p:sp>
+      <p:sp>
+        <p:nvSpPr>
+          <p:cNvPr id="129" name="Google Shape;129;g3dc15369c17_0_195">
+            <a:extLst>
+              <a:ext uri="{FF2B5EF4-FFF2-40B4-BE49-F238E27FC236}">
+                <a16:creationId xmlns:a16="http://schemas.microsoft.com/office/drawing/2014/main" id="{5FAD80A1-E63E-93E4-E154-1BFC0DA672D1}"/>
+              </a:ext>
+            </a:extLst>
+          </p:cNvPr>
+          <p:cNvSpPr/>
+          <p:nvPr/>
+        </p:nvSpPr>
+        <p:spPr>
+          <a:xfrm>
+            <a:off x="16356568" y="476250"/>
+            <a:ext cx="864600" cy="236100"/>
+          </a:xfrm>
+          <a:prstGeom prst="rect">
+            <a:avLst/>
+          </a:prstGeom>
+          <a:noFill/>
+          <a:ln>
+            <a:noFill/>
+          </a:ln>
+        </p:spPr>
+        <p:txBody>
+          <a:bodyPr spcFirstLastPara="1" wrap="square" lIns="25400" tIns="25400" rIns="25400" bIns="25400" anchor="t" anchorCtr="0">
+            <a:noAutofit/>
+          </a:bodyPr>
+          <a:lstStyle/>
+          <a:p>
+            <a:pPr marL="0" marR="0" lvl="0" indent="0" algn="l" rtl="0">
+              <a:spcBef>
+                <a:spcPts val="0"/>
+              </a:spcBef>
+              <a:spcAft>
+                <a:spcPts val="0"/>
+              </a:spcAft>
+              <a:buClr>
+                <a:srgbClr val="6B6E78"/>
+              </a:buClr>
+              <a:buSzPts val="1350"/>
+              <a:buFont typeface="Arial"/>
+              <a:buNone/>
+            </a:pPr>
+            <a:r>
+              <a:rPr lang="en-US" sz="1350" b="0" i="0" u="none" strike="noStrike" cap="none">
+                <a:solidFill>
+                  <a:srgbClr val="6B6E78"/>
+                </a:solidFill>
+                <a:latin typeface="Arial"/>
+                <a:ea typeface="Arial"/>
+                <a:cs typeface="Arial"/>
+                <a:sym typeface="Arial"/>
+              </a:rPr>
+              <a:t>06 / 06</a:t>
+            </a:r>
+            <a:endParaRPr sz="1350" b="0" i="0" u="none" strike="noStrike" cap="none">
+              <a:solidFill>
+                <a:schemeClr val="dk1"/>
+              </a:solidFill>
+              <a:latin typeface="Calibri"/>
+              <a:ea typeface="Calibri"/>
+              <a:cs typeface="Calibri"/>
+              <a:sym typeface="Calibri"/>
+            </a:endParaRPr>
+          </a:p>
+        </p:txBody>
+      </p:sp>
+      <p:sp>
+        <p:nvSpPr>
+          <p:cNvPr id="130" name="Google Shape;130;g3dc15369c17_0_195">
+            <a:extLst>
+              <a:ext uri="{FF2B5EF4-FFF2-40B4-BE49-F238E27FC236}">
+                <a16:creationId xmlns:a16="http://schemas.microsoft.com/office/drawing/2014/main" id="{F1D20B99-53D4-34D6-0BA3-3E2E2A8F061F}"/>
+              </a:ext>
+            </a:extLst>
+          </p:cNvPr>
+          <p:cNvSpPr/>
+          <p:nvPr/>
+        </p:nvSpPr>
+        <p:spPr>
+          <a:xfrm>
+            <a:off x="11224617" y="381000"/>
+            <a:ext cx="6392400" cy="4248300"/>
+          </a:xfrm>
+          <a:prstGeom prst="rect">
+            <a:avLst/>
+          </a:prstGeom>
+          <a:noFill/>
+          <a:ln>
+            <a:noFill/>
+          </a:ln>
+        </p:spPr>
+        <p:txBody>
+          <a:bodyPr spcFirstLastPara="1" wrap="square" lIns="25400" tIns="25400" rIns="25400" bIns="25400" anchor="t" anchorCtr="0">
+            <a:noAutofit/>
+          </a:bodyPr>
+          <a:lstStyle/>
+          <a:p>
+            <a:pPr marL="0" marR="0" lvl="0" indent="0" algn="l" rtl="0">
+              <a:lnSpc>
+                <a:spcPct val="85000"/>
+              </a:lnSpc>
+              <a:spcBef>
+                <a:spcPts val="0"/>
+              </a:spcBef>
+              <a:spcAft>
+                <a:spcPts val="0"/>
+              </a:spcAft>
+              <a:buClr>
+                <a:srgbClr val="F7F5F1"/>
+              </a:buClr>
+              <a:buSzPts val="39000"/>
+              <a:buFont typeface="Arial"/>
+              <a:buNone/>
+            </a:pPr>
+            <a:r>
+              <a:rPr lang="en-US" sz="39000" b="1" i="0" u="none" strike="noStrike" cap="none" dirty="0">
+                <a:solidFill>
+                  <a:srgbClr val="F7F5F1"/>
+                </a:solidFill>
+                <a:latin typeface="Arial"/>
+                <a:ea typeface="Arial"/>
+                <a:cs typeface="Arial"/>
+                <a:sym typeface="Arial"/>
+              </a:rPr>
+              <a:t>10</a:t>
+            </a:r>
+            <a:endParaRPr sz="39000" b="0" i="0" u="none" strike="noStrike" cap="none" dirty="0">
+              <a:solidFill>
+                <a:schemeClr val="dk1"/>
+              </a:solidFill>
+              <a:latin typeface="Calibri"/>
+              <a:ea typeface="Calibri"/>
+              <a:cs typeface="Calibri"/>
+              <a:sym typeface="Calibri"/>
+            </a:endParaRPr>
+          </a:p>
+        </p:txBody>
+      </p:sp>
+      <p:sp>
+        <p:nvSpPr>
+          <p:cNvPr id="131" name="Google Shape;131;g3dc15369c17_0_195">
+            <a:extLst>
+              <a:ext uri="{FF2B5EF4-FFF2-40B4-BE49-F238E27FC236}">
+                <a16:creationId xmlns:a16="http://schemas.microsoft.com/office/drawing/2014/main" id="{6C483107-697C-0EC5-4701-1A0BFEB393E6}"/>
+              </a:ext>
+            </a:extLst>
+          </p:cNvPr>
+          <p:cNvSpPr/>
+          <p:nvPr/>
+        </p:nvSpPr>
+        <p:spPr>
+          <a:xfrm>
+            <a:off x="1143000" y="3102293"/>
+            <a:ext cx="14716200" cy="312300"/>
+          </a:xfrm>
+          <a:prstGeom prst="rect">
+            <a:avLst/>
+          </a:prstGeom>
+          <a:noFill/>
+          <a:ln>
+            <a:noFill/>
+          </a:ln>
+        </p:spPr>
+        <p:txBody>
+          <a:bodyPr spcFirstLastPara="1" wrap="square" lIns="25400" tIns="25400" rIns="25400" bIns="25400" anchor="t" anchorCtr="0">
+            <a:noAutofit/>
+          </a:bodyPr>
+          <a:lstStyle/>
+          <a:p>
+            <a:pPr marL="0" marR="0" lvl="0" indent="0" algn="l" rtl="0">
+              <a:spcBef>
+                <a:spcPts val="0"/>
+              </a:spcBef>
+              <a:spcAft>
+                <a:spcPts val="0"/>
+              </a:spcAft>
+              <a:buClr>
+                <a:srgbClr val="F58220"/>
+              </a:buClr>
+              <a:buSzPts val="1650"/>
+              <a:buFont typeface="Arial"/>
+              <a:buNone/>
+            </a:pPr>
+            <a:r>
+              <a:rPr lang="en-US" sz="1650" b="0" i="0" u="none" strike="noStrike" cap="none">
                 <a:solidFill>
                   <a:srgbClr val="F58220"/>
                 </a:solidFill>
-                <a:latin typeface="Montserrat" pitchFamily="34" charset="0"/>
-                <a:ea typeface="Montserrat" pitchFamily="34" charset="-122"/>
-                <a:cs typeface="Montserrat" pitchFamily="34" charset="-120"/>
-              </a:rPr>
-              <a:t>THE SHIFT</a:t>
-            </a:r>
-            <a:endParaRPr lang="en-US" sz="1950" dirty="0"/>
-          </a:p>
-        </p:txBody>
-      </p:sp>
-      <p:sp>
-        <p:nvSpPr>
-          <p:cNvPr id="3" name="Text 1"/>
-          <p:cNvSpPr/>
-          <p:nvPr/>
-        </p:nvSpPr>
-        <p:spPr>
-          <a:xfrm>
-            <a:off x="952500" y="1447800"/>
-            <a:ext cx="16874490" cy="1558230"/>
-          </a:xfrm>
-          <a:prstGeom prst="rect">
-            <a:avLst/>
-          </a:prstGeom>
-          <a:noFill/>
-          <a:ln/>
-        </p:spPr>
-        <p:txBody>
-          <a:bodyPr wrap="square" lIns="25400" tIns="25400" rIns="25400" bIns="25400" rtlCol="0" anchor="t">
-            <a:normAutofit fontScale="92500" lnSpcReduction="20000"/>
-          </a:bodyPr>
-          <a:lstStyle/>
-          <a:p>
-            <a:pPr marL="0" indent="0" algn="l">
+                <a:latin typeface="Arial"/>
+                <a:ea typeface="Arial"/>
+                <a:cs typeface="Arial"/>
+                <a:sym typeface="Arial"/>
+              </a:rPr>
+              <a:t>STAGE 06</a:t>
+            </a:r>
+            <a:endParaRPr sz="1650" b="0" i="0" u="none" strike="noStrike" cap="none">
+              <a:solidFill>
+                <a:schemeClr val="dk1"/>
+              </a:solidFill>
+              <a:latin typeface="Calibri"/>
+              <a:ea typeface="Calibri"/>
+              <a:cs typeface="Calibri"/>
+              <a:sym typeface="Calibri"/>
+            </a:endParaRPr>
+          </a:p>
+        </p:txBody>
+      </p:sp>
+      <p:sp>
+        <p:nvSpPr>
+          <p:cNvPr id="132" name="Google Shape;132;g3dc15369c17_0_195">
+            <a:extLst>
+              <a:ext uri="{FF2B5EF4-FFF2-40B4-BE49-F238E27FC236}">
+                <a16:creationId xmlns:a16="http://schemas.microsoft.com/office/drawing/2014/main" id="{F2362633-E3B6-89C8-6660-DAFE5BFB01AD}"/>
+              </a:ext>
+            </a:extLst>
+          </p:cNvPr>
+          <p:cNvSpPr/>
+          <p:nvPr/>
+        </p:nvSpPr>
+        <p:spPr>
+          <a:xfrm>
+            <a:off x="1143000" y="3681413"/>
+            <a:ext cx="14716200" cy="1341000"/>
+          </a:xfrm>
+          <a:prstGeom prst="rect">
+            <a:avLst/>
+          </a:prstGeom>
+          <a:noFill/>
+          <a:ln>
+            <a:noFill/>
+          </a:ln>
+        </p:spPr>
+        <p:txBody>
+          <a:bodyPr spcFirstLastPara="1" wrap="square" lIns="25400" tIns="25400" rIns="25400" bIns="25400" anchor="t" anchorCtr="0">
+            <a:noAutofit/>
+          </a:bodyPr>
+          <a:lstStyle/>
+          <a:p>
+            <a:pPr marL="0" marR="0" lvl="0" indent="0" algn="l" rtl="0">
               <a:lnSpc>
-                <a:spcPct val="105000"/>
+                <a:spcPct val="95000"/>
               </a:lnSpc>
-              <a:buNone/>
-            </a:pPr>
-            <a:r>
-              <a:rPr lang="en-US" sz="5700" b="1" kern="0" spc="-85" dirty="0">
-                <a:solidFill>
-                  <a:srgbClr val="2A2D38"/>
-                </a:solidFill>
-                <a:latin typeface="Montserrat" pitchFamily="34" charset="0"/>
-                <a:ea typeface="Montserrat" pitchFamily="34" charset="-122"/>
-                <a:cs typeface="Montserrat" pitchFamily="34" charset="-120"/>
-              </a:rPr>
-              <a:t>From prompt engineering to context engineering.</a:t>
-            </a:r>
-            <a:endParaRPr lang="en-US" sz="5700" dirty="0"/>
-          </a:p>
-        </p:txBody>
-      </p:sp>
-      <p:sp>
-        <p:nvSpPr>
-          <p:cNvPr id="4" name="Shape 2"/>
-          <p:cNvSpPr/>
-          <p:nvPr/>
-        </p:nvSpPr>
-        <p:spPr>
-          <a:xfrm>
-            <a:off x="952500" y="3463230"/>
-            <a:ext cx="914400" cy="38100"/>
-          </a:xfrm>
-          <a:prstGeom prst="roundRect">
-            <a:avLst>
-              <a:gd name="adj" fmla="val 50000"/>
-            </a:avLst>
-          </a:prstGeom>
-          <a:solidFill>
-            <a:srgbClr val="F58220"/>
-          </a:solidFill>
-          <a:ln/>
-        </p:spPr>
-        <p:txBody>
-          <a:bodyPr/>
-          <a:lstStyle/>
-          <a:p>
-            <a:endParaRPr lang="en-US"/>
-          </a:p>
-        </p:txBody>
-      </p:sp>
-      <p:sp>
-        <p:nvSpPr>
-          <p:cNvPr id="5" name="Shape 3"/>
-          <p:cNvSpPr/>
-          <p:nvPr/>
-        </p:nvSpPr>
-        <p:spPr>
-          <a:xfrm>
-            <a:off x="952500" y="4158555"/>
-            <a:ext cx="7429500" cy="4362450"/>
-          </a:xfrm>
-          <a:prstGeom prst="roundRect">
-            <a:avLst>
-              <a:gd name="adj" fmla="val 2620"/>
-            </a:avLst>
-          </a:prstGeom>
-          <a:solidFill>
-            <a:srgbClr val="FFFFFF"/>
-          </a:solidFill>
-          <a:ln w="9525">
+              <a:spcBef>
+                <a:spcPts val="0"/>
+              </a:spcBef>
+              <a:spcAft>
+                <a:spcPts val="0"/>
+              </a:spcAft>
+              <a:buClr>
+                <a:srgbClr val="14161C"/>
+              </a:buClr>
+              <a:buSzPts val="10800"/>
+              <a:buFont typeface="Arial"/>
+              <a:buNone/>
+            </a:pPr>
+            <a:r>
+              <a:rPr lang="en-US" sz="10800" b="1" dirty="0">
+                <a:solidFill>
+                  <a:srgbClr val="14161C"/>
+                </a:solidFill>
+                <a:ea typeface="Calibri"/>
+              </a:rPr>
+              <a:t>Brownfield Work</a:t>
+            </a:r>
+            <a:endParaRPr sz="10800" b="0" i="0" u="none" strike="noStrike" cap="none" dirty="0">
+              <a:solidFill>
+                <a:schemeClr val="dk1"/>
+              </a:solidFill>
+              <a:latin typeface="Calibri"/>
+              <a:ea typeface="Calibri"/>
+              <a:cs typeface="Calibri"/>
+              <a:sym typeface="Calibri"/>
+            </a:endParaRPr>
+          </a:p>
+        </p:txBody>
+      </p:sp>
+      <p:sp>
+        <p:nvSpPr>
+          <p:cNvPr id="133" name="Google Shape;133;g3dc15369c17_0_195">
+            <a:extLst>
+              <a:ext uri="{FF2B5EF4-FFF2-40B4-BE49-F238E27FC236}">
+                <a16:creationId xmlns:a16="http://schemas.microsoft.com/office/drawing/2014/main" id="{379D4877-C7E1-0B61-006F-D40F971DB061}"/>
+              </a:ext>
+            </a:extLst>
+          </p:cNvPr>
+          <p:cNvSpPr/>
+          <p:nvPr/>
+        </p:nvSpPr>
+        <p:spPr>
+          <a:xfrm>
+            <a:off x="1143000" y="5441632"/>
+            <a:ext cx="13735200" cy="1015500"/>
+          </a:xfrm>
+          <a:prstGeom prst="rect">
+            <a:avLst/>
+          </a:prstGeom>
+          <a:noFill/>
+          <a:ln>
+            <a:noFill/>
+          </a:ln>
+        </p:spPr>
+        <p:txBody>
+          <a:bodyPr spcFirstLastPara="1" wrap="square" lIns="25400" tIns="25400" rIns="25400" bIns="25400" anchor="t" anchorCtr="0">
+            <a:noAutofit/>
+          </a:bodyPr>
+          <a:lstStyle/>
+          <a:p>
+            <a:pPr marL="0" marR="0" lvl="0" indent="0" algn="l" rtl="0">
+              <a:lnSpc>
+                <a:spcPct val="135000"/>
+              </a:lnSpc>
+              <a:spcBef>
+                <a:spcPts val="0"/>
+              </a:spcBef>
+              <a:spcAft>
+                <a:spcPts val="0"/>
+              </a:spcAft>
+              <a:buClr>
+                <a:srgbClr val="6B6E78"/>
+              </a:buClr>
+              <a:buSzPts val="2850"/>
+              <a:buFont typeface="Arial"/>
+              <a:buNone/>
+            </a:pPr>
+            <a:r>
+              <a:rPr lang="en-US" sz="2850" b="0" i="0" u="none" strike="noStrike" cap="none" dirty="0">
+                <a:solidFill>
+                  <a:srgbClr val="6B6E78"/>
+                </a:solidFill>
+                <a:latin typeface="Arial"/>
+                <a:ea typeface="Arial"/>
+                <a:cs typeface="Arial"/>
+                <a:sym typeface="Arial"/>
+              </a:rPr>
+              <a:t>VIBE coding dies a quick death on the vine when you need to work on existing code or legacy solutions. </a:t>
+            </a:r>
+            <a:r>
+              <a:rPr lang="en-US" sz="2850" b="0" i="0" u="none" strike="noStrike" cap="none" dirty="0">
+                <a:solidFill>
+                  <a:srgbClr val="F58220"/>
+                </a:solidFill>
+                <a:latin typeface="Arial"/>
+                <a:ea typeface="Arial"/>
+                <a:cs typeface="Arial"/>
+                <a:sym typeface="Arial"/>
+              </a:rPr>
+              <a:t>You need the EXPLORE steps of context engineering.</a:t>
+            </a:r>
+            <a:endParaRPr sz="2850" b="0" i="0" u="none" strike="noStrike" cap="none" dirty="0">
+              <a:solidFill>
+                <a:schemeClr val="dk1"/>
+              </a:solidFill>
+              <a:latin typeface="Calibri"/>
+              <a:ea typeface="Calibri"/>
+              <a:cs typeface="Calibri"/>
+              <a:sym typeface="Calibri"/>
+            </a:endParaRPr>
+          </a:p>
+        </p:txBody>
+      </p:sp>
+      <p:sp>
+        <p:nvSpPr>
+          <p:cNvPr id="134" name="Google Shape;134;g3dc15369c17_0_195">
+            <a:extLst>
+              <a:ext uri="{FF2B5EF4-FFF2-40B4-BE49-F238E27FC236}">
+                <a16:creationId xmlns:a16="http://schemas.microsoft.com/office/drawing/2014/main" id="{23B85CB1-8E2C-9A5D-00A4-978148AC476A}"/>
+              </a:ext>
+            </a:extLst>
+          </p:cNvPr>
+          <p:cNvSpPr/>
+          <p:nvPr/>
+        </p:nvSpPr>
+        <p:spPr>
+          <a:xfrm>
+            <a:off x="1143000" y="6876098"/>
+            <a:ext cx="1834200" cy="403800"/>
+          </a:xfrm>
+          <a:prstGeom prst="rect">
+            <a:avLst/>
+          </a:prstGeom>
+          <a:noFill/>
+          <a:ln w="9525" cap="flat" cmpd="sng">
             <a:solidFill>
-              <a:srgbClr val="E5E5E7"/>
+              <a:srgbClr val="F58220"/>
             </a:solidFill>
             <a:prstDash val="solid"/>
+            <a:round/>
+            <a:headEnd type="none" w="sm" len="sm"/>
+            <a:tailEnd type="none" w="sm" len="sm"/>
           </a:ln>
-          <a:effectLst>
-            <a:outerShdw blurRad="114300" dist="38100" dir="5400000" algn="bl" rotWithShape="0">
-              <a:srgbClr val="2A2D38">
-                <a:alpha val="5000"/>
-              </a:srgbClr>
-            </a:outerShdw>
-          </a:effectLst>
-        </p:spPr>
-        <p:txBody>
-          <a:bodyPr/>
-          <a:lstStyle/>
-          <a:p>
-            <a:endParaRPr lang="en-US"/>
-          </a:p>
-        </p:txBody>
-      </p:sp>
-      <p:sp>
-        <p:nvSpPr>
-          <p:cNvPr id="6" name="Text 4"/>
-          <p:cNvSpPr/>
-          <p:nvPr/>
-        </p:nvSpPr>
-        <p:spPr>
-          <a:xfrm>
-            <a:off x="1381125" y="4625280"/>
-            <a:ext cx="6769418" cy="314325"/>
-          </a:xfrm>
-          <a:prstGeom prst="rect">
-            <a:avLst/>
-          </a:prstGeom>
-          <a:noFill/>
-          <a:ln/>
-        </p:spPr>
-        <p:txBody>
-          <a:bodyPr wrap="square" lIns="25400" tIns="25400" rIns="25400" bIns="25400" rtlCol="0" anchor="t">
-            <a:normAutofit lnSpcReduction="10000"/>
-          </a:bodyPr>
-          <a:lstStyle/>
-          <a:p>
-            <a:pPr marL="0" indent="0" algn="l">
-              <a:buNone/>
-            </a:pPr>
-            <a:r>
-              <a:rPr lang="en-US" sz="1800" b="1" kern="0" spc="324" dirty="0">
-                <a:solidFill>
-                  <a:srgbClr val="9A9CA4"/>
-                </a:solidFill>
-                <a:latin typeface="Montserrat" pitchFamily="34" charset="0"/>
-                <a:ea typeface="Montserrat" pitchFamily="34" charset="-122"/>
-                <a:cs typeface="Montserrat" pitchFamily="34" charset="-120"/>
-              </a:rPr>
-              <a:t>THEN</a:t>
-            </a:r>
-            <a:endParaRPr lang="en-US" sz="1800" dirty="0"/>
-          </a:p>
-        </p:txBody>
-      </p:sp>
-      <p:sp>
-        <p:nvSpPr>
-          <p:cNvPr id="7" name="Text 5"/>
-          <p:cNvSpPr/>
-          <p:nvPr/>
-        </p:nvSpPr>
-        <p:spPr>
-          <a:xfrm>
-            <a:off x="1381125" y="5072955"/>
-            <a:ext cx="6769418" cy="685800"/>
-          </a:xfrm>
-          <a:prstGeom prst="rect">
-            <a:avLst/>
-          </a:prstGeom>
-          <a:noFill/>
-          <a:ln/>
-        </p:spPr>
-        <p:txBody>
-          <a:bodyPr wrap="square" lIns="25400" tIns="25400" rIns="25400" bIns="25400" rtlCol="0" anchor="t">
-            <a:normAutofit lnSpcReduction="10000"/>
-          </a:bodyPr>
-          <a:lstStyle/>
-          <a:p>
-            <a:pPr marL="0" indent="0" algn="l">
-              <a:buNone/>
-            </a:pPr>
-            <a:r>
-              <a:rPr lang="en-US" sz="4200" b="1" kern="0" spc="-63" dirty="0">
-                <a:solidFill>
-                  <a:srgbClr val="2A2D38"/>
-                </a:solidFill>
-                <a:latin typeface="Montserrat" pitchFamily="34" charset="0"/>
-                <a:ea typeface="Montserrat" pitchFamily="34" charset="-122"/>
-                <a:cs typeface="Montserrat" pitchFamily="34" charset="-120"/>
-              </a:rPr>
-              <a:t>Prompt Engineering</a:t>
-            </a:r>
-            <a:endParaRPr lang="en-US" sz="4200" dirty="0"/>
-          </a:p>
-        </p:txBody>
-      </p:sp>
-      <p:sp>
-        <p:nvSpPr>
-          <p:cNvPr id="8" name="Text 6"/>
-          <p:cNvSpPr/>
-          <p:nvPr/>
-        </p:nvSpPr>
-        <p:spPr>
-          <a:xfrm>
-            <a:off x="1381125" y="5949255"/>
-            <a:ext cx="6769418" cy="781050"/>
-          </a:xfrm>
-          <a:prstGeom prst="rect">
-            <a:avLst/>
-          </a:prstGeom>
-          <a:noFill/>
-          <a:ln/>
-        </p:spPr>
-        <p:txBody>
-          <a:bodyPr wrap="square" lIns="25400" tIns="25400" rIns="25400" bIns="25400" rtlCol="0" anchor="t">
-            <a:normAutofit fontScale="92500" lnSpcReduction="10000"/>
-          </a:bodyPr>
-          <a:lstStyle/>
-          <a:p>
-            <a:pPr marL="0" indent="0" algn="l">
-              <a:lnSpc>
-                <a:spcPct val="150000"/>
-              </a:lnSpc>
-              <a:buNone/>
-            </a:pPr>
-            <a:r>
-              <a:rPr lang="en-US" sz="1950" dirty="0">
-                <a:solidFill>
-                  <a:srgbClr val="6B6E78"/>
-                </a:solidFill>
-                <a:latin typeface="Inter" pitchFamily="34" charset="0"/>
-                <a:ea typeface="Inter" pitchFamily="34" charset="-122"/>
-                <a:cs typeface="Inter" pitchFamily="34" charset="-120"/>
-              </a:rPr>
-              <a:t>Find the right </a:t>
-            </a:r>
-            <a:r>
-              <a:rPr lang="en-US" sz="1950" i="1" dirty="0">
-                <a:solidFill>
-                  <a:srgbClr val="6B6E78"/>
-                </a:solidFill>
-                <a:latin typeface="Inter" pitchFamily="34" charset="0"/>
-                <a:ea typeface="Inter" pitchFamily="34" charset="-122"/>
-                <a:cs typeface="Inter" pitchFamily="34" charset="-120"/>
-              </a:rPr>
-              <a:t>magic words </a:t>
-            </a:r>
-            <a:r>
-              <a:rPr lang="en-US" sz="1950" dirty="0">
-                <a:solidFill>
-                  <a:srgbClr val="6B6E78"/>
-                </a:solidFill>
-                <a:latin typeface="Inter" pitchFamily="34" charset="0"/>
-                <a:ea typeface="Inter" pitchFamily="34" charset="-122"/>
-                <a:cs typeface="Inter" pitchFamily="34" charset="-120"/>
-              </a:rPr>
-              <a:t>to coax a single response out of a model.</a:t>
-            </a:r>
-            <a:endParaRPr lang="en-US" sz="1950" dirty="0"/>
-          </a:p>
-        </p:txBody>
-      </p:sp>
-      <p:sp>
-        <p:nvSpPr>
-          <p:cNvPr id="9" name="Text 7"/>
-          <p:cNvSpPr/>
-          <p:nvPr/>
-        </p:nvSpPr>
-        <p:spPr>
-          <a:xfrm>
-            <a:off x="8724900" y="5882580"/>
-            <a:ext cx="838200" cy="952500"/>
-          </a:xfrm>
-          <a:prstGeom prst="rect">
-            <a:avLst/>
-          </a:prstGeom>
-          <a:noFill/>
-          <a:ln/>
-        </p:spPr>
-        <p:txBody>
-          <a:bodyPr wrap="square" lIns="25400" tIns="25400" rIns="25400" bIns="25400" rtlCol="0" anchor="t">
-            <a:normAutofit fontScale="92500" lnSpcReduction="20000"/>
-          </a:bodyPr>
-          <a:lstStyle/>
-          <a:p>
-            <a:pPr marL="0" indent="0" algn="ctr">
-              <a:lnSpc>
-                <a:spcPct val="100000"/>
-              </a:lnSpc>
-              <a:buNone/>
-            </a:pPr>
-            <a:r>
-              <a:rPr lang="en-US" sz="7200" b="1" dirty="0">
-                <a:solidFill>
-                  <a:srgbClr val="3FE0D0"/>
-                </a:solidFill>
-                <a:latin typeface="Montserrat" pitchFamily="34" charset="0"/>
-                <a:ea typeface="Montserrat" pitchFamily="34" charset="-122"/>
-                <a:cs typeface="Montserrat" pitchFamily="34" charset="-120"/>
-              </a:rPr>
-              <a:t>→</a:t>
-            </a:r>
-            <a:endParaRPr lang="en-US" sz="7200" dirty="0"/>
-          </a:p>
-        </p:txBody>
-      </p:sp>
-      <p:sp>
-        <p:nvSpPr>
-          <p:cNvPr id="10" name="Shape 8"/>
-          <p:cNvSpPr/>
-          <p:nvPr/>
-        </p:nvSpPr>
-        <p:spPr>
-          <a:xfrm>
-            <a:off x="9906000" y="4149030"/>
-            <a:ext cx="7429500" cy="4381500"/>
-          </a:xfrm>
-          <a:prstGeom prst="roundRect">
-            <a:avLst>
-              <a:gd name="adj" fmla="val 2609"/>
-            </a:avLst>
-          </a:prstGeom>
-          <a:solidFill>
-            <a:srgbClr val="FFFFFF"/>
-          </a:solidFill>
-          <a:ln w="19050">
+        </p:spPr>
+        <p:txBody>
+          <a:bodyPr spcFirstLastPara="1" wrap="square" lIns="91425" tIns="91425" rIns="91425" bIns="91425" anchor="ctr" anchorCtr="0">
+            <a:noAutofit/>
+          </a:bodyPr>
+          <a:lstStyle/>
+          <a:p>
+            <a:pPr marL="0" lvl="0" indent="0" algn="l" rtl="0">
+              <a:spcBef>
+                <a:spcPts val="0"/>
+              </a:spcBef>
+              <a:spcAft>
+                <a:spcPts val="0"/>
+              </a:spcAft>
+              <a:buNone/>
+            </a:pPr>
+            <a:endParaRPr/>
+          </a:p>
+        </p:txBody>
+      </p:sp>
+      <p:sp>
+        <p:nvSpPr>
+          <p:cNvPr id="135" name="Google Shape;135;g3dc15369c17_0_195">
+            <a:extLst>
+              <a:ext uri="{FF2B5EF4-FFF2-40B4-BE49-F238E27FC236}">
+                <a16:creationId xmlns:a16="http://schemas.microsoft.com/office/drawing/2014/main" id="{2E5AB19F-CD48-7103-728D-2BE20FFE127F}"/>
+              </a:ext>
+            </a:extLst>
+          </p:cNvPr>
+          <p:cNvSpPr/>
+          <p:nvPr/>
+        </p:nvSpPr>
+        <p:spPr>
+          <a:xfrm>
+            <a:off x="1322070" y="6978968"/>
+            <a:ext cx="1552200" cy="236100"/>
+          </a:xfrm>
+          <a:prstGeom prst="rect">
+            <a:avLst/>
+          </a:prstGeom>
+          <a:noFill/>
+          <a:ln>
+            <a:noFill/>
+          </a:ln>
+        </p:spPr>
+        <p:txBody>
+          <a:bodyPr spcFirstLastPara="1" wrap="square" lIns="25400" tIns="25400" rIns="25400" bIns="25400" anchor="ctr" anchorCtr="0">
+            <a:noAutofit/>
+          </a:bodyPr>
+          <a:lstStyle/>
+          <a:p>
+            <a:pPr marL="0" marR="0" lvl="0" indent="0" algn="l" rtl="0">
+              <a:spcBef>
+                <a:spcPts val="0"/>
+              </a:spcBef>
+              <a:spcAft>
+                <a:spcPts val="0"/>
+              </a:spcAft>
+              <a:buClr>
+                <a:srgbClr val="F58220"/>
+              </a:buClr>
+              <a:buSzPts val="1350"/>
+              <a:buFont typeface="Arial"/>
+              <a:buNone/>
+            </a:pPr>
+            <a:r>
+              <a:rPr lang="en-US" sz="1350" b="0" i="0" u="none" strike="noStrike" cap="none" dirty="0">
+                <a:solidFill>
+                  <a:srgbClr val="F58220"/>
+                </a:solidFill>
+                <a:latin typeface="Arial"/>
+                <a:ea typeface="Arial"/>
+                <a:cs typeface="Arial"/>
+                <a:sym typeface="Arial"/>
+              </a:rPr>
+              <a:t>EXPLORE</a:t>
+            </a:r>
+            <a:endParaRPr sz="1350" b="0" i="0" u="none" strike="noStrike" cap="none" dirty="0">
+              <a:solidFill>
+                <a:schemeClr val="dk1"/>
+              </a:solidFill>
+              <a:latin typeface="Calibri"/>
+              <a:ea typeface="Calibri"/>
+              <a:cs typeface="Calibri"/>
+              <a:sym typeface="Calibri"/>
+            </a:endParaRPr>
+          </a:p>
+        </p:txBody>
+      </p:sp>
+      <p:sp>
+        <p:nvSpPr>
+          <p:cNvPr id="136" name="Google Shape;136;g3dc15369c17_0_195">
+            <a:extLst>
+              <a:ext uri="{FF2B5EF4-FFF2-40B4-BE49-F238E27FC236}">
+                <a16:creationId xmlns:a16="http://schemas.microsoft.com/office/drawing/2014/main" id="{853FCBB3-8A3E-A3AB-111F-92003044C013}"/>
+              </a:ext>
+            </a:extLst>
+          </p:cNvPr>
+          <p:cNvSpPr/>
+          <p:nvPr/>
+        </p:nvSpPr>
+        <p:spPr>
+          <a:xfrm>
+            <a:off x="3148727" y="6876098"/>
+            <a:ext cx="1840200" cy="403800"/>
+          </a:xfrm>
+          <a:prstGeom prst="rect">
+            <a:avLst/>
+          </a:prstGeom>
+          <a:noFill/>
+          <a:ln w="9525" cap="flat" cmpd="sng">
             <a:solidFill>
-              <a:srgbClr val="3FE0D0"/>
+              <a:srgbClr val="F58220"/>
             </a:solidFill>
             <a:prstDash val="solid"/>
+            <a:round/>
+            <a:headEnd type="none" w="sm" len="sm"/>
+            <a:tailEnd type="none" w="sm" len="sm"/>
           </a:ln>
-          <a:effectLst>
-            <a:outerShdw blurRad="114300" dist="38100" dir="5400000" algn="bl" rotWithShape="0">
-              <a:srgbClr val="2A2D38">
-                <a:alpha val="5000"/>
-              </a:srgbClr>
-            </a:outerShdw>
-          </a:effectLst>
-        </p:spPr>
-        <p:txBody>
-          <a:bodyPr/>
-          <a:lstStyle/>
-          <a:p>
-            <a:endParaRPr lang="en-US"/>
-          </a:p>
-        </p:txBody>
-      </p:sp>
-      <p:sp>
-        <p:nvSpPr>
-          <p:cNvPr id="11" name="Text 9"/>
-          <p:cNvSpPr/>
-          <p:nvPr/>
-        </p:nvSpPr>
-        <p:spPr>
-          <a:xfrm>
-            <a:off x="10344150" y="4625280"/>
-            <a:ext cx="6749796" cy="314325"/>
-          </a:xfrm>
-          <a:prstGeom prst="rect">
-            <a:avLst/>
-          </a:prstGeom>
-          <a:noFill/>
-          <a:ln/>
-        </p:spPr>
-        <p:txBody>
-          <a:bodyPr wrap="square" lIns="25400" tIns="25400" rIns="25400" bIns="25400" rtlCol="0" anchor="t">
-            <a:normAutofit lnSpcReduction="10000"/>
-          </a:bodyPr>
-          <a:lstStyle/>
-          <a:p>
-            <a:pPr marL="0" indent="0" algn="l">
-              <a:buNone/>
-            </a:pPr>
-            <a:r>
-              <a:rPr lang="en-US" sz="1800" b="1" kern="0" spc="324" dirty="0">
-                <a:solidFill>
-                  <a:srgbClr val="3FE0D0"/>
-                </a:solidFill>
-                <a:latin typeface="Montserrat" pitchFamily="34" charset="0"/>
-                <a:ea typeface="Montserrat" pitchFamily="34" charset="-122"/>
-                <a:cs typeface="Montserrat" pitchFamily="34" charset="-120"/>
-              </a:rPr>
-              <a:t>NOW</a:t>
-            </a:r>
-            <a:endParaRPr lang="en-US" sz="1800" dirty="0"/>
-          </a:p>
-        </p:txBody>
-      </p:sp>
-      <p:sp>
-        <p:nvSpPr>
-          <p:cNvPr id="12" name="Text 10"/>
-          <p:cNvSpPr/>
-          <p:nvPr/>
-        </p:nvSpPr>
-        <p:spPr>
-          <a:xfrm>
-            <a:off x="10344150" y="5072955"/>
-            <a:ext cx="6749796" cy="685800"/>
-          </a:xfrm>
-          <a:prstGeom prst="rect">
-            <a:avLst/>
-          </a:prstGeom>
-          <a:noFill/>
-          <a:ln/>
-        </p:spPr>
-        <p:txBody>
-          <a:bodyPr wrap="square" lIns="25400" tIns="25400" rIns="25400" bIns="25400" rtlCol="0" anchor="t">
-            <a:normAutofit lnSpcReduction="10000"/>
-          </a:bodyPr>
-          <a:lstStyle/>
-          <a:p>
-            <a:pPr marL="0" indent="0" algn="l">
-              <a:buNone/>
-            </a:pPr>
-            <a:r>
-              <a:rPr lang="en-US" sz="4200" b="1" kern="0" spc="-63" dirty="0">
-                <a:solidFill>
-                  <a:srgbClr val="2A2D38"/>
-                </a:solidFill>
-                <a:latin typeface="Montserrat" pitchFamily="34" charset="0"/>
-                <a:ea typeface="Montserrat" pitchFamily="34" charset="-122"/>
-                <a:cs typeface="Montserrat" pitchFamily="34" charset="-120"/>
-              </a:rPr>
-              <a:t>Context Engineering</a:t>
-            </a:r>
-            <a:endParaRPr lang="en-US" sz="4200" dirty="0"/>
-          </a:p>
-        </p:txBody>
-      </p:sp>
-      <p:sp>
-        <p:nvSpPr>
-          <p:cNvPr id="13" name="Text 11"/>
-          <p:cNvSpPr/>
-          <p:nvPr/>
-        </p:nvSpPr>
-        <p:spPr>
-          <a:xfrm>
-            <a:off x="10344150" y="5949255"/>
-            <a:ext cx="6749796" cy="781050"/>
-          </a:xfrm>
-          <a:prstGeom prst="rect">
-            <a:avLst/>
-          </a:prstGeom>
-          <a:noFill/>
-          <a:ln/>
-        </p:spPr>
-        <p:txBody>
-          <a:bodyPr wrap="square" lIns="25400" tIns="25400" rIns="25400" bIns="25400" rtlCol="0" anchor="t">
-            <a:normAutofit fontScale="92500" lnSpcReduction="10000"/>
-          </a:bodyPr>
-          <a:lstStyle/>
-          <a:p>
-            <a:pPr marL="0" indent="0" algn="l">
-              <a:lnSpc>
-                <a:spcPct val="150000"/>
-              </a:lnSpc>
-              <a:buNone/>
-            </a:pPr>
-            <a:r>
-              <a:rPr lang="en-US" sz="1950" dirty="0">
-                <a:solidFill>
-                  <a:srgbClr val="2A2D38"/>
-                </a:solidFill>
-                <a:latin typeface="Inter" pitchFamily="34" charset="0"/>
-                <a:ea typeface="Inter" pitchFamily="34" charset="-122"/>
-                <a:cs typeface="Inter" pitchFamily="34" charset="-120"/>
-              </a:rPr>
-              <a:t>Design </a:t>
-            </a:r>
-            <a:r>
-              <a:rPr lang="en-US" sz="1950" i="1" dirty="0">
-                <a:solidFill>
-                  <a:srgbClr val="2A2D38"/>
-                </a:solidFill>
-                <a:latin typeface="Inter" pitchFamily="34" charset="0"/>
-                <a:ea typeface="Inter" pitchFamily="34" charset="-122"/>
-                <a:cs typeface="Inter" pitchFamily="34" charset="-120"/>
-              </a:rPr>
-              <a:t>everything the model sees </a:t>
-            </a:r>
-            <a:r>
-              <a:rPr lang="en-US" sz="1950" dirty="0">
-                <a:solidFill>
-                  <a:srgbClr val="2A2D38"/>
-                </a:solidFill>
-                <a:latin typeface="Inter" pitchFamily="34" charset="0"/>
-                <a:ea typeface="Inter" pitchFamily="34" charset="-122"/>
-                <a:cs typeface="Inter" pitchFamily="34" charset="-120"/>
-              </a:rPr>
-              <a:t>— instructions, knowledge, tools, memory — before it answers.</a:t>
-            </a:r>
-            <a:endParaRPr lang="en-US" sz="1950" dirty="0"/>
+        </p:spPr>
+        <p:txBody>
+          <a:bodyPr spcFirstLastPara="1" wrap="square" lIns="91425" tIns="91425" rIns="91425" bIns="91425" anchor="ctr" anchorCtr="0">
+            <a:noAutofit/>
+          </a:bodyPr>
+          <a:lstStyle/>
+          <a:p>
+            <a:pPr marL="0" lvl="0" indent="0" algn="l" rtl="0">
+              <a:spcBef>
+                <a:spcPts val="0"/>
+              </a:spcBef>
+              <a:spcAft>
+                <a:spcPts val="0"/>
+              </a:spcAft>
+              <a:buNone/>
+            </a:pPr>
+            <a:endParaRPr/>
+          </a:p>
+        </p:txBody>
+      </p:sp>
+      <p:sp>
+        <p:nvSpPr>
+          <p:cNvPr id="137" name="Google Shape;137;g3dc15369c17_0_195">
+            <a:extLst>
+              <a:ext uri="{FF2B5EF4-FFF2-40B4-BE49-F238E27FC236}">
+                <a16:creationId xmlns:a16="http://schemas.microsoft.com/office/drawing/2014/main" id="{FD3D9854-ED5B-CE58-01FA-FC1027B36E09}"/>
+              </a:ext>
+            </a:extLst>
+          </p:cNvPr>
+          <p:cNvSpPr/>
+          <p:nvPr/>
+        </p:nvSpPr>
+        <p:spPr>
+          <a:xfrm>
+            <a:off x="3327797" y="6978968"/>
+            <a:ext cx="1558500" cy="236100"/>
+          </a:xfrm>
+          <a:prstGeom prst="rect">
+            <a:avLst/>
+          </a:prstGeom>
+          <a:noFill/>
+          <a:ln>
+            <a:noFill/>
+          </a:ln>
+        </p:spPr>
+        <p:txBody>
+          <a:bodyPr spcFirstLastPara="1" wrap="square" lIns="25400" tIns="25400" rIns="25400" bIns="25400" anchor="ctr" anchorCtr="0">
+            <a:noAutofit/>
+          </a:bodyPr>
+          <a:lstStyle/>
+          <a:p>
+            <a:pPr marL="0" marR="0" lvl="0" indent="0" algn="l" rtl="0">
+              <a:spcBef>
+                <a:spcPts val="0"/>
+              </a:spcBef>
+              <a:spcAft>
+                <a:spcPts val="0"/>
+              </a:spcAft>
+              <a:buClr>
+                <a:srgbClr val="F58220"/>
+              </a:buClr>
+              <a:buSzPts val="1350"/>
+              <a:buFont typeface="Arial"/>
+              <a:buNone/>
+            </a:pPr>
+            <a:r>
+              <a:rPr lang="en-US" sz="1350" b="0" i="0" u="none" strike="noStrike" cap="none" dirty="0">
+                <a:solidFill>
+                  <a:srgbClr val="F58220"/>
+                </a:solidFill>
+                <a:latin typeface="Arial"/>
+                <a:ea typeface="Arial"/>
+                <a:cs typeface="Arial"/>
+                <a:sym typeface="Arial"/>
+              </a:rPr>
+              <a:t>DOCUMENT</a:t>
+            </a:r>
+            <a:endParaRPr sz="1350" b="0" i="0" u="none" strike="noStrike" cap="none" dirty="0">
+              <a:solidFill>
+                <a:schemeClr val="dk1"/>
+              </a:solidFill>
+              <a:latin typeface="Calibri"/>
+              <a:ea typeface="Calibri"/>
+              <a:cs typeface="Calibri"/>
+              <a:sym typeface="Calibri"/>
+            </a:endParaRPr>
+          </a:p>
+        </p:txBody>
+      </p:sp>
+      <p:sp>
+        <p:nvSpPr>
+          <p:cNvPr id="138" name="Google Shape;138;g3dc15369c17_0_195">
+            <a:extLst>
+              <a:ext uri="{FF2B5EF4-FFF2-40B4-BE49-F238E27FC236}">
+                <a16:creationId xmlns:a16="http://schemas.microsoft.com/office/drawing/2014/main" id="{F4A87A83-61A9-B67A-AF03-9BA2A7B79096}"/>
+              </a:ext>
+            </a:extLst>
+          </p:cNvPr>
+          <p:cNvSpPr/>
+          <p:nvPr/>
+        </p:nvSpPr>
+        <p:spPr>
+          <a:xfrm>
+            <a:off x="5160526" y="6876098"/>
+            <a:ext cx="2914200" cy="403800"/>
+          </a:xfrm>
+          <a:prstGeom prst="rect">
+            <a:avLst/>
+          </a:prstGeom>
+          <a:noFill/>
+          <a:ln w="9525" cap="flat" cmpd="sng">
+            <a:solidFill>
+              <a:srgbClr val="F58220"/>
+            </a:solidFill>
+            <a:prstDash val="solid"/>
+            <a:round/>
+            <a:headEnd type="none" w="sm" len="sm"/>
+            <a:tailEnd type="none" w="sm" len="sm"/>
+          </a:ln>
+        </p:spPr>
+        <p:txBody>
+          <a:bodyPr spcFirstLastPara="1" wrap="square" lIns="91425" tIns="91425" rIns="91425" bIns="91425" anchor="ctr" anchorCtr="0">
+            <a:noAutofit/>
+          </a:bodyPr>
+          <a:lstStyle/>
+          <a:p>
+            <a:pPr marL="0" lvl="0" indent="0" algn="l" rtl="0">
+              <a:spcBef>
+                <a:spcPts val="0"/>
+              </a:spcBef>
+              <a:spcAft>
+                <a:spcPts val="0"/>
+              </a:spcAft>
+              <a:buNone/>
+            </a:pPr>
+            <a:endParaRPr/>
+          </a:p>
+        </p:txBody>
+      </p:sp>
+      <p:sp>
+        <p:nvSpPr>
+          <p:cNvPr id="139" name="Google Shape;139;g3dc15369c17_0_195">
+            <a:extLst>
+              <a:ext uri="{FF2B5EF4-FFF2-40B4-BE49-F238E27FC236}">
+                <a16:creationId xmlns:a16="http://schemas.microsoft.com/office/drawing/2014/main" id="{3EDA1732-8709-4489-E2F2-4D2B512AB47C}"/>
+              </a:ext>
+            </a:extLst>
+          </p:cNvPr>
+          <p:cNvSpPr/>
+          <p:nvPr/>
+        </p:nvSpPr>
+        <p:spPr>
+          <a:xfrm>
+            <a:off x="5339596" y="6978968"/>
+            <a:ext cx="2643300" cy="236100"/>
+          </a:xfrm>
+          <a:prstGeom prst="rect">
+            <a:avLst/>
+          </a:prstGeom>
+          <a:noFill/>
+          <a:ln>
+            <a:noFill/>
+          </a:ln>
+        </p:spPr>
+        <p:txBody>
+          <a:bodyPr spcFirstLastPara="1" wrap="square" lIns="25400" tIns="25400" rIns="25400" bIns="25400" anchor="ctr" anchorCtr="0">
+            <a:noAutofit/>
+          </a:bodyPr>
+          <a:lstStyle/>
+          <a:p>
+            <a:pPr marL="0" marR="0" lvl="0" indent="0" algn="l" rtl="0">
+              <a:spcBef>
+                <a:spcPts val="0"/>
+              </a:spcBef>
+              <a:spcAft>
+                <a:spcPts val="0"/>
+              </a:spcAft>
+              <a:buClr>
+                <a:srgbClr val="F58220"/>
+              </a:buClr>
+              <a:buSzPts val="1350"/>
+              <a:buFont typeface="Arial"/>
+              <a:buNone/>
+            </a:pPr>
+            <a:r>
+              <a:rPr lang="en-US" sz="1350" b="0" i="0" u="none" strike="noStrike" cap="none" dirty="0">
+                <a:solidFill>
+                  <a:srgbClr val="F58220"/>
+                </a:solidFill>
+                <a:latin typeface="Arial"/>
+                <a:ea typeface="Arial"/>
+                <a:cs typeface="Arial"/>
+                <a:sym typeface="Arial"/>
+              </a:rPr>
+              <a:t>WORK</a:t>
+            </a:r>
+            <a:endParaRPr sz="1350" b="0" i="0" u="none" strike="noStrike" cap="none" dirty="0">
+              <a:solidFill>
+                <a:schemeClr val="dk1"/>
+              </a:solidFill>
+              <a:latin typeface="Calibri"/>
+              <a:ea typeface="Calibri"/>
+              <a:cs typeface="Calibri"/>
+              <a:sym typeface="Calibri"/>
+            </a:endParaRPr>
           </a:p>
         </p:txBody>
       </p:sp>
     </p:spTree>
+    <p:extLst>
+      <p:ext uri="{BB962C8B-B14F-4D97-AF65-F5344CB8AC3E}">
+        <p14:creationId xmlns:p14="http://schemas.microsoft.com/office/powerpoint/2010/main" val="554896575"/>
+      </p:ext>
+    </p:extLst>
   </p:cSld>
   <p:clrMapOvr>
     <a:masterClrMapping/>
@@ -8533,78 +8995,42 @@
       </p:grpSpPr>
       <p:sp>
         <p:nvSpPr>
-          <p:cNvPr id="6" name="Shape 0">
-            <a:extLst>
-              <a:ext uri="{FF2B5EF4-FFF2-40B4-BE49-F238E27FC236}">
-                <a16:creationId xmlns:a16="http://schemas.microsoft.com/office/drawing/2014/main" id="{BE5BF16A-57FD-86F5-BD00-2715CB0725A2}"/>
-              </a:ext>
-            </a:extLst>
-          </p:cNvPr>
-          <p:cNvSpPr/>
-          <p:nvPr/>
-        </p:nvSpPr>
-        <p:spPr>
-          <a:xfrm>
-            <a:off x="0" y="0"/>
-            <a:ext cx="18288000" cy="10287000"/>
-          </a:xfrm>
-          <a:prstGeom prst="rect">
-            <a:avLst/>
-          </a:prstGeom>
-          <a:solidFill>
-            <a:srgbClr val="1B1D24"/>
-          </a:solidFill>
+          <p:cNvPr id="2" name="Text 0"/>
+          <p:cNvSpPr/>
+          <p:nvPr/>
+        </p:nvSpPr>
+        <p:spPr>
+          <a:xfrm>
+            <a:off x="952500" y="952500"/>
+            <a:ext cx="16874490" cy="342900"/>
+          </a:xfrm>
+          <a:prstGeom prst="rect">
+            <a:avLst/>
+          </a:prstGeom>
+          <a:noFill/>
           <a:ln/>
         </p:spPr>
         <p:txBody>
-          <a:bodyPr/>
-          <a:lstStyle/>
-          <a:p>
-            <a:endParaRPr lang="en-US"/>
-          </a:p>
-        </p:txBody>
-      </p:sp>
-      <p:sp>
-        <p:nvSpPr>
-          <p:cNvPr id="2" name="Text 0"/>
-          <p:cNvSpPr/>
-          <p:nvPr/>
-        </p:nvSpPr>
-        <p:spPr>
-          <a:xfrm>
-            <a:off x="1531888" y="952500"/>
-            <a:ext cx="1660475" cy="1638300"/>
-          </a:xfrm>
-          <a:prstGeom prst="rect">
-            <a:avLst/>
-          </a:prstGeom>
-          <a:noFill/>
-          <a:ln/>
-        </p:spPr>
-        <p:txBody>
           <a:bodyPr wrap="square" lIns="25400" tIns="25400" rIns="25400" bIns="25400" rtlCol="0" anchor="t">
-            <a:normAutofit fontScale="92500" lnSpcReduction="20000"/>
+            <a:normAutofit lnSpcReduction="10000"/>
           </a:bodyPr>
           <a:lstStyle/>
           <a:p>
             <a:pPr marL="0" indent="0" algn="l">
-              <a:lnSpc>
-                <a:spcPct val="60000"/>
-              </a:lnSpc>
-              <a:buNone/>
-            </a:pPr>
-            <a:r>
-              <a:rPr lang="en-US" sz="21000" b="1" dirty="0">
-                <a:solidFill>
-                  <a:srgbClr val="3FE0D0"/>
+              <a:buNone/>
+            </a:pPr>
+            <a:r>
+              <a:rPr lang="en-US" sz="1950" b="1" kern="0" spc="429" dirty="0">
+                <a:solidFill>
+                  <a:srgbClr val="F58220"/>
                 </a:solidFill>
                 <a:latin typeface="Montserrat" pitchFamily="34" charset="0"/>
                 <a:ea typeface="Montserrat" pitchFamily="34" charset="-122"/>
                 <a:cs typeface="Montserrat" pitchFamily="34" charset="-120"/>
               </a:rPr>
-              <a:t>“</a:t>
-            </a:r>
-            <a:endParaRPr lang="en-US" sz="21000" dirty="0"/>
+              <a:t>THE SHIFT</a:t>
+            </a:r>
+            <a:endParaRPr lang="en-US" sz="1950" dirty="0"/>
           </a:p>
         </p:txBody>
       </p:sp>
@@ -8616,8 +9042,8 @@
         </p:nvSpPr>
         <p:spPr>
           <a:xfrm>
-            <a:off x="3420963" y="2605088"/>
-            <a:ext cx="13735050" cy="4229100"/>
+            <a:off x="952500" y="1447800"/>
+            <a:ext cx="16874490" cy="1558230"/>
           </a:xfrm>
           <a:prstGeom prst="rect">
             <a:avLst/>
@@ -8627,63 +9053,193 @@
         </p:spPr>
         <p:txBody>
           <a:bodyPr wrap="square" lIns="25400" tIns="25400" rIns="25400" bIns="25400" rtlCol="0" anchor="t">
-            <a:normAutofit fontScale="92500"/>
+            <a:normAutofit fontScale="92500" lnSpcReduction="20000"/>
           </a:bodyPr>
           <a:lstStyle/>
           <a:p>
             <a:pPr marL="0" indent="0" algn="l">
               <a:lnSpc>
-                <a:spcPct val="110000"/>
+                <a:spcPct val="105000"/>
               </a:lnSpc>
               <a:buNone/>
             </a:pPr>
             <a:r>
-              <a:rPr lang="en-US" sz="6000" b="1" kern="0" spc="-90" dirty="0">
-                <a:solidFill>
-                  <a:srgbClr val="FFFFFF"/>
+              <a:rPr lang="en-US" sz="5700" b="1" kern="0" spc="-85" dirty="0">
+                <a:solidFill>
+                  <a:srgbClr val="2A2D38"/>
                 </a:solidFill>
                 <a:latin typeface="Montserrat" pitchFamily="34" charset="0"/>
                 <a:ea typeface="Montserrat" pitchFamily="34" charset="-122"/>
                 <a:cs typeface="Montserrat" pitchFamily="34" charset="-120"/>
               </a:rPr>
-              <a:t>Context engineering is the discipline of giving a model </a:t>
-            </a:r>
-            <a:r>
-              <a:rPr lang="en-US" sz="6000" b="1" kern="0" spc="-90" dirty="0">
-                <a:solidFill>
-                  <a:srgbClr val="3FE0D0"/>
+              <a:t>From prompt engineering to context engineering.</a:t>
+            </a:r>
+            <a:endParaRPr lang="en-US" sz="5700" dirty="0"/>
+          </a:p>
+        </p:txBody>
+      </p:sp>
+      <p:sp>
+        <p:nvSpPr>
+          <p:cNvPr id="4" name="Shape 2"/>
+          <p:cNvSpPr/>
+          <p:nvPr/>
+        </p:nvSpPr>
+        <p:spPr>
+          <a:xfrm>
+            <a:off x="952500" y="3463230"/>
+            <a:ext cx="914400" cy="38100"/>
+          </a:xfrm>
+          <a:prstGeom prst="roundRect">
+            <a:avLst>
+              <a:gd name="adj" fmla="val 50000"/>
+            </a:avLst>
+          </a:prstGeom>
+          <a:solidFill>
+            <a:srgbClr val="F58220"/>
+          </a:solidFill>
+          <a:ln/>
+        </p:spPr>
+        <p:txBody>
+          <a:bodyPr/>
+          <a:lstStyle/>
+          <a:p>
+            <a:endParaRPr lang="en-US"/>
+          </a:p>
+        </p:txBody>
+      </p:sp>
+      <p:sp>
+        <p:nvSpPr>
+          <p:cNvPr id="5" name="Shape 3"/>
+          <p:cNvSpPr/>
+          <p:nvPr/>
+        </p:nvSpPr>
+        <p:spPr>
+          <a:xfrm>
+            <a:off x="952500" y="4158555"/>
+            <a:ext cx="7429500" cy="4362450"/>
+          </a:xfrm>
+          <a:prstGeom prst="roundRect">
+            <a:avLst>
+              <a:gd name="adj" fmla="val 2620"/>
+            </a:avLst>
+          </a:prstGeom>
+          <a:solidFill>
+            <a:srgbClr val="FFFFFF"/>
+          </a:solidFill>
+          <a:ln w="9525">
+            <a:solidFill>
+              <a:srgbClr val="E5E5E7"/>
+            </a:solidFill>
+            <a:prstDash val="solid"/>
+          </a:ln>
+          <a:effectLst>
+            <a:outerShdw blurRad="114300" dist="38100" dir="5400000" algn="bl" rotWithShape="0">
+              <a:srgbClr val="2A2D38">
+                <a:alpha val="5000"/>
+              </a:srgbClr>
+            </a:outerShdw>
+          </a:effectLst>
+        </p:spPr>
+        <p:txBody>
+          <a:bodyPr/>
+          <a:lstStyle/>
+          <a:p>
+            <a:endParaRPr lang="en-US"/>
+          </a:p>
+        </p:txBody>
+      </p:sp>
+      <p:sp>
+        <p:nvSpPr>
+          <p:cNvPr id="6" name="Text 4"/>
+          <p:cNvSpPr/>
+          <p:nvPr/>
+        </p:nvSpPr>
+        <p:spPr>
+          <a:xfrm>
+            <a:off x="1381125" y="4625280"/>
+            <a:ext cx="6769418" cy="314325"/>
+          </a:xfrm>
+          <a:prstGeom prst="rect">
+            <a:avLst/>
+          </a:prstGeom>
+          <a:noFill/>
+          <a:ln/>
+        </p:spPr>
+        <p:txBody>
+          <a:bodyPr wrap="square" lIns="25400" tIns="25400" rIns="25400" bIns="25400" rtlCol="0" anchor="t">
+            <a:normAutofit lnSpcReduction="10000"/>
+          </a:bodyPr>
+          <a:lstStyle/>
+          <a:p>
+            <a:pPr marL="0" indent="0" algn="l">
+              <a:buNone/>
+            </a:pPr>
+            <a:r>
+              <a:rPr lang="en-US" sz="1800" b="1" kern="0" spc="324" dirty="0">
+                <a:solidFill>
+                  <a:srgbClr val="9A9CA4"/>
                 </a:solidFill>
                 <a:latin typeface="Montserrat" pitchFamily="34" charset="0"/>
                 <a:ea typeface="Montserrat" pitchFamily="34" charset="-122"/>
                 <a:cs typeface="Montserrat" pitchFamily="34" charset="-120"/>
               </a:rPr>
-              <a:t>everything it needs </a:t>
-            </a:r>
-            <a:r>
-              <a:rPr lang="en-US" sz="6000" b="1" kern="0" spc="-90" dirty="0">
-                <a:solidFill>
-                  <a:srgbClr val="FFFFFF"/>
+              <a:t>THEN</a:t>
+            </a:r>
+            <a:endParaRPr lang="en-US" sz="1800" dirty="0"/>
+          </a:p>
+        </p:txBody>
+      </p:sp>
+      <p:sp>
+        <p:nvSpPr>
+          <p:cNvPr id="7" name="Text 5"/>
+          <p:cNvSpPr/>
+          <p:nvPr/>
+        </p:nvSpPr>
+        <p:spPr>
+          <a:xfrm>
+            <a:off x="1381125" y="5072955"/>
+            <a:ext cx="6769418" cy="685800"/>
+          </a:xfrm>
+          <a:prstGeom prst="rect">
+            <a:avLst/>
+          </a:prstGeom>
+          <a:noFill/>
+          <a:ln/>
+        </p:spPr>
+        <p:txBody>
+          <a:bodyPr wrap="square" lIns="25400" tIns="25400" rIns="25400" bIns="25400" rtlCol="0" anchor="t">
+            <a:normAutofit lnSpcReduction="10000"/>
+          </a:bodyPr>
+          <a:lstStyle/>
+          <a:p>
+            <a:pPr marL="0" indent="0" algn="l">
+              <a:buNone/>
+            </a:pPr>
+            <a:r>
+              <a:rPr lang="en-US" sz="4200" b="1" kern="0" spc="-63" dirty="0">
+                <a:solidFill>
+                  <a:srgbClr val="2A2D38"/>
                 </a:solidFill>
                 <a:latin typeface="Montserrat" pitchFamily="34" charset="0"/>
                 <a:ea typeface="Montserrat" pitchFamily="34" charset="-122"/>
                 <a:cs typeface="Montserrat" pitchFamily="34" charset="-120"/>
               </a:rPr>
-              <a:t>— and nothing it doesn't — to do the job in front of it.</a:t>
-            </a:r>
-            <a:endParaRPr lang="en-US" sz="6000" dirty="0"/>
-          </a:p>
-        </p:txBody>
-      </p:sp>
-      <p:sp>
-        <p:nvSpPr>
-          <p:cNvPr id="4" name="Text 2"/>
-          <p:cNvSpPr/>
-          <p:nvPr/>
-        </p:nvSpPr>
-        <p:spPr>
-          <a:xfrm>
-            <a:off x="3420963" y="7177088"/>
-            <a:ext cx="13735050" cy="314325"/>
+              <a:t>Prompt Engineering</a:t>
+            </a:r>
+            <a:endParaRPr lang="en-US" sz="4200" dirty="0"/>
+          </a:p>
+        </p:txBody>
+      </p:sp>
+      <p:sp>
+        <p:nvSpPr>
+          <p:cNvPr id="8" name="Text 6"/>
+          <p:cNvSpPr/>
+          <p:nvPr/>
+        </p:nvSpPr>
+        <p:spPr>
+          <a:xfrm>
+            <a:off x="1381125" y="5949255"/>
+            <a:ext cx="6769418" cy="781050"/>
           </a:xfrm>
           <a:prstGeom prst="rect">
             <a:avLst/>
@@ -8693,25 +9249,283 @@
         </p:spPr>
         <p:txBody>
           <a:bodyPr wrap="square" lIns="25400" tIns="25400" rIns="25400" bIns="25400" rtlCol="0" anchor="t">
-            <a:normAutofit lnSpcReduction="10000"/>
+            <a:normAutofit fontScale="92500" lnSpcReduction="10000"/>
           </a:bodyPr>
           <a:lstStyle/>
           <a:p>
             <a:pPr marL="0" indent="0" algn="l">
-              <a:buNone/>
-            </a:pPr>
-            <a:r>
-              <a:rPr lang="en-US" sz="1800" b="1" kern="0" spc="324" dirty="0">
-                <a:solidFill>
-                  <a:srgbClr val="9A9CA4"/>
+              <a:lnSpc>
+                <a:spcPct val="150000"/>
+              </a:lnSpc>
+              <a:buNone/>
+            </a:pPr>
+            <a:r>
+              <a:rPr lang="en-US" sz="1950" dirty="0">
+                <a:solidFill>
+                  <a:srgbClr val="6B6E78"/>
+                </a:solidFill>
+                <a:latin typeface="Inter" pitchFamily="34" charset="0"/>
+                <a:ea typeface="Inter" pitchFamily="34" charset="-122"/>
+                <a:cs typeface="Inter" pitchFamily="34" charset="-120"/>
+              </a:rPr>
+              <a:t>Find the right </a:t>
+            </a:r>
+            <a:r>
+              <a:rPr lang="en-US" sz="1950" i="1" dirty="0">
+                <a:solidFill>
+                  <a:srgbClr val="6B6E78"/>
+                </a:solidFill>
+                <a:latin typeface="Inter" pitchFamily="34" charset="0"/>
+                <a:ea typeface="Inter" pitchFamily="34" charset="-122"/>
+                <a:cs typeface="Inter" pitchFamily="34" charset="-120"/>
+              </a:rPr>
+              <a:t>magic words </a:t>
+            </a:r>
+            <a:r>
+              <a:rPr lang="en-US" sz="1950" dirty="0">
+                <a:solidFill>
+                  <a:srgbClr val="6B6E78"/>
+                </a:solidFill>
+                <a:latin typeface="Inter" pitchFamily="34" charset="0"/>
+                <a:ea typeface="Inter" pitchFamily="34" charset="-122"/>
+                <a:cs typeface="Inter" pitchFamily="34" charset="-120"/>
+              </a:rPr>
+              <a:t>to coax a single response out of a model.</a:t>
+            </a:r>
+            <a:endParaRPr lang="en-US" sz="1950" dirty="0"/>
+          </a:p>
+        </p:txBody>
+      </p:sp>
+      <p:sp>
+        <p:nvSpPr>
+          <p:cNvPr id="9" name="Text 7"/>
+          <p:cNvSpPr/>
+          <p:nvPr/>
+        </p:nvSpPr>
+        <p:spPr>
+          <a:xfrm>
+            <a:off x="8724900" y="5882580"/>
+            <a:ext cx="838200" cy="952500"/>
+          </a:xfrm>
+          <a:prstGeom prst="rect">
+            <a:avLst/>
+          </a:prstGeom>
+          <a:noFill/>
+          <a:ln/>
+        </p:spPr>
+        <p:txBody>
+          <a:bodyPr wrap="square" lIns="25400" tIns="25400" rIns="25400" bIns="25400" rtlCol="0" anchor="t">
+            <a:normAutofit fontScale="92500" lnSpcReduction="20000"/>
+          </a:bodyPr>
+          <a:lstStyle/>
+          <a:p>
+            <a:pPr marL="0" indent="0" algn="ctr">
+              <a:lnSpc>
+                <a:spcPct val="100000"/>
+              </a:lnSpc>
+              <a:buNone/>
+            </a:pPr>
+            <a:r>
+              <a:rPr lang="en-US" sz="7200" b="1" dirty="0">
+                <a:solidFill>
+                  <a:srgbClr val="3FE0D0"/>
                 </a:solidFill>
                 <a:latin typeface="Montserrat" pitchFamily="34" charset="0"/>
                 <a:ea typeface="Montserrat" pitchFamily="34" charset="-122"/>
                 <a:cs typeface="Montserrat" pitchFamily="34" charset="-120"/>
               </a:rPr>
-              <a:t>— WORKING DEFINITION</a:t>
+              <a:t>→</a:t>
+            </a:r>
+            <a:endParaRPr lang="en-US" sz="7200" dirty="0"/>
+          </a:p>
+        </p:txBody>
+      </p:sp>
+      <p:sp>
+        <p:nvSpPr>
+          <p:cNvPr id="10" name="Shape 8"/>
+          <p:cNvSpPr/>
+          <p:nvPr/>
+        </p:nvSpPr>
+        <p:spPr>
+          <a:xfrm>
+            <a:off x="9906000" y="4149030"/>
+            <a:ext cx="7429500" cy="4381500"/>
+          </a:xfrm>
+          <a:prstGeom prst="roundRect">
+            <a:avLst>
+              <a:gd name="adj" fmla="val 2609"/>
+            </a:avLst>
+          </a:prstGeom>
+          <a:solidFill>
+            <a:srgbClr val="FFFFFF"/>
+          </a:solidFill>
+          <a:ln w="19050">
+            <a:solidFill>
+              <a:srgbClr val="3FE0D0"/>
+            </a:solidFill>
+            <a:prstDash val="solid"/>
+          </a:ln>
+          <a:effectLst>
+            <a:outerShdw blurRad="114300" dist="38100" dir="5400000" algn="bl" rotWithShape="0">
+              <a:srgbClr val="2A2D38">
+                <a:alpha val="5000"/>
+              </a:srgbClr>
+            </a:outerShdw>
+          </a:effectLst>
+        </p:spPr>
+        <p:txBody>
+          <a:bodyPr/>
+          <a:lstStyle/>
+          <a:p>
+            <a:endParaRPr lang="en-US"/>
+          </a:p>
+        </p:txBody>
+      </p:sp>
+      <p:sp>
+        <p:nvSpPr>
+          <p:cNvPr id="11" name="Text 9"/>
+          <p:cNvSpPr/>
+          <p:nvPr/>
+        </p:nvSpPr>
+        <p:spPr>
+          <a:xfrm>
+            <a:off x="10344150" y="4625280"/>
+            <a:ext cx="6749796" cy="314325"/>
+          </a:xfrm>
+          <a:prstGeom prst="rect">
+            <a:avLst/>
+          </a:prstGeom>
+          <a:noFill/>
+          <a:ln/>
+        </p:spPr>
+        <p:txBody>
+          <a:bodyPr wrap="square" lIns="25400" tIns="25400" rIns="25400" bIns="25400" rtlCol="0" anchor="t">
+            <a:normAutofit lnSpcReduction="10000"/>
+          </a:bodyPr>
+          <a:lstStyle/>
+          <a:p>
+            <a:pPr marL="0" indent="0" algn="l">
+              <a:buNone/>
+            </a:pPr>
+            <a:r>
+              <a:rPr lang="en-US" sz="1800" b="1" kern="0" spc="324" dirty="0">
+                <a:solidFill>
+                  <a:srgbClr val="3FE0D0"/>
+                </a:solidFill>
+                <a:latin typeface="Montserrat" pitchFamily="34" charset="0"/>
+                <a:ea typeface="Montserrat" pitchFamily="34" charset="-122"/>
+                <a:cs typeface="Montserrat" pitchFamily="34" charset="-120"/>
+              </a:rPr>
+              <a:t>NOW</a:t>
             </a:r>
             <a:endParaRPr lang="en-US" sz="1800" dirty="0"/>
+          </a:p>
+        </p:txBody>
+      </p:sp>
+      <p:sp>
+        <p:nvSpPr>
+          <p:cNvPr id="12" name="Text 10"/>
+          <p:cNvSpPr/>
+          <p:nvPr/>
+        </p:nvSpPr>
+        <p:spPr>
+          <a:xfrm>
+            <a:off x="10344150" y="5072955"/>
+            <a:ext cx="6749796" cy="685800"/>
+          </a:xfrm>
+          <a:prstGeom prst="rect">
+            <a:avLst/>
+          </a:prstGeom>
+          <a:noFill/>
+          <a:ln/>
+        </p:spPr>
+        <p:txBody>
+          <a:bodyPr wrap="square" lIns="25400" tIns="25400" rIns="25400" bIns="25400" rtlCol="0" anchor="t">
+            <a:normAutofit lnSpcReduction="10000"/>
+          </a:bodyPr>
+          <a:lstStyle/>
+          <a:p>
+            <a:pPr marL="0" indent="0" algn="l">
+              <a:buNone/>
+            </a:pPr>
+            <a:r>
+              <a:rPr lang="en-US" sz="4200" b="1" kern="0" spc="-63" dirty="0">
+                <a:solidFill>
+                  <a:srgbClr val="2A2D38"/>
+                </a:solidFill>
+                <a:latin typeface="Montserrat" pitchFamily="34" charset="0"/>
+                <a:ea typeface="Montserrat" pitchFamily="34" charset="-122"/>
+                <a:cs typeface="Montserrat" pitchFamily="34" charset="-120"/>
+              </a:rPr>
+              <a:t>Context Engineering</a:t>
+            </a:r>
+            <a:endParaRPr lang="en-US" sz="4200" dirty="0"/>
+          </a:p>
+        </p:txBody>
+      </p:sp>
+      <p:sp>
+        <p:nvSpPr>
+          <p:cNvPr id="13" name="Text 11"/>
+          <p:cNvSpPr/>
+          <p:nvPr/>
+        </p:nvSpPr>
+        <p:spPr>
+          <a:xfrm>
+            <a:off x="10344150" y="5949255"/>
+            <a:ext cx="6749796" cy="781050"/>
+          </a:xfrm>
+          <a:prstGeom prst="rect">
+            <a:avLst/>
+          </a:prstGeom>
+          <a:noFill/>
+          <a:ln/>
+        </p:spPr>
+        <p:txBody>
+          <a:bodyPr wrap="square" lIns="25400" tIns="25400" rIns="25400" bIns="25400" rtlCol="0" anchor="t">
+            <a:normAutofit fontScale="92500" lnSpcReduction="10000"/>
+          </a:bodyPr>
+          <a:lstStyle/>
+          <a:p>
+            <a:pPr marL="0" indent="0" algn="l">
+              <a:lnSpc>
+                <a:spcPct val="150000"/>
+              </a:lnSpc>
+              <a:buNone/>
+            </a:pPr>
+            <a:r>
+              <a:rPr lang="en-US" sz="1950" dirty="0">
+                <a:solidFill>
+                  <a:srgbClr val="2A2D38"/>
+                </a:solidFill>
+                <a:latin typeface="Inter" pitchFamily="34" charset="0"/>
+                <a:ea typeface="Inter" pitchFamily="34" charset="-122"/>
+                <a:cs typeface="Inter" pitchFamily="34" charset="-120"/>
+              </a:rPr>
+              <a:t>Design </a:t>
+            </a:r>
+            <a:r>
+              <a:rPr lang="en-US" sz="1950" i="1" dirty="0">
+                <a:solidFill>
+                  <a:srgbClr val="2A2D38"/>
+                </a:solidFill>
+                <a:latin typeface="Inter" pitchFamily="34" charset="0"/>
+                <a:ea typeface="Inter" pitchFamily="34" charset="-122"/>
+                <a:cs typeface="Inter" pitchFamily="34" charset="-120"/>
+              </a:rPr>
+              <a:t>everything the model sees </a:t>
+            </a:r>
+            <a:r>
+              <a:rPr lang="en-US" sz="1950" dirty="0">
+                <a:solidFill>
+                  <a:srgbClr val="2A2D38"/>
+                </a:solidFill>
+                <a:latin typeface="Inter" pitchFamily="34" charset="0"/>
+                <a:ea typeface="Inter" pitchFamily="34" charset="-122"/>
+                <a:cs typeface="Inter" pitchFamily="34" charset="-120"/>
+              </a:rPr>
+              <a:t>— instructions, knowledge, tools, memory — before it answers.</a:t>
+            </a:r>
+            <a:endParaRPr lang="en-US" sz="1950" dirty="0"/>
           </a:p>
         </p:txBody>
       </p:sp>
@@ -8742,7 +9556,13 @@
       </p:grpSpPr>
       <p:sp>
         <p:nvSpPr>
-          <p:cNvPr id="2" name="Shape 0"/>
+          <p:cNvPr id="6" name="Shape 0">
+            <a:extLst>
+              <a:ext uri="{FF2B5EF4-FFF2-40B4-BE49-F238E27FC236}">
+                <a16:creationId xmlns:a16="http://schemas.microsoft.com/office/drawing/2014/main" id="{BE5BF16A-57FD-86F5-BD00-2715CB0725A2}"/>
+              </a:ext>
+            </a:extLst>
+          </p:cNvPr>
           <p:cNvSpPr/>
           <p:nvPr/>
         </p:nvSpPr>
@@ -8769,55 +9589,14 @@
       </p:sp>
       <p:sp>
         <p:nvSpPr>
-          <p:cNvPr id="3" name="Text 1"/>
-          <p:cNvSpPr/>
-          <p:nvPr/>
-        </p:nvSpPr>
-        <p:spPr>
-          <a:xfrm>
-            <a:off x="4343251" y="3170932"/>
-            <a:ext cx="9889543" cy="390525"/>
-          </a:xfrm>
-          <a:prstGeom prst="rect">
-            <a:avLst/>
-          </a:prstGeom>
-          <a:noFill/>
-          <a:ln/>
-        </p:spPr>
-        <p:txBody>
-          <a:bodyPr wrap="square" lIns="25400" tIns="25400" rIns="25400" bIns="25400" rtlCol="0" anchor="t">
-            <a:normAutofit/>
-          </a:bodyPr>
-          <a:lstStyle/>
-          <a:p>
-            <a:pPr marL="0" indent="0" algn="l">
-              <a:buNone/>
-            </a:pPr>
-            <a:r>
-              <a:rPr lang="en-US" sz="2100" kern="0" spc="840" dirty="0">
-                <a:solidFill>
-                  <a:srgbClr val="3FE0D0"/>
-                </a:solidFill>
-                <a:latin typeface="JetBrains Mono" pitchFamily="34" charset="0"/>
-                <a:ea typeface="JetBrains Mono" pitchFamily="34" charset="-122"/>
-                <a:cs typeface="JetBrains Mono" pitchFamily="34" charset="-120"/>
-              </a:rPr>
-              <a:t>LIVE DEMO</a:t>
-            </a:r>
-            <a:endParaRPr lang="en-US" sz="2100" dirty="0"/>
-          </a:p>
-        </p:txBody>
-      </p:sp>
-      <p:sp>
-        <p:nvSpPr>
-          <p:cNvPr id="4" name="Text 2"/>
-          <p:cNvSpPr/>
-          <p:nvPr/>
-        </p:nvSpPr>
-        <p:spPr>
-          <a:xfrm>
-            <a:off x="4343251" y="3904357"/>
-            <a:ext cx="9889543" cy="2426791"/>
+          <p:cNvPr id="2" name="Text 0"/>
+          <p:cNvSpPr/>
+          <p:nvPr/>
+        </p:nvSpPr>
+        <p:spPr>
+          <a:xfrm>
+            <a:off x="2231336" y="2690813"/>
+            <a:ext cx="1660475" cy="1638300"/>
           </a:xfrm>
           <a:prstGeom prst="rect">
             <a:avLst/>
@@ -8833,31 +9612,56 @@
           <a:p>
             <a:pPr marL="0" indent="0" algn="l">
               <a:lnSpc>
-                <a:spcPct val="95000"/>
+                <a:spcPct val="60000"/>
               </a:lnSpc>
               <a:buNone/>
             </a:pPr>
             <a:r>
-              <a:rPr lang="en-US" sz="9900" b="1" kern="0" spc="-247" dirty="0">
-                <a:solidFill>
-                  <a:srgbClr val="FFFFFF"/>
+              <a:rPr lang="en-US" sz="21000" b="1" dirty="0">
+                <a:solidFill>
+                  <a:srgbClr val="3FE0D0"/>
                 </a:solidFill>
                 <a:latin typeface="Montserrat" pitchFamily="34" charset="0"/>
                 <a:ea typeface="Montserrat" pitchFamily="34" charset="-122"/>
                 <a:cs typeface="Montserrat" pitchFamily="34" charset="-120"/>
               </a:rPr>
-              <a:t>Same task.</a:t>
-            </a:r>
-          </a:p>
+              <a:t>“</a:t>
+            </a:r>
+            <a:endParaRPr lang="en-US" sz="21000" dirty="0"/>
+          </a:p>
+        </p:txBody>
+      </p:sp>
+      <p:sp>
+        <p:nvSpPr>
+          <p:cNvPr id="3" name="Text 1"/>
+          <p:cNvSpPr/>
+          <p:nvPr/>
+        </p:nvSpPr>
+        <p:spPr>
+          <a:xfrm>
+            <a:off x="3420963" y="2605088"/>
+            <a:ext cx="13735050" cy="4229100"/>
+          </a:xfrm>
+          <a:prstGeom prst="rect">
+            <a:avLst/>
+          </a:prstGeom>
+          <a:noFill/>
+          <a:ln/>
+        </p:spPr>
+        <p:txBody>
+          <a:bodyPr wrap="square" lIns="25400" tIns="25400" rIns="25400" bIns="25400" rtlCol="0" anchor="t">
+            <a:normAutofit fontScale="92500"/>
+          </a:bodyPr>
+          <a:lstStyle/>
           <a:p>
             <a:pPr marL="0" indent="0" algn="l">
               <a:lnSpc>
-                <a:spcPct val="95000"/>
+                <a:spcPct val="110000"/>
               </a:lnSpc>
               <a:buNone/>
             </a:pPr>
             <a:r>
-              <a:rPr lang="en-US" sz="9900" b="1" kern="0" spc="-247" dirty="0">
+              <a:rPr lang="en-US" sz="6000" b="1" kern="0" spc="-90" dirty="0">
                 <a:solidFill>
                   <a:srgbClr val="FFFFFF"/>
                 </a:solidFill>
@@ -8865,22 +9669,44 @@
                 <a:ea typeface="Montserrat" pitchFamily="34" charset="-122"/>
                 <a:cs typeface="Montserrat" pitchFamily="34" charset="-120"/>
               </a:rPr>
-              <a:t>Twice.</a:t>
-            </a:r>
-            <a:endParaRPr lang="en-US" sz="9900" dirty="0"/>
-          </a:p>
-        </p:txBody>
-      </p:sp>
-      <p:sp>
-        <p:nvSpPr>
-          <p:cNvPr id="5" name="Text 3"/>
-          <p:cNvSpPr/>
-          <p:nvPr/>
-        </p:nvSpPr>
-        <p:spPr>
-          <a:xfrm>
-            <a:off x="4343251" y="6674048"/>
-            <a:ext cx="9889543" cy="479971"/>
+              <a:t>Context engineering is the discipline of giving a model </a:t>
+            </a:r>
+            <a:r>
+              <a:rPr lang="en-US" sz="6000" b="1" kern="0" spc="-90" dirty="0">
+                <a:solidFill>
+                  <a:srgbClr val="3FE0D0"/>
+                </a:solidFill>
+                <a:latin typeface="Montserrat" pitchFamily="34" charset="0"/>
+                <a:ea typeface="Montserrat" pitchFamily="34" charset="-122"/>
+                <a:cs typeface="Montserrat" pitchFamily="34" charset="-120"/>
+              </a:rPr>
+              <a:t>everything it needs </a:t>
+            </a:r>
+            <a:r>
+              <a:rPr lang="en-US" sz="6000" b="1" kern="0" spc="-90" dirty="0">
+                <a:solidFill>
+                  <a:srgbClr val="FFFFFF"/>
+                </a:solidFill>
+                <a:latin typeface="Montserrat" pitchFamily="34" charset="0"/>
+                <a:ea typeface="Montserrat" pitchFamily="34" charset="-122"/>
+                <a:cs typeface="Montserrat" pitchFamily="34" charset="-120"/>
+              </a:rPr>
+              <a:t>— and nothing it doesn't — to do the job in front of it.</a:t>
+            </a:r>
+            <a:endParaRPr lang="en-US" sz="6000" dirty="0"/>
+          </a:p>
+        </p:txBody>
+      </p:sp>
+      <p:sp>
+        <p:nvSpPr>
+          <p:cNvPr id="4" name="Text 2"/>
+          <p:cNvSpPr/>
+          <p:nvPr/>
+        </p:nvSpPr>
+        <p:spPr>
+          <a:xfrm>
+            <a:off x="3420963" y="7177088"/>
+            <a:ext cx="13735050" cy="314325"/>
           </a:xfrm>
           <a:prstGeom prst="rect">
             <a:avLst/>
@@ -8890,28 +9716,25 @@
         </p:spPr>
         <p:txBody>
           <a:bodyPr wrap="square" lIns="25400" tIns="25400" rIns="25400" bIns="25400" rtlCol="0" anchor="t">
-            <a:normAutofit fontScale="92500" lnSpcReduction="10000"/>
+            <a:normAutofit lnSpcReduction="10000"/>
           </a:bodyPr>
           <a:lstStyle/>
           <a:p>
             <a:pPr marL="0" indent="0" algn="l">
-              <a:lnSpc>
-                <a:spcPct val="145000"/>
-              </a:lnSpc>
-              <a:buNone/>
-            </a:pPr>
-            <a:r>
-              <a:rPr lang="en-US" sz="2400" dirty="0">
-                <a:solidFill>
-                  <a:srgbClr val="C9CBD1"/>
-                </a:solidFill>
-                <a:latin typeface="Inter" pitchFamily="34" charset="0"/>
-                <a:ea typeface="Inter" pitchFamily="34" charset="-122"/>
-                <a:cs typeface="Inter" pitchFamily="34" charset="-120"/>
-              </a:rPr>
-              <a:t>First without context. Then with. Watch what changes.</a:t>
-            </a:r>
-            <a:endParaRPr lang="en-US" sz="2400" dirty="0"/>
+              <a:buNone/>
+            </a:pPr>
+            <a:r>
+              <a:rPr lang="en-US" sz="1800" b="1" kern="0" spc="324" dirty="0">
+                <a:solidFill>
+                  <a:srgbClr val="9A9CA4"/>
+                </a:solidFill>
+                <a:latin typeface="Montserrat" pitchFamily="34" charset="0"/>
+                <a:ea typeface="Montserrat" pitchFamily="34" charset="-122"/>
+                <a:cs typeface="Montserrat" pitchFamily="34" charset="-120"/>
+              </a:rPr>
+              <a:t>— WORKING DEFINITION</a:t>
+            </a:r>
+            <a:endParaRPr lang="en-US" sz="1800" dirty="0"/>
           </a:p>
         </p:txBody>
       </p:sp>
@@ -8942,14 +9765,41 @@
       </p:grpSpPr>
       <p:sp>
         <p:nvSpPr>
-          <p:cNvPr id="2" name="Text 0"/>
-          <p:cNvSpPr/>
-          <p:nvPr/>
-        </p:nvSpPr>
-        <p:spPr>
-          <a:xfrm>
-            <a:off x="952500" y="3525441"/>
-            <a:ext cx="8044815" cy="390525"/>
+          <p:cNvPr id="2" name="Shape 0"/>
+          <p:cNvSpPr/>
+          <p:nvPr/>
+        </p:nvSpPr>
+        <p:spPr>
+          <a:xfrm>
+            <a:off x="0" y="0"/>
+            <a:ext cx="18288000" cy="10287000"/>
+          </a:xfrm>
+          <a:prstGeom prst="rect">
+            <a:avLst/>
+          </a:prstGeom>
+          <a:solidFill>
+            <a:srgbClr val="1B1D24"/>
+          </a:solidFill>
+          <a:ln/>
+        </p:spPr>
+        <p:txBody>
+          <a:bodyPr/>
+          <a:lstStyle/>
+          <a:p>
+            <a:endParaRPr lang="en-US"/>
+          </a:p>
+        </p:txBody>
+      </p:sp>
+      <p:sp>
+        <p:nvSpPr>
+          <p:cNvPr id="3" name="Text 1"/>
+          <p:cNvSpPr/>
+          <p:nvPr/>
+        </p:nvSpPr>
+        <p:spPr>
+          <a:xfrm>
+            <a:off x="4343251" y="3170932"/>
+            <a:ext cx="9889543" cy="390525"/>
           </a:xfrm>
           <a:prstGeom prst="rect">
             <a:avLst/>
@@ -8967,15 +9817,15 @@
               <a:buNone/>
             </a:pPr>
             <a:r>
-              <a:rPr lang="en-US" sz="2100" kern="0" spc="630" dirty="0">
-                <a:solidFill>
-                  <a:srgbClr val="F58220"/>
+              <a:rPr lang="en-US" sz="2100" kern="0" spc="840" dirty="0">
+                <a:solidFill>
+                  <a:srgbClr val="3FE0D0"/>
                 </a:solidFill>
                 <a:latin typeface="JetBrains Mono" pitchFamily="34" charset="0"/>
                 <a:ea typeface="JetBrains Mono" pitchFamily="34" charset="-122"/>
                 <a:cs typeface="JetBrains Mono" pitchFamily="34" charset="-120"/>
               </a:rPr>
-              <a:t>DEMO · TAKE 1</a:t>
+              <a:t>LIVE DEMO</a:t>
             </a:r>
             <a:endParaRPr lang="en-US" sz="2100" dirty="0"/>
           </a:p>
@@ -8983,14 +9833,14 @@
       </p:sp>
       <p:sp>
         <p:nvSpPr>
-          <p:cNvPr id="3" name="Text 1"/>
-          <p:cNvSpPr/>
-          <p:nvPr/>
-        </p:nvSpPr>
-        <p:spPr>
-          <a:xfrm>
-            <a:off x="952500" y="4144566"/>
-            <a:ext cx="8044815" cy="1123950"/>
+          <p:cNvPr id="4" name="Text 2"/>
+          <p:cNvSpPr/>
+          <p:nvPr/>
+        </p:nvSpPr>
+        <p:spPr>
+          <a:xfrm>
+            <a:off x="4343251" y="3904357"/>
+            <a:ext cx="9889543" cy="2426791"/>
           </a:xfrm>
           <a:prstGeom prst="rect">
             <a:avLst/>
@@ -9011,30 +9861,49 @@
               <a:buNone/>
             </a:pPr>
             <a:r>
-              <a:rPr lang="en-US" sz="9000" b="1" kern="0" spc="-180" dirty="0">
-                <a:solidFill>
-                  <a:srgbClr val="2A2D38"/>
+              <a:rPr lang="en-US" sz="9900" b="1" kern="0" spc="-247" dirty="0">
+                <a:solidFill>
+                  <a:srgbClr val="FFFFFF"/>
                 </a:solidFill>
                 <a:latin typeface="Montserrat" pitchFamily="34" charset="0"/>
                 <a:ea typeface="Montserrat" pitchFamily="34" charset="-122"/>
                 <a:cs typeface="Montserrat" pitchFamily="34" charset="-120"/>
               </a:rPr>
-              <a:t>Vibe coding.</a:t>
-            </a:r>
-            <a:endParaRPr lang="en-US" sz="9000" dirty="0"/>
-          </a:p>
-        </p:txBody>
-      </p:sp>
-      <p:sp>
-        <p:nvSpPr>
-          <p:cNvPr id="4" name="Text 2"/>
-          <p:cNvSpPr/>
-          <p:nvPr/>
-        </p:nvSpPr>
-        <p:spPr>
-          <a:xfrm>
-            <a:off x="952500" y="5497116"/>
-            <a:ext cx="6867525" cy="1363712"/>
+              <a:t>Same task.</a:t>
+            </a:r>
+          </a:p>
+          <a:p>
+            <a:pPr marL="0" indent="0" algn="l">
+              <a:lnSpc>
+                <a:spcPct val="95000"/>
+              </a:lnSpc>
+              <a:buNone/>
+            </a:pPr>
+            <a:r>
+              <a:rPr lang="en-US" sz="9900" b="1" kern="0" spc="-247" dirty="0">
+                <a:solidFill>
+                  <a:srgbClr val="FFFFFF"/>
+                </a:solidFill>
+                <a:latin typeface="Montserrat" pitchFamily="34" charset="0"/>
+                <a:ea typeface="Montserrat" pitchFamily="34" charset="-122"/>
+                <a:cs typeface="Montserrat" pitchFamily="34" charset="-120"/>
+              </a:rPr>
+              <a:t>Two ways.</a:t>
+            </a:r>
+            <a:endParaRPr lang="en-US" sz="9900" dirty="0"/>
+          </a:p>
+        </p:txBody>
+      </p:sp>
+      <p:sp>
+        <p:nvSpPr>
+          <p:cNvPr id="5" name="Text 3"/>
+          <p:cNvSpPr/>
+          <p:nvPr/>
+        </p:nvSpPr>
+        <p:spPr>
+          <a:xfrm>
+            <a:off x="4343251" y="6674048"/>
+            <a:ext cx="9889543" cy="479971"/>
           </a:xfrm>
           <a:prstGeom prst="rect">
             <a:avLst/>
@@ -9044,7 +9913,7 @@
         </p:spPr>
         <p:txBody>
           <a:bodyPr wrap="square" lIns="25400" tIns="25400" rIns="25400" bIns="25400" rtlCol="0" anchor="t">
-            <a:normAutofit/>
+            <a:normAutofit fontScale="92500" lnSpcReduction="10000"/>
           </a:bodyPr>
           <a:lstStyle/>
           <a:p>
@@ -9057,214 +9926,15 @@
             <a:r>
               <a:rPr lang="en-US" sz="2400" dirty="0">
                 <a:solidFill>
-                  <a:srgbClr val="6B6E78"/>
+                  <a:srgbClr val="C9CBD1"/>
                 </a:solidFill>
                 <a:latin typeface="Inter" pitchFamily="34" charset="0"/>
                 <a:ea typeface="Inter" pitchFamily="34" charset="-122"/>
                 <a:cs typeface="Inter" pitchFamily="34" charset="-120"/>
               </a:rPr>
-              <a:t>Type what comes to mind. Hit send. See what the model guesses.</a:t>
+              <a:t>First without context. Then with. </a:t>
             </a:r>
             <a:endParaRPr lang="en-US" sz="2400" dirty="0"/>
-          </a:p>
-        </p:txBody>
-      </p:sp>
-      <p:sp>
-        <p:nvSpPr>
-          <p:cNvPr id="5" name="Text 3"/>
-          <p:cNvSpPr/>
-          <p:nvPr/>
-        </p:nvSpPr>
-        <p:spPr>
-          <a:xfrm>
-            <a:off x="765810" y="7165628"/>
-            <a:ext cx="8073390" cy="1538883"/>
-          </a:xfrm>
-          <a:prstGeom prst="rect">
-            <a:avLst/>
-          </a:prstGeom>
-          <a:noFill/>
-          <a:ln/>
-        </p:spPr>
-        <p:txBody>
-          <a:bodyPr wrap="square" lIns="25400" tIns="25400" rIns="25400" bIns="25400" rtlCol="0" anchor="t">
-            <a:normAutofit/>
-          </a:bodyPr>
-          <a:lstStyle/>
-          <a:p>
-            <a:pPr marL="0" indent="0" algn="l">
-              <a:lnSpc>
-                <a:spcPct val="140000"/>
-              </a:lnSpc>
-              <a:buNone/>
-            </a:pPr>
-            <a:r>
-              <a:rPr lang="en-US" sz="2100" dirty="0">
-                <a:solidFill>
-                  <a:srgbClr val="2A2D38"/>
-                </a:solidFill>
-                <a:latin typeface="Inter" pitchFamily="34" charset="0"/>
-                <a:ea typeface="Inter" pitchFamily="34" charset="-122"/>
-                <a:cs typeface="Inter" pitchFamily="34" charset="-120"/>
-              </a:rPr>
-              <a:t>No CLAUDE.md attached.</a:t>
-            </a:r>
-          </a:p>
-          <a:p>
-            <a:pPr marL="0" indent="0" algn="l">
-              <a:lnSpc>
-                <a:spcPct val="140000"/>
-              </a:lnSpc>
-              <a:buNone/>
-            </a:pPr>
-            <a:r>
-              <a:rPr lang="en-US" sz="2100" dirty="0">
-                <a:solidFill>
-                  <a:srgbClr val="2A2D38"/>
-                </a:solidFill>
-                <a:latin typeface="Inter" pitchFamily="34" charset="0"/>
-                <a:ea typeface="Inter" pitchFamily="34" charset="-122"/>
-                <a:cs typeface="Inter" pitchFamily="34" charset="-120"/>
-              </a:rPr>
-              <a:t>No requirements doc.</a:t>
-            </a:r>
-          </a:p>
-          <a:p>
-            <a:pPr marL="0" indent="0" algn="l">
-              <a:lnSpc>
-                <a:spcPct val="140000"/>
-              </a:lnSpc>
-              <a:buNone/>
-            </a:pPr>
-            <a:r>
-              <a:rPr lang="en-US" sz="2100" dirty="0">
-                <a:solidFill>
-                  <a:srgbClr val="2A2D38"/>
-                </a:solidFill>
-                <a:latin typeface="Inter" pitchFamily="34" charset="0"/>
-                <a:ea typeface="Inter" pitchFamily="34" charset="-122"/>
-                <a:cs typeface="Inter" pitchFamily="34" charset="-120"/>
-              </a:rPr>
-              <a:t>No conventions documented.</a:t>
-            </a:r>
-            <a:endParaRPr lang="en-US" sz="2100" dirty="0"/>
-          </a:p>
-        </p:txBody>
-      </p:sp>
-      <p:sp>
-        <p:nvSpPr>
-          <p:cNvPr id="6" name="Shape 4"/>
-          <p:cNvSpPr/>
-          <p:nvPr/>
-        </p:nvSpPr>
-        <p:spPr>
-          <a:xfrm>
-            <a:off x="9525000" y="3288209"/>
-            <a:ext cx="7810500" cy="5615583"/>
-          </a:xfrm>
-          <a:prstGeom prst="roundRect">
-            <a:avLst>
-              <a:gd name="adj" fmla="val 2714"/>
-            </a:avLst>
-          </a:prstGeom>
-          <a:solidFill>
-            <a:srgbClr val="1B1D24"/>
-          </a:solidFill>
-          <a:ln/>
-        </p:spPr>
-        <p:txBody>
-          <a:bodyPr/>
-          <a:lstStyle/>
-          <a:p>
-            <a:endParaRPr lang="en-US"/>
-          </a:p>
-        </p:txBody>
-      </p:sp>
-      <p:sp>
-        <p:nvSpPr>
-          <p:cNvPr id="7" name="Text 5"/>
-          <p:cNvSpPr/>
-          <p:nvPr/>
-        </p:nvSpPr>
-        <p:spPr>
-          <a:xfrm>
-            <a:off x="9944100" y="3669209"/>
-            <a:ext cx="7181469" cy="426690"/>
-          </a:xfrm>
-          <a:prstGeom prst="rect">
-            <a:avLst/>
-          </a:prstGeom>
-          <a:noFill/>
-          <a:ln/>
-        </p:spPr>
-        <p:txBody>
-          <a:bodyPr wrap="square" lIns="25400" tIns="25400" rIns="25400" bIns="25400" rtlCol="0" anchor="t">
-            <a:normAutofit fontScale="92500" lnSpcReduction="10000"/>
-          </a:bodyPr>
-          <a:lstStyle/>
-          <a:p>
-            <a:pPr marL="0" indent="0" algn="l">
-              <a:lnSpc>
-                <a:spcPct val="170000"/>
-              </a:lnSpc>
-              <a:buNone/>
-            </a:pPr>
-            <a:r>
-              <a:rPr lang="en-US" sz="1800" b="1" kern="0" spc="360" dirty="0">
-                <a:solidFill>
-                  <a:srgbClr val="3FE0D0"/>
-                </a:solidFill>
-                <a:latin typeface="Montserrat" pitchFamily="34" charset="0"/>
-                <a:ea typeface="Montserrat" pitchFamily="34" charset="-122"/>
-                <a:cs typeface="Montserrat" pitchFamily="34" charset="-120"/>
-              </a:rPr>
-              <a:t>// THE PROMPT</a:t>
-            </a:r>
-            <a:endParaRPr lang="en-US" sz="1800" dirty="0"/>
-          </a:p>
-        </p:txBody>
-      </p:sp>
-      <p:sp>
-        <p:nvSpPr>
-          <p:cNvPr id="8" name="Text 6"/>
-          <p:cNvSpPr/>
-          <p:nvPr/>
-        </p:nvSpPr>
-        <p:spPr>
-          <a:xfrm>
-            <a:off x="9944100" y="4248299"/>
-            <a:ext cx="7181469" cy="4312593"/>
-          </a:xfrm>
-          <a:prstGeom prst="rect">
-            <a:avLst/>
-          </a:prstGeom>
-          <a:noFill/>
-          <a:ln/>
-        </p:spPr>
-        <p:txBody>
-          <a:bodyPr wrap="square" lIns="25400" tIns="25400" rIns="25400" bIns="25400" rtlCol="0" anchor="t">
-            <a:normAutofit/>
-          </a:bodyPr>
-          <a:lstStyle/>
-          <a:p>
-            <a:pPr marL="0" indent="0" algn="l">
-              <a:lnSpc>
-                <a:spcPct val="170000"/>
-              </a:lnSpc>
-              <a:buNone/>
-            </a:pPr>
-            <a:r>
-              <a:rPr lang="en-US" sz="1800" dirty="0">
-                <a:solidFill>
-                  <a:srgbClr val="FFFFFF"/>
-                </a:solidFill>
-                <a:latin typeface="JetBrains Mono" pitchFamily="34" charset="0"/>
-                <a:ea typeface="JetBrains Mono" pitchFamily="34" charset="-122"/>
-                <a:cs typeface="JetBrains Mono" pitchFamily="34" charset="-120"/>
-              </a:rPr>
-              <a:t>Add a login page to the app.</a:t>
-            </a:r>
-            <a:endParaRPr lang="en-US" sz="1800" dirty="0"/>
           </a:p>
         </p:txBody>
       </p:sp>
@@ -9328,7 +9998,7 @@
                 <a:ea typeface="JetBrains Mono" pitchFamily="34" charset="-122"/>
                 <a:cs typeface="JetBrains Mono" pitchFamily="34" charset="-120"/>
               </a:rPr>
-              <a:t>DEMO · TAKE 2</a:t>
+              <a:t>DEMO · TAKE 1</a:t>
             </a:r>
             <a:endParaRPr lang="en-US" sz="2100" dirty="0"/>
           </a:p>
@@ -9353,7 +10023,7 @@
         </p:spPr>
         <p:txBody>
           <a:bodyPr wrap="square" lIns="25400" tIns="25400" rIns="25400" bIns="25400" rtlCol="0" anchor="t">
-            <a:normAutofit fontScale="62500" lnSpcReduction="20000"/>
+            <a:normAutofit fontScale="92500" lnSpcReduction="20000"/>
           </a:bodyPr>
           <a:lstStyle/>
           <a:p>
@@ -9372,7 +10042,7 @@
                 <a:ea typeface="Montserrat" pitchFamily="34" charset="-122"/>
                 <a:cs typeface="Montserrat" pitchFamily="34" charset="-120"/>
               </a:rPr>
-              <a:t>Context engineering.</a:t>
+              <a:t>Vibe coding.</a:t>
             </a:r>
             <a:endParaRPr lang="en-US" sz="9000" dirty="0"/>
           </a:p>
@@ -9416,91 +10086,9 @@
                 <a:ea typeface="Inter" pitchFamily="34" charset="-122"/>
                 <a:cs typeface="Inter" pitchFamily="34" charset="-120"/>
               </a:rPr>
-              <a:t>Same feature. Now the model can see what we actually want before it writes a line.</a:t>
+              <a:t>Type what comes to mind. Hit send. See what the model guesses.</a:t>
             </a:r>
             <a:endParaRPr lang="en-US" sz="2400" dirty="0"/>
-          </a:p>
-        </p:txBody>
-      </p:sp>
-      <p:sp>
-        <p:nvSpPr>
-          <p:cNvPr id="5" name="Text 3"/>
-          <p:cNvSpPr/>
-          <p:nvPr/>
-        </p:nvSpPr>
-        <p:spPr>
-          <a:xfrm>
-            <a:off x="765810" y="7165628"/>
-            <a:ext cx="8073390" cy="1538883"/>
-          </a:xfrm>
-          <a:prstGeom prst="rect">
-            <a:avLst/>
-          </a:prstGeom>
-          <a:noFill/>
-          <a:ln/>
-        </p:spPr>
-        <p:txBody>
-          <a:bodyPr wrap="square" lIns="25400" tIns="25400" rIns="25400" bIns="25400" rtlCol="0" anchor="t">
-            <a:normAutofit/>
-          </a:bodyPr>
-          <a:lstStyle/>
-          <a:p>
-            <a:pPr marL="0" indent="0" algn="l">
-              <a:lnSpc>
-                <a:spcPct val="140000"/>
-              </a:lnSpc>
-              <a:buNone/>
-            </a:pPr>
-            <a:r>
-              <a:rPr lang="en-US" sz="2100" dirty="0">
-                <a:solidFill>
-                  <a:srgbClr val="2A2D38"/>
-                </a:solidFill>
-                <a:latin typeface="Inter" pitchFamily="34" charset="0"/>
-                <a:ea typeface="Inter" pitchFamily="34" charset="-122"/>
-                <a:cs typeface="Inter" pitchFamily="34" charset="-120"/>
-              </a:rPr>
-              <a:t>CLAUDE.md attached.</a:t>
-            </a:r>
-          </a:p>
-          <a:p>
-            <a:pPr marL="0" indent="0" algn="l">
-              <a:lnSpc>
-                <a:spcPct val="140000"/>
-              </a:lnSpc>
-              <a:buNone/>
-            </a:pPr>
-            <a:r>
-              <a:rPr lang="en-US" sz="2100" dirty="0">
-                <a:solidFill>
-                  <a:srgbClr val="2A2D38"/>
-                </a:solidFill>
-                <a:latin typeface="Inter" pitchFamily="34" charset="0"/>
-                <a:ea typeface="Inter" pitchFamily="34" charset="-122"/>
-                <a:cs typeface="Inter" pitchFamily="34" charset="-120"/>
-              </a:rPr>
-              <a:t>Requirements doc attached.</a:t>
-            </a:r>
-          </a:p>
-          <a:p>
-            <a:pPr marL="0" indent="0" algn="l">
-              <a:lnSpc>
-                <a:spcPct val="140000"/>
-              </a:lnSpc>
-              <a:buNone/>
-            </a:pPr>
-            <a:r>
-              <a:rPr lang="en-US" sz="2100" dirty="0">
-                <a:solidFill>
-                  <a:srgbClr val="2A2D38"/>
-                </a:solidFill>
-                <a:latin typeface="Inter" pitchFamily="34" charset="0"/>
-                <a:ea typeface="Inter" pitchFamily="34" charset="-122"/>
-                <a:cs typeface="Inter" pitchFamily="34" charset="-120"/>
-              </a:rPr>
-              <a:t>Auth conventions documented.</a:t>
-            </a:r>
-            <a:endParaRPr lang="en-US" sz="2100" dirty="0"/>
           </a:p>
         </p:txBody>
       </p:sp>
@@ -9615,7 +10203,7 @@
                 <a:ea typeface="JetBrains Mono" pitchFamily="34" charset="-122"/>
                 <a:cs typeface="JetBrains Mono" pitchFamily="34" charset="-120"/>
               </a:rPr>
-              <a:t>Implement the login page per docs/requirements/login.md, following the auth conventions in CLAUDE.md. Stop and ask if anything is ambiguous before writing code.</a:t>
+              <a:t>Add a login page to the app.</a:t>
             </a:r>
             <a:endParaRPr lang="en-US" sz="1800" dirty="0"/>
           </a:p>
@@ -9681,7 +10269,7 @@
                 <a:ea typeface="JetBrains Mono" pitchFamily="34" charset="-122"/>
                 <a:cs typeface="JetBrains Mono" pitchFamily="34" charset="-120"/>
               </a:rPr>
-              <a:t>CONTEXT · ARTIFACT 01</a:t>
+              <a:t>DEMO · TAKE 2</a:t>
             </a:r>
             <a:endParaRPr lang="en-US" sz="2100" dirty="0"/>
           </a:p>
@@ -9706,7 +10294,7 @@
         </p:spPr>
         <p:txBody>
           <a:bodyPr wrap="square" lIns="25400" tIns="25400" rIns="25400" bIns="25400" rtlCol="0" anchor="t">
-            <a:normAutofit fontScale="92500" lnSpcReduction="20000"/>
+            <a:normAutofit fontScale="62500" lnSpcReduction="20000"/>
           </a:bodyPr>
           <a:lstStyle/>
           <a:p>
@@ -9725,7 +10313,7 @@
                 <a:ea typeface="Montserrat" pitchFamily="34" charset="-122"/>
                 <a:cs typeface="Montserrat" pitchFamily="34" charset="-120"/>
               </a:rPr>
-              <a:t>CLAUDE.md</a:t>
+              <a:t>Context engineering.</a:t>
             </a:r>
             <a:endParaRPr lang="en-US" sz="9000" dirty="0"/>
           </a:p>
@@ -9769,7 +10357,7 @@
                 <a:ea typeface="Inter" pitchFamily="34" charset="-122"/>
                 <a:cs typeface="Inter" pitchFamily="34" charset="-120"/>
               </a:rPr>
-              <a:t>Project conventions written down once. Read by the model on every session.</a:t>
+              <a:t>Same feature. Now the model can see what we actually want before it writes a line.</a:t>
             </a:r>
             <a:endParaRPr lang="en-US" sz="2400" dirty="0"/>
           </a:p>
@@ -9813,7 +10401,7 @@
                 <a:ea typeface="Inter" pitchFamily="34" charset="-122"/>
                 <a:cs typeface="Inter" pitchFamily="34" charset="-120"/>
               </a:rPr>
-              <a:t>Stack &amp; framework choices.</a:t>
+              <a:t>CLAUDE.md attached.</a:t>
             </a:r>
           </a:p>
           <a:p>
@@ -9832,7 +10420,7 @@
                 <a:ea typeface="Inter" pitchFamily="34" charset="-122"/>
                 <a:cs typeface="Inter" pitchFamily="34" charset="-120"/>
               </a:rPr>
-              <a:t>Auth &amp; data conventions.</a:t>
+              <a:t>Requirements doc attached.</a:t>
             </a:r>
           </a:p>
           <a:p>
@@ -9851,7 +10439,7 @@
                 <a:ea typeface="Inter" pitchFamily="34" charset="-122"/>
                 <a:cs typeface="Inter" pitchFamily="34" charset="-120"/>
               </a:rPr>
-              <a:t>Naming, testing, error handling.</a:t>
+              <a:t>Auth conventions documented.</a:t>
             </a:r>
             <a:endParaRPr lang="en-US" sz="2100" dirty="0"/>
           </a:p>
@@ -9924,7 +10512,7 @@
                 <a:ea typeface="Montserrat" pitchFamily="34" charset="-122"/>
                 <a:cs typeface="Montserrat" pitchFamily="34" charset="-120"/>
               </a:rPr>
-              <a:t>// CLAUDE.md (excerpt)</a:t>
+              <a:t>// THE PROMPT</a:t>
             </a:r>
             <a:endParaRPr lang="en-US" sz="1800" dirty="0"/>
           </a:p>
@@ -9949,7 +10537,7 @@
         </p:spPr>
         <p:txBody>
           <a:bodyPr wrap="square" lIns="25400" tIns="25400" rIns="25400" bIns="25400" rtlCol="0" anchor="t">
-            <a:normAutofit fontScale="85000" lnSpcReduction="20000"/>
+            <a:normAutofit/>
           </a:bodyPr>
           <a:lstStyle/>
           <a:p>
@@ -9968,207 +10556,7 @@
                 <a:ea typeface="JetBrains Mono" pitchFamily="34" charset="-122"/>
                 <a:cs typeface="JetBrains Mono" pitchFamily="34" charset="-120"/>
               </a:rPr>
-              <a:t># Project: ACS Member Portal</a:t>
-            </a:r>
-          </a:p>
-          <a:p>
-            <a:pPr marL="0" indent="0" algn="l">
-              <a:lnSpc>
-                <a:spcPct val="170000"/>
-              </a:lnSpc>
-              <a:buNone/>
-            </a:pPr>
-            <a:endParaRPr lang="en-US" sz="1800" dirty="0">
-              <a:solidFill>
-                <a:srgbClr val="FFFFFF"/>
-              </a:solidFill>
-              <a:latin typeface="JetBrains Mono" pitchFamily="34" charset="0"/>
-              <a:ea typeface="JetBrains Mono" pitchFamily="34" charset="-122"/>
-              <a:cs typeface="JetBrains Mono" pitchFamily="34" charset="-120"/>
-            </a:endParaRPr>
-          </a:p>
-          <a:p>
-            <a:pPr marL="0" indent="0" algn="l">
-              <a:lnSpc>
-                <a:spcPct val="170000"/>
-              </a:lnSpc>
-              <a:buNone/>
-            </a:pPr>
-            <a:r>
-              <a:rPr lang="en-US" sz="1800" dirty="0">
-                <a:solidFill>
-                  <a:srgbClr val="FFFFFF"/>
-                </a:solidFill>
-                <a:latin typeface="JetBrains Mono" pitchFamily="34" charset="0"/>
-                <a:ea typeface="JetBrains Mono" pitchFamily="34" charset="-122"/>
-                <a:cs typeface="JetBrains Mono" pitchFamily="34" charset="-120"/>
-              </a:rPr>
-              <a:t>Stack: Next.js 14, TypeScript, Prisma, NextAuth.</a:t>
-            </a:r>
-          </a:p>
-          <a:p>
-            <a:pPr marL="0" indent="0" algn="l">
-              <a:lnSpc>
-                <a:spcPct val="170000"/>
-              </a:lnSpc>
-              <a:buNone/>
-            </a:pPr>
-            <a:endParaRPr lang="en-US" sz="1800" dirty="0">
-              <a:solidFill>
-                <a:srgbClr val="FFFFFF"/>
-              </a:solidFill>
-              <a:latin typeface="JetBrains Mono" pitchFamily="34" charset="0"/>
-              <a:ea typeface="JetBrains Mono" pitchFamily="34" charset="-122"/>
-              <a:cs typeface="JetBrains Mono" pitchFamily="34" charset="-120"/>
-            </a:endParaRPr>
-          </a:p>
-          <a:p>
-            <a:pPr marL="0" indent="0" algn="l">
-              <a:lnSpc>
-                <a:spcPct val="170000"/>
-              </a:lnSpc>
-              <a:buNone/>
-            </a:pPr>
-            <a:r>
-              <a:rPr lang="en-US" sz="1800" dirty="0">
-                <a:solidFill>
-                  <a:srgbClr val="FFFFFF"/>
-                </a:solidFill>
-                <a:latin typeface="JetBrains Mono" pitchFamily="34" charset="0"/>
-                <a:ea typeface="JetBrains Mono" pitchFamily="34" charset="-122"/>
-                <a:cs typeface="JetBrains Mono" pitchFamily="34" charset="-120"/>
-              </a:rPr>
-              <a:t>## Auth conventions</a:t>
-            </a:r>
-          </a:p>
-          <a:p>
-            <a:pPr marL="0" indent="0" algn="l">
-              <a:lnSpc>
-                <a:spcPct val="170000"/>
-              </a:lnSpc>
-              <a:buNone/>
-            </a:pPr>
-            <a:r>
-              <a:rPr lang="en-US" sz="1800" dirty="0">
-                <a:solidFill>
-                  <a:srgbClr val="FFFFFF"/>
-                </a:solidFill>
-                <a:latin typeface="JetBrains Mono" pitchFamily="34" charset="0"/>
-                <a:ea typeface="JetBrains Mono" pitchFamily="34" charset="-122"/>
-                <a:cs typeface="JetBrains Mono" pitchFamily="34" charset="-120"/>
-              </a:rPr>
-              <a:t>- NextAuth credentials provider.</a:t>
-            </a:r>
-          </a:p>
-          <a:p>
-            <a:pPr marL="0" indent="0" algn="l">
-              <a:lnSpc>
-                <a:spcPct val="170000"/>
-              </a:lnSpc>
-              <a:buNone/>
-            </a:pPr>
-            <a:r>
-              <a:rPr lang="en-US" sz="1800" dirty="0">
-                <a:solidFill>
-                  <a:srgbClr val="FFFFFF"/>
-                </a:solidFill>
-                <a:latin typeface="JetBrains Mono" pitchFamily="34" charset="0"/>
-                <a:ea typeface="JetBrains Mono" pitchFamily="34" charset="-122"/>
-                <a:cs typeface="JetBrains Mono" pitchFamily="34" charset="-120"/>
-              </a:rPr>
-              <a:t>- Authed pages live under app/(authed)/.</a:t>
-            </a:r>
-          </a:p>
-          <a:p>
-            <a:pPr marL="0" indent="0" algn="l">
-              <a:lnSpc>
-                <a:spcPct val="170000"/>
-              </a:lnSpc>
-              <a:buNone/>
-            </a:pPr>
-            <a:r>
-              <a:rPr lang="en-US" sz="1800" dirty="0">
-                <a:solidFill>
-                  <a:srgbClr val="FFFFFF"/>
-                </a:solidFill>
-                <a:latin typeface="JetBrains Mono" pitchFamily="34" charset="0"/>
-                <a:ea typeface="JetBrains Mono" pitchFamily="34" charset="-122"/>
-                <a:cs typeface="JetBrains Mono" pitchFamily="34" charset="-120"/>
-              </a:rPr>
-              <a:t>- Server components only — no client-side session fetching.</a:t>
-            </a:r>
-          </a:p>
-          <a:p>
-            <a:pPr marL="0" indent="0" algn="l">
-              <a:lnSpc>
-                <a:spcPct val="170000"/>
-              </a:lnSpc>
-              <a:buNone/>
-            </a:pPr>
-            <a:endParaRPr lang="en-US" sz="1800" dirty="0">
-              <a:solidFill>
-                <a:srgbClr val="FFFFFF"/>
-              </a:solidFill>
-              <a:latin typeface="JetBrains Mono" pitchFamily="34" charset="0"/>
-              <a:ea typeface="JetBrains Mono" pitchFamily="34" charset="-122"/>
-              <a:cs typeface="JetBrains Mono" pitchFamily="34" charset="-120"/>
-            </a:endParaRPr>
-          </a:p>
-          <a:p>
-            <a:pPr marL="0" indent="0" algn="l">
-              <a:lnSpc>
-                <a:spcPct val="170000"/>
-              </a:lnSpc>
-              <a:buNone/>
-            </a:pPr>
-            <a:r>
-              <a:rPr lang="en-US" sz="1800" dirty="0">
-                <a:solidFill>
-                  <a:srgbClr val="FFFFFF"/>
-                </a:solidFill>
-                <a:latin typeface="JetBrains Mono" pitchFamily="34" charset="0"/>
-                <a:ea typeface="JetBrains Mono" pitchFamily="34" charset="-122"/>
-                <a:cs typeface="JetBrains Mono" pitchFamily="34" charset="-120"/>
-              </a:rPr>
-              <a:t>## Style</a:t>
-            </a:r>
-          </a:p>
-          <a:p>
-            <a:pPr marL="0" indent="0" algn="l">
-              <a:lnSpc>
-                <a:spcPct val="170000"/>
-              </a:lnSpc>
-              <a:buNone/>
-            </a:pPr>
-            <a:r>
-              <a:rPr lang="en-US" sz="1800" dirty="0">
-                <a:solidFill>
-                  <a:srgbClr val="FFFFFF"/>
-                </a:solidFill>
-                <a:latin typeface="JetBrains Mono" pitchFamily="34" charset="0"/>
-                <a:ea typeface="JetBrains Mono" pitchFamily="34" charset="-122"/>
-                <a:cs typeface="JetBrains Mono" pitchFamily="34" charset="-120"/>
-              </a:rPr>
-              <a:t>- Tailwind. No inline styles.</a:t>
-            </a:r>
-          </a:p>
-          <a:p>
-            <a:pPr marL="0" indent="0" algn="l">
-              <a:lnSpc>
-                <a:spcPct val="170000"/>
-              </a:lnSpc>
-              <a:buNone/>
-            </a:pPr>
-            <a:r>
-              <a:rPr lang="en-US" sz="1800" dirty="0">
-                <a:solidFill>
-                  <a:srgbClr val="FFFFFF"/>
-                </a:solidFill>
-                <a:latin typeface="JetBrains Mono" pitchFamily="34" charset="0"/>
-                <a:ea typeface="JetBrains Mono" pitchFamily="34" charset="-122"/>
-                <a:cs typeface="JetBrains Mono" pitchFamily="34" charset="-120"/>
-              </a:rPr>
-              <a:t>- One feature per folder under app/.</a:t>
+              <a:t>Implement the login page per docs/requirements/login.md, following the auth conventions in CLAUDE.md. Stop and ask if anything is ambiguous before writing code.</a:t>
             </a:r>
             <a:endParaRPr lang="en-US" sz="1800" dirty="0"/>
           </a:p>
@@ -10453,7 +10841,7 @@
                 <a:ea typeface="JetBrains Mono" pitchFamily="34" charset="-122"/>
                 <a:cs typeface="JetBrains Mono" pitchFamily="34" charset="-120"/>
               </a:rPr>
-              <a:t>CONTEXT · ARTIFACT 02</a:t>
+              <a:t>CONTEXT · ARTIFACT 01</a:t>
             </a:r>
             <a:endParaRPr lang="en-US" sz="2100" dirty="0"/>
           </a:p>
@@ -10478,7 +10866,7 @@
         </p:spPr>
         <p:txBody>
           <a:bodyPr wrap="square" lIns="25400" tIns="25400" rIns="25400" bIns="25400" rtlCol="0" anchor="t">
-            <a:normAutofit fontScale="70000" lnSpcReduction="20000"/>
+            <a:normAutofit fontScale="92500" lnSpcReduction="20000"/>
           </a:bodyPr>
           <a:lstStyle/>
           <a:p>
@@ -10497,7 +10885,7 @@
                 <a:ea typeface="Montserrat" pitchFamily="34" charset="-122"/>
                 <a:cs typeface="Montserrat" pitchFamily="34" charset="-120"/>
               </a:rPr>
-              <a:t>Requirements doc.</a:t>
+              <a:t>CLAUDE.md</a:t>
             </a:r>
             <a:endParaRPr lang="en-US" sz="9000" dirty="0"/>
           </a:p>
@@ -10541,91 +10929,9 @@
                 <a:ea typeface="Inter" pitchFamily="34" charset="-122"/>
                 <a:cs typeface="Inter" pitchFamily="34" charset="-120"/>
               </a:rPr>
-              <a:t>What we want, before we ask for code. Living doc, lives next to the feature.</a:t>
+              <a:t>Project conventions written down once. Read by the model on every session.</a:t>
             </a:r>
             <a:endParaRPr lang="en-US" sz="2400" dirty="0"/>
-          </a:p>
-        </p:txBody>
-      </p:sp>
-      <p:sp>
-        <p:nvSpPr>
-          <p:cNvPr id="5" name="Text 3"/>
-          <p:cNvSpPr/>
-          <p:nvPr/>
-        </p:nvSpPr>
-        <p:spPr>
-          <a:xfrm>
-            <a:off x="765810" y="7165628"/>
-            <a:ext cx="8073390" cy="1538883"/>
-          </a:xfrm>
-          <a:prstGeom prst="rect">
-            <a:avLst/>
-          </a:prstGeom>
-          <a:noFill/>
-          <a:ln/>
-        </p:spPr>
-        <p:txBody>
-          <a:bodyPr wrap="square" lIns="25400" tIns="25400" rIns="25400" bIns="25400" rtlCol="0" anchor="t">
-            <a:normAutofit/>
-          </a:bodyPr>
-          <a:lstStyle/>
-          <a:p>
-            <a:pPr marL="0" indent="0" algn="l">
-              <a:lnSpc>
-                <a:spcPct val="140000"/>
-              </a:lnSpc>
-              <a:buNone/>
-            </a:pPr>
-            <a:r>
-              <a:rPr lang="en-US" sz="2100" dirty="0">
-                <a:solidFill>
-                  <a:srgbClr val="2A2D38"/>
-                </a:solidFill>
-                <a:latin typeface="Inter" pitchFamily="34" charset="0"/>
-                <a:ea typeface="Inter" pitchFamily="34" charset="-122"/>
-                <a:cs typeface="Inter" pitchFamily="34" charset="-120"/>
-              </a:rPr>
-              <a:t>User outcome, plainly stated.</a:t>
-            </a:r>
-          </a:p>
-          <a:p>
-            <a:pPr marL="0" indent="0" algn="l">
-              <a:lnSpc>
-                <a:spcPct val="140000"/>
-              </a:lnSpc>
-              <a:buNone/>
-            </a:pPr>
-            <a:r>
-              <a:rPr lang="en-US" sz="2100" dirty="0">
-                <a:solidFill>
-                  <a:srgbClr val="2A2D38"/>
-                </a:solidFill>
-                <a:latin typeface="Inter" pitchFamily="34" charset="0"/>
-                <a:ea typeface="Inter" pitchFamily="34" charset="-122"/>
-                <a:cs typeface="Inter" pitchFamily="34" charset="-120"/>
-              </a:rPr>
-              <a:t>Fields, validation, errors.</a:t>
-            </a:r>
-          </a:p>
-          <a:p>
-            <a:pPr marL="0" indent="0" algn="l">
-              <a:lnSpc>
-                <a:spcPct val="140000"/>
-              </a:lnSpc>
-              <a:buNone/>
-            </a:pPr>
-            <a:r>
-              <a:rPr lang="en-US" sz="2100" dirty="0">
-                <a:solidFill>
-                  <a:srgbClr val="2A2D38"/>
-                </a:solidFill>
-                <a:latin typeface="Inter" pitchFamily="34" charset="0"/>
-                <a:ea typeface="Inter" pitchFamily="34" charset="-122"/>
-                <a:cs typeface="Inter" pitchFamily="34" charset="-120"/>
-              </a:rPr>
-              <a:t>What success looks like.</a:t>
-            </a:r>
-            <a:endParaRPr lang="en-US" sz="2100" dirty="0"/>
           </a:p>
         </p:txBody>
       </p:sp>
@@ -10696,7 +11002,7 @@
                 <a:ea typeface="Montserrat" pitchFamily="34" charset="-122"/>
                 <a:cs typeface="Montserrat" pitchFamily="34" charset="-120"/>
               </a:rPr>
-              <a:t>// docs/requirements/login.md</a:t>
+              <a:t>// CLAUDE.md (excerpt)</a:t>
             </a:r>
             <a:endParaRPr lang="en-US" sz="1800" dirty="0"/>
           </a:p>
@@ -10721,7 +11027,7 @@
         </p:spPr>
         <p:txBody>
           <a:bodyPr wrap="square" lIns="25400" tIns="25400" rIns="25400" bIns="25400" rtlCol="0" anchor="t">
-            <a:normAutofit fontScale="62500" lnSpcReduction="20000"/>
+            <a:normAutofit fontScale="85000" lnSpcReduction="20000"/>
           </a:bodyPr>
           <a:lstStyle/>
           <a:p>
@@ -10740,7 +11046,7 @@
                 <a:ea typeface="JetBrains Mono" pitchFamily="34" charset="-122"/>
                 <a:cs typeface="JetBrains Mono" pitchFamily="34" charset="-120"/>
               </a:rPr>
-              <a:t># Login page</a:t>
+              <a:t># Project: ACS Member Portal</a:t>
             </a:r>
           </a:p>
           <a:p>
@@ -10775,18 +11081,10 @@
                 <a:ea typeface="JetBrains Mono" pitchFamily="34" charset="-122"/>
                 <a:cs typeface="JetBrains Mono" pitchFamily="34" charset="-120"/>
               </a:rPr>
-              <a:t>## Goal</a:t>
-            </a:r>
-          </a:p>
-          <a:p>
-            <a:pPr marL="0" indent="0" algn="l">
-              <a:lnSpc>
-                <a:spcPct val="170000"/>
-              </a:lnSpc>
-              <a:buNone/>
-            </a:pPr>
-            <a:r>
-              <a:rPr lang="en-US" sz="1800" dirty="0">
+              <a:t>Stack: </a:t>
+            </a:r>
+            <a:r>
+              <a:rPr lang="en-US" sz="1800" dirty="0" err="1">
                 <a:solidFill>
                   <a:srgbClr val="FFFFFF"/>
                 </a:solidFill>
@@ -10794,7 +11092,40 @@
                 <a:ea typeface="JetBrains Mono" pitchFamily="34" charset="-122"/>
                 <a:cs typeface="JetBrains Mono" pitchFamily="34" charset="-120"/>
               </a:rPr>
-              <a:t>Returning members sign in with email + password.</a:t>
+              <a:t>Next.js</a:t>
+            </a:r>
+            <a:r>
+              <a:rPr lang="en-US" sz="1800" dirty="0">
+                <a:solidFill>
+                  <a:srgbClr val="FFFFFF"/>
+                </a:solidFill>
+                <a:latin typeface="JetBrains Mono" pitchFamily="34" charset="0"/>
+                <a:ea typeface="JetBrains Mono" pitchFamily="34" charset="-122"/>
+                <a:cs typeface="JetBrains Mono" pitchFamily="34" charset="-120"/>
+              </a:rPr>
+              <a:t> 16, TypeScript, Drizzle, </a:t>
+            </a:r>
+            <a:r>
+              <a:rPr lang="en-US" sz="1800" dirty="0" err="1">
+                <a:solidFill>
+                  <a:srgbClr val="FFFFFF"/>
+                </a:solidFill>
+                <a:latin typeface="JetBrains Mono" pitchFamily="34" charset="0"/>
+                <a:ea typeface="JetBrains Mono" pitchFamily="34" charset="-122"/>
+                <a:cs typeface="JetBrains Mono" pitchFamily="34" charset="-120"/>
+              </a:rPr>
+              <a:t>BetterAuth</a:t>
+            </a:r>
+            <a:r>
+              <a:rPr lang="en-US" sz="1800" dirty="0">
+                <a:solidFill>
+                  <a:srgbClr val="FFFFFF"/>
+                </a:solidFill>
+                <a:latin typeface="JetBrains Mono" pitchFamily="34" charset="0"/>
+                <a:ea typeface="JetBrains Mono" pitchFamily="34" charset="-122"/>
+                <a:cs typeface="JetBrains Mono" pitchFamily="34" charset="-120"/>
+              </a:rPr>
+              <a:t>.</a:t>
             </a:r>
           </a:p>
           <a:p>
@@ -10829,7 +11160,7 @@
                 <a:ea typeface="JetBrains Mono" pitchFamily="34" charset="-122"/>
                 <a:cs typeface="JetBrains Mono" pitchFamily="34" charset="-120"/>
               </a:rPr>
-              <a:t>## Fields</a:t>
+              <a:t>## Auth conventions</a:t>
             </a:r>
           </a:p>
           <a:p>
@@ -10848,7 +11179,29 @@
                 <a:ea typeface="JetBrains Mono" pitchFamily="34" charset="-122"/>
                 <a:cs typeface="JetBrains Mono" pitchFamily="34" charset="-120"/>
               </a:rPr>
-              <a:t>- email (required, valid format)</a:t>
+              <a:t>- </a:t>
+            </a:r>
+            <a:r>
+              <a:rPr lang="en-US" sz="1800" dirty="0" err="1">
+                <a:solidFill>
+                  <a:srgbClr val="FFFFFF"/>
+                </a:solidFill>
+                <a:latin typeface="JetBrains Mono" pitchFamily="34" charset="0"/>
+                <a:ea typeface="JetBrains Mono" pitchFamily="34" charset="-122"/>
+                <a:cs typeface="JetBrains Mono" pitchFamily="34" charset="-120"/>
+              </a:rPr>
+              <a:t>BetterAuth</a:t>
+            </a:r>
+            <a:r>
+              <a:rPr lang="en-US" sz="1800" dirty="0">
+                <a:solidFill>
+                  <a:srgbClr val="FFFFFF"/>
+                </a:solidFill>
+                <a:latin typeface="JetBrains Mono" pitchFamily="34" charset="0"/>
+                <a:ea typeface="JetBrains Mono" pitchFamily="34" charset="-122"/>
+                <a:cs typeface="JetBrains Mono" pitchFamily="34" charset="-120"/>
+              </a:rPr>
+              <a:t> credentials provider.</a:t>
             </a:r>
           </a:p>
           <a:p>
@@ -10867,7 +11220,26 @@
                 <a:ea typeface="JetBrains Mono" pitchFamily="34" charset="-122"/>
                 <a:cs typeface="JetBrains Mono" pitchFamily="34" charset="-120"/>
               </a:rPr>
-              <a:t>- password (required, ≥ 8 chars)</a:t>
+              <a:t>- Authed pages live under app/(secure)/.</a:t>
+            </a:r>
+          </a:p>
+          <a:p>
+            <a:pPr marL="0" indent="0" algn="l">
+              <a:lnSpc>
+                <a:spcPct val="170000"/>
+              </a:lnSpc>
+              <a:buNone/>
+            </a:pPr>
+            <a:r>
+              <a:rPr lang="en-US" sz="1800" dirty="0">
+                <a:solidFill>
+                  <a:srgbClr val="FFFFFF"/>
+                </a:solidFill>
+                <a:latin typeface="JetBrains Mono" pitchFamily="34" charset="0"/>
+                <a:ea typeface="JetBrains Mono" pitchFamily="34" charset="-122"/>
+                <a:cs typeface="JetBrains Mono" pitchFamily="34" charset="-120"/>
+              </a:rPr>
+              <a:t>- Server components only — no client-side session fetching.</a:t>
             </a:r>
           </a:p>
           <a:p>
@@ -10902,7 +11274,7 @@
                 <a:ea typeface="JetBrains Mono" pitchFamily="34" charset="-122"/>
                 <a:cs typeface="JetBrains Mono" pitchFamily="34" charset="-120"/>
               </a:rPr>
-              <a:t>## Behavior</a:t>
+              <a:t>## Style</a:t>
             </a:r>
           </a:p>
           <a:p>
@@ -10921,7 +11293,7 @@
                 <a:ea typeface="JetBrains Mono" pitchFamily="34" charset="-122"/>
                 <a:cs typeface="JetBrains Mono" pitchFamily="34" charset="-120"/>
               </a:rPr>
-              <a:t>- On submit: POST to /api/auth/signin</a:t>
+              <a:t>- Tailwind. No inline styles.</a:t>
             </a:r>
           </a:p>
           <a:p>
@@ -10940,80 +11312,7 @@
                 <a:ea typeface="JetBrains Mono" pitchFamily="34" charset="-122"/>
                 <a:cs typeface="JetBrains Mono" pitchFamily="34" charset="-120"/>
               </a:rPr>
-              <a:t>- On success: redirect to /dashboard</a:t>
-            </a:r>
-          </a:p>
-          <a:p>
-            <a:pPr marL="0" indent="0" algn="l">
-              <a:lnSpc>
-                <a:spcPct val="170000"/>
-              </a:lnSpc>
-              <a:buNone/>
-            </a:pPr>
-            <a:r>
-              <a:rPr lang="en-US" sz="1800" dirty="0">
-                <a:solidFill>
-                  <a:srgbClr val="FFFFFF"/>
-                </a:solidFill>
-                <a:latin typeface="JetBrains Mono" pitchFamily="34" charset="0"/>
-                <a:ea typeface="JetBrains Mono" pitchFamily="34" charset="-122"/>
-                <a:cs typeface="JetBrains Mono" pitchFamily="34" charset="-120"/>
-              </a:rPr>
-              <a:t>- On failure: inline error, do not clear email</a:t>
-            </a:r>
-          </a:p>
-          <a:p>
-            <a:pPr marL="0" indent="0" algn="l">
-              <a:lnSpc>
-                <a:spcPct val="170000"/>
-              </a:lnSpc>
-              <a:buNone/>
-            </a:pPr>
-            <a:endParaRPr lang="en-US" sz="1800" dirty="0">
-              <a:solidFill>
-                <a:srgbClr val="FFFFFF"/>
-              </a:solidFill>
-              <a:latin typeface="JetBrains Mono" pitchFamily="34" charset="0"/>
-              <a:ea typeface="JetBrains Mono" pitchFamily="34" charset="-122"/>
-              <a:cs typeface="JetBrains Mono" pitchFamily="34" charset="-120"/>
-            </a:endParaRPr>
-          </a:p>
-          <a:p>
-            <a:pPr marL="0" indent="0" algn="l">
-              <a:lnSpc>
-                <a:spcPct val="170000"/>
-              </a:lnSpc>
-              <a:buNone/>
-            </a:pPr>
-            <a:r>
-              <a:rPr lang="en-US" sz="1800" dirty="0">
-                <a:solidFill>
-                  <a:srgbClr val="FFFFFF"/>
-                </a:solidFill>
-                <a:latin typeface="JetBrains Mono" pitchFamily="34" charset="0"/>
-                <a:ea typeface="JetBrains Mono" pitchFamily="34" charset="-122"/>
-                <a:cs typeface="JetBrains Mono" pitchFamily="34" charset="-120"/>
-              </a:rPr>
-              <a:t>## Out of scope</a:t>
-            </a:r>
-          </a:p>
-          <a:p>
-            <a:pPr marL="0" indent="0" algn="l">
-              <a:lnSpc>
-                <a:spcPct val="170000"/>
-              </a:lnSpc>
-              <a:buNone/>
-            </a:pPr>
-            <a:r>
-              <a:rPr lang="en-US" sz="1800" dirty="0">
-                <a:solidFill>
-                  <a:srgbClr val="FFFFFF"/>
-                </a:solidFill>
-                <a:latin typeface="JetBrains Mono" pitchFamily="34" charset="0"/>
-                <a:ea typeface="JetBrains Mono" pitchFamily="34" charset="-122"/>
-                <a:cs typeface="JetBrains Mono" pitchFamily="34" charset="-120"/>
-              </a:rPr>
-              <a:t>- Password reset, OAuth, MFA</a:t>
+              <a:t>- One feature per folder under app/.</a:t>
             </a:r>
             <a:endParaRPr lang="en-US" sz="1800" dirty="0"/>
           </a:p>
@@ -11046,17 +11345,230 @@
       </p:grpSpPr>
       <p:sp>
         <p:nvSpPr>
-          <p:cNvPr id="2" name="Shape 0"/>
-          <p:cNvSpPr/>
-          <p:nvPr/>
-        </p:nvSpPr>
-        <p:spPr>
-          <a:xfrm>
-            <a:off x="0" y="0"/>
-            <a:ext cx="18288000" cy="10287000"/>
-          </a:xfrm>
-          <a:prstGeom prst="rect">
-            <a:avLst/>
+          <p:cNvPr id="2" name="Text 0"/>
+          <p:cNvSpPr/>
+          <p:nvPr/>
+        </p:nvSpPr>
+        <p:spPr>
+          <a:xfrm>
+            <a:off x="952500" y="3525441"/>
+            <a:ext cx="8044815" cy="390525"/>
+          </a:xfrm>
+          <a:prstGeom prst="rect">
+            <a:avLst/>
+          </a:prstGeom>
+          <a:noFill/>
+          <a:ln/>
+        </p:spPr>
+        <p:txBody>
+          <a:bodyPr wrap="square" lIns="25400" tIns="25400" rIns="25400" bIns="25400" rtlCol="0" anchor="t">
+            <a:normAutofit/>
+          </a:bodyPr>
+          <a:lstStyle/>
+          <a:p>
+            <a:pPr marL="0" indent="0" algn="l">
+              <a:buNone/>
+            </a:pPr>
+            <a:r>
+              <a:rPr lang="en-US" sz="2100" kern="0" spc="630" dirty="0">
+                <a:solidFill>
+                  <a:srgbClr val="F58220"/>
+                </a:solidFill>
+                <a:latin typeface="JetBrains Mono" pitchFamily="34" charset="0"/>
+                <a:ea typeface="JetBrains Mono" pitchFamily="34" charset="-122"/>
+                <a:cs typeface="JetBrains Mono" pitchFamily="34" charset="-120"/>
+              </a:rPr>
+              <a:t>CONTEXT · ARTIFACT 02</a:t>
+            </a:r>
+            <a:endParaRPr lang="en-US" sz="2100" dirty="0"/>
+          </a:p>
+        </p:txBody>
+      </p:sp>
+      <p:sp>
+        <p:nvSpPr>
+          <p:cNvPr id="3" name="Text 1"/>
+          <p:cNvSpPr/>
+          <p:nvPr/>
+        </p:nvSpPr>
+        <p:spPr>
+          <a:xfrm>
+            <a:off x="952500" y="4144566"/>
+            <a:ext cx="8044815" cy="1123950"/>
+          </a:xfrm>
+          <a:prstGeom prst="rect">
+            <a:avLst/>
+          </a:prstGeom>
+          <a:noFill/>
+          <a:ln/>
+        </p:spPr>
+        <p:txBody>
+          <a:bodyPr wrap="square" lIns="25400" tIns="25400" rIns="25400" bIns="25400" rtlCol="0" anchor="t">
+            <a:normAutofit fontScale="70000" lnSpcReduction="20000"/>
+          </a:bodyPr>
+          <a:lstStyle/>
+          <a:p>
+            <a:pPr marL="0" indent="0" algn="l">
+              <a:lnSpc>
+                <a:spcPct val="95000"/>
+              </a:lnSpc>
+              <a:buNone/>
+            </a:pPr>
+            <a:r>
+              <a:rPr lang="en-US" sz="9000" b="1" kern="0" spc="-180" dirty="0">
+                <a:solidFill>
+                  <a:srgbClr val="2A2D38"/>
+                </a:solidFill>
+                <a:latin typeface="Montserrat" pitchFamily="34" charset="0"/>
+                <a:ea typeface="Montserrat" pitchFamily="34" charset="-122"/>
+                <a:cs typeface="Montserrat" pitchFamily="34" charset="-120"/>
+              </a:rPr>
+              <a:t>Requirements doc.</a:t>
+            </a:r>
+            <a:endParaRPr lang="en-US" sz="9000" dirty="0"/>
+          </a:p>
+        </p:txBody>
+      </p:sp>
+      <p:sp>
+        <p:nvSpPr>
+          <p:cNvPr id="4" name="Text 2"/>
+          <p:cNvSpPr/>
+          <p:nvPr/>
+        </p:nvSpPr>
+        <p:spPr>
+          <a:xfrm>
+            <a:off x="952500" y="5497116"/>
+            <a:ext cx="6867525" cy="1363712"/>
+          </a:xfrm>
+          <a:prstGeom prst="rect">
+            <a:avLst/>
+          </a:prstGeom>
+          <a:noFill/>
+          <a:ln/>
+        </p:spPr>
+        <p:txBody>
+          <a:bodyPr wrap="square" lIns="25400" tIns="25400" rIns="25400" bIns="25400" rtlCol="0" anchor="t">
+            <a:normAutofit/>
+          </a:bodyPr>
+          <a:lstStyle/>
+          <a:p>
+            <a:pPr marL="0" indent="0" algn="l">
+              <a:lnSpc>
+                <a:spcPct val="145000"/>
+              </a:lnSpc>
+              <a:buNone/>
+            </a:pPr>
+            <a:r>
+              <a:rPr lang="en-US" sz="2400" dirty="0">
+                <a:solidFill>
+                  <a:srgbClr val="6B6E78"/>
+                </a:solidFill>
+                <a:latin typeface="Inter" pitchFamily="34" charset="0"/>
+                <a:ea typeface="Inter" pitchFamily="34" charset="-122"/>
+                <a:cs typeface="Inter" pitchFamily="34" charset="-120"/>
+              </a:rPr>
+              <a:t>What we want, before we ask for code. Living doc, lives next to the feature.</a:t>
+            </a:r>
+            <a:endParaRPr lang="en-US" sz="2400" dirty="0"/>
+          </a:p>
+        </p:txBody>
+      </p:sp>
+      <p:sp>
+        <p:nvSpPr>
+          <p:cNvPr id="5" name="Text 3"/>
+          <p:cNvSpPr/>
+          <p:nvPr/>
+        </p:nvSpPr>
+        <p:spPr>
+          <a:xfrm>
+            <a:off x="765810" y="7165628"/>
+            <a:ext cx="8073390" cy="1538883"/>
+          </a:xfrm>
+          <a:prstGeom prst="rect">
+            <a:avLst/>
+          </a:prstGeom>
+          <a:noFill/>
+          <a:ln/>
+        </p:spPr>
+        <p:txBody>
+          <a:bodyPr wrap="square" lIns="25400" tIns="25400" rIns="25400" bIns="25400" rtlCol="0" anchor="t">
+            <a:normAutofit/>
+          </a:bodyPr>
+          <a:lstStyle/>
+          <a:p>
+            <a:pPr marL="0" indent="0" algn="l">
+              <a:lnSpc>
+                <a:spcPct val="140000"/>
+              </a:lnSpc>
+              <a:buNone/>
+            </a:pPr>
+            <a:r>
+              <a:rPr lang="en-US" sz="2100" dirty="0">
+                <a:solidFill>
+                  <a:srgbClr val="2A2D38"/>
+                </a:solidFill>
+                <a:latin typeface="Inter" pitchFamily="34" charset="0"/>
+                <a:ea typeface="Inter" pitchFamily="34" charset="-122"/>
+                <a:cs typeface="Inter" pitchFamily="34" charset="-120"/>
+              </a:rPr>
+              <a:t>User outcome, plainly stated.</a:t>
+            </a:r>
+          </a:p>
+          <a:p>
+            <a:pPr marL="0" indent="0" algn="l">
+              <a:lnSpc>
+                <a:spcPct val="140000"/>
+              </a:lnSpc>
+              <a:buNone/>
+            </a:pPr>
+            <a:r>
+              <a:rPr lang="en-US" sz="2100" dirty="0">
+                <a:solidFill>
+                  <a:srgbClr val="2A2D38"/>
+                </a:solidFill>
+                <a:latin typeface="Inter" pitchFamily="34" charset="0"/>
+                <a:ea typeface="Inter" pitchFamily="34" charset="-122"/>
+                <a:cs typeface="Inter" pitchFamily="34" charset="-120"/>
+              </a:rPr>
+              <a:t>Fields, validation, errors.</a:t>
+            </a:r>
+          </a:p>
+          <a:p>
+            <a:pPr marL="0" indent="0" algn="l">
+              <a:lnSpc>
+                <a:spcPct val="140000"/>
+              </a:lnSpc>
+              <a:buNone/>
+            </a:pPr>
+            <a:r>
+              <a:rPr lang="en-US" sz="2100" dirty="0">
+                <a:solidFill>
+                  <a:srgbClr val="2A2D38"/>
+                </a:solidFill>
+                <a:latin typeface="Inter" pitchFamily="34" charset="0"/>
+                <a:ea typeface="Inter" pitchFamily="34" charset="-122"/>
+                <a:cs typeface="Inter" pitchFamily="34" charset="-120"/>
+              </a:rPr>
+              <a:t>What success looks like.</a:t>
+            </a:r>
+            <a:endParaRPr lang="en-US" sz="2100" dirty="0"/>
+          </a:p>
+        </p:txBody>
+      </p:sp>
+      <p:sp>
+        <p:nvSpPr>
+          <p:cNvPr id="6" name="Shape 4"/>
+          <p:cNvSpPr/>
+          <p:nvPr/>
+        </p:nvSpPr>
+        <p:spPr>
+          <a:xfrm>
+            <a:off x="9525000" y="3288209"/>
+            <a:ext cx="7810500" cy="5615583"/>
+          </a:xfrm>
+          <a:prstGeom prst="roundRect">
+            <a:avLst>
+              <a:gd name="adj" fmla="val 2714"/>
+            </a:avLst>
           </a:prstGeom>
           <a:solidFill>
             <a:srgbClr val="1B1D24"/>
@@ -11073,14 +11585,14 @@
       </p:sp>
       <p:sp>
         <p:nvSpPr>
-          <p:cNvPr id="3" name="Text 1"/>
-          <p:cNvSpPr/>
-          <p:nvPr/>
-        </p:nvSpPr>
-        <p:spPr>
-          <a:xfrm>
-            <a:off x="4343251" y="3170932"/>
-            <a:ext cx="9889543" cy="390525"/>
+          <p:cNvPr id="7" name="Text 5"/>
+          <p:cNvSpPr/>
+          <p:nvPr/>
+        </p:nvSpPr>
+        <p:spPr>
+          <a:xfrm>
+            <a:off x="9944100" y="3669209"/>
+            <a:ext cx="7181469" cy="426690"/>
           </a:xfrm>
           <a:prstGeom prst="rect">
             <a:avLst/>
@@ -11090,132 +11602,345 @@
         </p:spPr>
         <p:txBody>
           <a:bodyPr wrap="square" lIns="25400" tIns="25400" rIns="25400" bIns="25400" rtlCol="0" anchor="t">
-            <a:normAutofit/>
+            <a:normAutofit fontScale="92500" lnSpcReduction="10000"/>
           </a:bodyPr>
           <a:lstStyle/>
           <a:p>
             <a:pPr marL="0" indent="0" algn="l">
-              <a:buNone/>
-            </a:pPr>
-            <a:r>
-              <a:rPr lang="en-US" sz="2100" kern="0" spc="840" dirty="0">
+              <a:lnSpc>
+                <a:spcPct val="170000"/>
+              </a:lnSpc>
+              <a:buNone/>
+            </a:pPr>
+            <a:r>
+              <a:rPr lang="en-US" sz="1800" b="1" kern="0" spc="360" dirty="0">
                 <a:solidFill>
                   <a:srgbClr val="3FE0D0"/>
+                </a:solidFill>
+                <a:latin typeface="Montserrat" pitchFamily="34" charset="0"/>
+                <a:ea typeface="Montserrat" pitchFamily="34" charset="-122"/>
+                <a:cs typeface="Montserrat" pitchFamily="34" charset="-120"/>
+              </a:rPr>
+              <a:t>// docs/requirements/login.md</a:t>
+            </a:r>
+            <a:endParaRPr lang="en-US" sz="1800" dirty="0"/>
+          </a:p>
+        </p:txBody>
+      </p:sp>
+      <p:sp>
+        <p:nvSpPr>
+          <p:cNvPr id="8" name="Text 6"/>
+          <p:cNvSpPr/>
+          <p:nvPr/>
+        </p:nvSpPr>
+        <p:spPr>
+          <a:xfrm>
+            <a:off x="9944100" y="4248299"/>
+            <a:ext cx="7181469" cy="4312593"/>
+          </a:xfrm>
+          <a:prstGeom prst="rect">
+            <a:avLst/>
+          </a:prstGeom>
+          <a:noFill/>
+          <a:ln/>
+        </p:spPr>
+        <p:txBody>
+          <a:bodyPr wrap="square" lIns="25400" tIns="25400" rIns="25400" bIns="25400" rtlCol="0" anchor="t">
+            <a:normAutofit fontScale="62500" lnSpcReduction="20000"/>
+          </a:bodyPr>
+          <a:lstStyle/>
+          <a:p>
+            <a:pPr marL="0" indent="0" algn="l">
+              <a:lnSpc>
+                <a:spcPct val="170000"/>
+              </a:lnSpc>
+              <a:buNone/>
+            </a:pPr>
+            <a:r>
+              <a:rPr lang="en-US" sz="1800" dirty="0">
+                <a:solidFill>
+                  <a:srgbClr val="FFFFFF"/>
                 </a:solidFill>
                 <a:latin typeface="JetBrains Mono" pitchFamily="34" charset="0"/>
                 <a:ea typeface="JetBrains Mono" pitchFamily="34" charset="-122"/>
                 <a:cs typeface="JetBrains Mono" pitchFamily="34" charset="-120"/>
               </a:rPr>
-              <a:t>BACKUP · TAKE 1 RESULT</a:t>
-            </a:r>
-            <a:endParaRPr lang="en-US" sz="2100" dirty="0"/>
-          </a:p>
-        </p:txBody>
-      </p:sp>
-      <p:sp>
-        <p:nvSpPr>
-          <p:cNvPr id="4" name="Text 2"/>
-          <p:cNvSpPr/>
-          <p:nvPr/>
-        </p:nvSpPr>
-        <p:spPr>
-          <a:xfrm>
-            <a:off x="4343251" y="3904357"/>
-            <a:ext cx="9889543" cy="2426791"/>
-          </a:xfrm>
-          <a:prstGeom prst="rect">
-            <a:avLst/>
-          </a:prstGeom>
-          <a:noFill/>
-          <a:ln/>
-        </p:spPr>
-        <p:txBody>
-          <a:bodyPr wrap="square" lIns="25400" tIns="25400" rIns="25400" bIns="25400" rtlCol="0" anchor="t">
-            <a:normAutofit fontScale="77500" lnSpcReduction="20000"/>
-          </a:bodyPr>
-          <a:lstStyle/>
+              <a:t># Login page</a:t>
+            </a:r>
+          </a:p>
           <a:p>
             <a:pPr marL="0" indent="0" algn="l">
               <a:lnSpc>
-                <a:spcPct val="95000"/>
+                <a:spcPct val="170000"/>
               </a:lnSpc>
               <a:buNone/>
             </a:pPr>
-            <a:r>
-              <a:rPr lang="en-US" sz="9900" b="1" kern="0" spc="-247" dirty="0">
-                <a:solidFill>
-                  <a:srgbClr val="FFFFFF"/>
-                </a:solidFill>
-                <a:latin typeface="Montserrat" pitchFamily="34" charset="0"/>
-                <a:ea typeface="Montserrat" pitchFamily="34" charset="-122"/>
-                <a:cs typeface="Montserrat" pitchFamily="34" charset="-120"/>
-              </a:rPr>
-              <a:t>(Screenshot of</a:t>
-            </a:r>
+            <a:endParaRPr lang="en-US" sz="1800" dirty="0">
+              <a:solidFill>
+                <a:srgbClr val="FFFFFF"/>
+              </a:solidFill>
+              <a:latin typeface="JetBrains Mono" pitchFamily="34" charset="0"/>
+              <a:ea typeface="JetBrains Mono" pitchFamily="34" charset="-122"/>
+              <a:cs typeface="JetBrains Mono" pitchFamily="34" charset="-120"/>
+            </a:endParaRPr>
           </a:p>
           <a:p>
             <a:pPr marL="0" indent="0" algn="l">
               <a:lnSpc>
-                <a:spcPct val="95000"/>
+                <a:spcPct val="170000"/>
               </a:lnSpc>
               <a:buNone/>
             </a:pPr>
             <a:r>
-              <a:rPr lang="en-US" sz="9900" b="1" kern="0" spc="-247" dirty="0">
+              <a:rPr lang="en-US" sz="1800" dirty="0">
                 <a:solidFill>
                   <a:srgbClr val="FFFFFF"/>
                 </a:solidFill>
-                <a:latin typeface="Montserrat" pitchFamily="34" charset="0"/>
-                <a:ea typeface="Montserrat" pitchFamily="34" charset="-122"/>
-                <a:cs typeface="Montserrat" pitchFamily="34" charset="-120"/>
-              </a:rPr>
-              <a:t>vibe-coded output)</a:t>
-            </a:r>
-            <a:endParaRPr lang="en-US" sz="9900" dirty="0"/>
-          </a:p>
-        </p:txBody>
-      </p:sp>
-      <p:sp>
-        <p:nvSpPr>
-          <p:cNvPr id="5" name="Text 3"/>
-          <p:cNvSpPr/>
-          <p:nvPr/>
-        </p:nvSpPr>
-        <p:spPr>
-          <a:xfrm>
-            <a:off x="4343251" y="6674048"/>
-            <a:ext cx="9889543" cy="479971"/>
-          </a:xfrm>
-          <a:prstGeom prst="rect">
-            <a:avLst/>
-          </a:prstGeom>
-          <a:noFill/>
-          <a:ln/>
-        </p:spPr>
-        <p:txBody>
-          <a:bodyPr wrap="square" lIns="25400" tIns="25400" rIns="25400" bIns="25400" rtlCol="0" anchor="t">
-            <a:normAutofit fontScale="55000" lnSpcReduction="20000"/>
-          </a:bodyPr>
-          <a:lstStyle/>
+                <a:latin typeface="JetBrains Mono" pitchFamily="34" charset="0"/>
+                <a:ea typeface="JetBrains Mono" pitchFamily="34" charset="-122"/>
+                <a:cs typeface="JetBrains Mono" pitchFamily="34" charset="-120"/>
+              </a:rPr>
+              <a:t>## Goal</a:t>
+            </a:r>
+          </a:p>
           <a:p>
             <a:pPr marL="0" indent="0" algn="l">
               <a:lnSpc>
-                <a:spcPct val="145000"/>
+                <a:spcPct val="170000"/>
               </a:lnSpc>
               <a:buNone/>
             </a:pPr>
             <a:r>
-              <a:rPr lang="en-US" sz="2400" dirty="0">
-                <a:solidFill>
-                  <a:srgbClr val="C9CBD1"/>
-                </a:solidFill>
-                <a:latin typeface="Inter" pitchFamily="34" charset="0"/>
-                <a:ea typeface="Inter" pitchFamily="34" charset="-122"/>
-                <a:cs typeface="Inter" pitchFamily="34" charset="-120"/>
-              </a:rPr>
-              <a:t>Replace this slide with a screenshot of what the vibe-coded prompt actually produced. Insurance for the live demo.</a:t>
-            </a:r>
-            <a:endParaRPr lang="en-US" sz="2400" dirty="0"/>
+              <a:rPr lang="en-US" sz="1800" dirty="0">
+                <a:solidFill>
+                  <a:srgbClr val="FFFFFF"/>
+                </a:solidFill>
+                <a:latin typeface="JetBrains Mono" pitchFamily="34" charset="0"/>
+                <a:ea typeface="JetBrains Mono" pitchFamily="34" charset="-122"/>
+                <a:cs typeface="JetBrains Mono" pitchFamily="34" charset="-120"/>
+              </a:rPr>
+              <a:t>Returning members sign in with email + password.</a:t>
+            </a:r>
+          </a:p>
+          <a:p>
+            <a:pPr marL="0" indent="0" algn="l">
+              <a:lnSpc>
+                <a:spcPct val="170000"/>
+              </a:lnSpc>
+              <a:buNone/>
+            </a:pPr>
+            <a:endParaRPr lang="en-US" sz="1800" dirty="0">
+              <a:solidFill>
+                <a:srgbClr val="FFFFFF"/>
+              </a:solidFill>
+              <a:latin typeface="JetBrains Mono" pitchFamily="34" charset="0"/>
+              <a:ea typeface="JetBrains Mono" pitchFamily="34" charset="-122"/>
+              <a:cs typeface="JetBrains Mono" pitchFamily="34" charset="-120"/>
+            </a:endParaRPr>
+          </a:p>
+          <a:p>
+            <a:pPr marL="0" indent="0" algn="l">
+              <a:lnSpc>
+                <a:spcPct val="170000"/>
+              </a:lnSpc>
+              <a:buNone/>
+            </a:pPr>
+            <a:r>
+              <a:rPr lang="en-US" sz="1800" dirty="0">
+                <a:solidFill>
+                  <a:srgbClr val="FFFFFF"/>
+                </a:solidFill>
+                <a:latin typeface="JetBrains Mono" pitchFamily="34" charset="0"/>
+                <a:ea typeface="JetBrains Mono" pitchFamily="34" charset="-122"/>
+                <a:cs typeface="JetBrains Mono" pitchFamily="34" charset="-120"/>
+              </a:rPr>
+              <a:t>## Fields</a:t>
+            </a:r>
+          </a:p>
+          <a:p>
+            <a:pPr marL="0" indent="0" algn="l">
+              <a:lnSpc>
+                <a:spcPct val="170000"/>
+              </a:lnSpc>
+              <a:buNone/>
+            </a:pPr>
+            <a:r>
+              <a:rPr lang="en-US" sz="1800" dirty="0">
+                <a:solidFill>
+                  <a:srgbClr val="FFFFFF"/>
+                </a:solidFill>
+                <a:latin typeface="JetBrains Mono" pitchFamily="34" charset="0"/>
+                <a:ea typeface="JetBrains Mono" pitchFamily="34" charset="-122"/>
+                <a:cs typeface="JetBrains Mono" pitchFamily="34" charset="-120"/>
+              </a:rPr>
+              <a:t>- email (required, valid format)</a:t>
+            </a:r>
+          </a:p>
+          <a:p>
+            <a:pPr marL="0" indent="0" algn="l">
+              <a:lnSpc>
+                <a:spcPct val="170000"/>
+              </a:lnSpc>
+              <a:buNone/>
+            </a:pPr>
+            <a:r>
+              <a:rPr lang="en-US" sz="1800" dirty="0">
+                <a:solidFill>
+                  <a:srgbClr val="FFFFFF"/>
+                </a:solidFill>
+                <a:latin typeface="JetBrains Mono" pitchFamily="34" charset="0"/>
+                <a:ea typeface="JetBrains Mono" pitchFamily="34" charset="-122"/>
+                <a:cs typeface="JetBrains Mono" pitchFamily="34" charset="-120"/>
+              </a:rPr>
+              <a:t>- password (required, ≥ 8 chars)</a:t>
+            </a:r>
+          </a:p>
+          <a:p>
+            <a:pPr marL="0" indent="0" algn="l">
+              <a:lnSpc>
+                <a:spcPct val="170000"/>
+              </a:lnSpc>
+              <a:buNone/>
+            </a:pPr>
+            <a:endParaRPr lang="en-US" sz="1800" dirty="0">
+              <a:solidFill>
+                <a:srgbClr val="FFFFFF"/>
+              </a:solidFill>
+              <a:latin typeface="JetBrains Mono" pitchFamily="34" charset="0"/>
+              <a:ea typeface="JetBrains Mono" pitchFamily="34" charset="-122"/>
+              <a:cs typeface="JetBrains Mono" pitchFamily="34" charset="-120"/>
+            </a:endParaRPr>
+          </a:p>
+          <a:p>
+            <a:pPr marL="0" indent="0" algn="l">
+              <a:lnSpc>
+                <a:spcPct val="170000"/>
+              </a:lnSpc>
+              <a:buNone/>
+            </a:pPr>
+            <a:r>
+              <a:rPr lang="en-US" sz="1800" dirty="0">
+                <a:solidFill>
+                  <a:srgbClr val="FFFFFF"/>
+                </a:solidFill>
+                <a:latin typeface="JetBrains Mono" pitchFamily="34" charset="0"/>
+                <a:ea typeface="JetBrains Mono" pitchFamily="34" charset="-122"/>
+                <a:cs typeface="JetBrains Mono" pitchFamily="34" charset="-120"/>
+              </a:rPr>
+              <a:t>## Behavior</a:t>
+            </a:r>
+          </a:p>
+          <a:p>
+            <a:pPr marL="0" indent="0" algn="l">
+              <a:lnSpc>
+                <a:spcPct val="170000"/>
+              </a:lnSpc>
+              <a:buNone/>
+            </a:pPr>
+            <a:r>
+              <a:rPr lang="en-US" sz="1800" dirty="0">
+                <a:solidFill>
+                  <a:srgbClr val="FFFFFF"/>
+                </a:solidFill>
+                <a:latin typeface="JetBrains Mono" pitchFamily="34" charset="0"/>
+                <a:ea typeface="JetBrains Mono" pitchFamily="34" charset="-122"/>
+                <a:cs typeface="JetBrains Mono" pitchFamily="34" charset="-120"/>
+              </a:rPr>
+              <a:t>- On submit: POST to /api/auth/signin</a:t>
+            </a:r>
+          </a:p>
+          <a:p>
+            <a:pPr marL="0" indent="0" algn="l">
+              <a:lnSpc>
+                <a:spcPct val="170000"/>
+              </a:lnSpc>
+              <a:buNone/>
+            </a:pPr>
+            <a:r>
+              <a:rPr lang="en-US" sz="1800" dirty="0">
+                <a:solidFill>
+                  <a:srgbClr val="FFFFFF"/>
+                </a:solidFill>
+                <a:latin typeface="JetBrains Mono" pitchFamily="34" charset="0"/>
+                <a:ea typeface="JetBrains Mono" pitchFamily="34" charset="-122"/>
+                <a:cs typeface="JetBrains Mono" pitchFamily="34" charset="-120"/>
+              </a:rPr>
+              <a:t>- On success: redirect to /dashboard</a:t>
+            </a:r>
+          </a:p>
+          <a:p>
+            <a:pPr marL="0" indent="0" algn="l">
+              <a:lnSpc>
+                <a:spcPct val="170000"/>
+              </a:lnSpc>
+              <a:buNone/>
+            </a:pPr>
+            <a:r>
+              <a:rPr lang="en-US" sz="1800" dirty="0">
+                <a:solidFill>
+                  <a:srgbClr val="FFFFFF"/>
+                </a:solidFill>
+                <a:latin typeface="JetBrains Mono" pitchFamily="34" charset="0"/>
+                <a:ea typeface="JetBrains Mono" pitchFamily="34" charset="-122"/>
+                <a:cs typeface="JetBrains Mono" pitchFamily="34" charset="-120"/>
+              </a:rPr>
+              <a:t>- On failure: inline error, do not clear email</a:t>
+            </a:r>
+          </a:p>
+          <a:p>
+            <a:pPr marL="0" indent="0" algn="l">
+              <a:lnSpc>
+                <a:spcPct val="170000"/>
+              </a:lnSpc>
+              <a:buNone/>
+            </a:pPr>
+            <a:endParaRPr lang="en-US" sz="1800" dirty="0">
+              <a:solidFill>
+                <a:srgbClr val="FFFFFF"/>
+              </a:solidFill>
+              <a:latin typeface="JetBrains Mono" pitchFamily="34" charset="0"/>
+              <a:ea typeface="JetBrains Mono" pitchFamily="34" charset="-122"/>
+              <a:cs typeface="JetBrains Mono" pitchFamily="34" charset="-120"/>
+            </a:endParaRPr>
+          </a:p>
+          <a:p>
+            <a:pPr marL="0" indent="0" algn="l">
+              <a:lnSpc>
+                <a:spcPct val="170000"/>
+              </a:lnSpc>
+              <a:buNone/>
+            </a:pPr>
+            <a:r>
+              <a:rPr lang="en-US" sz="1800" dirty="0">
+                <a:solidFill>
+                  <a:srgbClr val="FFFFFF"/>
+                </a:solidFill>
+                <a:latin typeface="JetBrains Mono" pitchFamily="34" charset="0"/>
+                <a:ea typeface="JetBrains Mono" pitchFamily="34" charset="-122"/>
+                <a:cs typeface="JetBrains Mono" pitchFamily="34" charset="-120"/>
+              </a:rPr>
+              <a:t>## Out of scope</a:t>
+            </a:r>
+          </a:p>
+          <a:p>
+            <a:pPr marL="0" indent="0" algn="l">
+              <a:lnSpc>
+                <a:spcPct val="170000"/>
+              </a:lnSpc>
+              <a:buNone/>
+            </a:pPr>
+            <a:r>
+              <a:rPr lang="en-US" sz="1800" dirty="0">
+                <a:solidFill>
+                  <a:srgbClr val="FFFFFF"/>
+                </a:solidFill>
+                <a:latin typeface="JetBrains Mono" pitchFamily="34" charset="0"/>
+                <a:ea typeface="JetBrains Mono" pitchFamily="34" charset="-122"/>
+                <a:cs typeface="JetBrains Mono" pitchFamily="34" charset="-120"/>
+              </a:rPr>
+              <a:t>- Password reset, OAuth, MFA</a:t>
+            </a:r>
+            <a:endParaRPr lang="en-US" sz="1800" dirty="0"/>
           </a:p>
         </p:txBody>
       </p:sp>
@@ -11298,7 +12023,7 @@
               <a:buNone/>
             </a:pPr>
             <a:r>
-              <a:rPr lang="en-US" sz="2100" kern="0" spc="840" dirty="0">
+              <a:rPr lang="en-US" sz="2100" spc="840" dirty="0">
                 <a:solidFill>
                   <a:srgbClr val="3FE0D0"/>
                 </a:solidFill>
@@ -11306,7 +12031,7 @@
                 <a:ea typeface="JetBrains Mono" pitchFamily="34" charset="-122"/>
                 <a:cs typeface="JetBrains Mono" pitchFamily="34" charset="-120"/>
               </a:rPr>
-              <a:t>BACKUP · TAKE 2 RESULT</a:t>
+              <a:t>LESSON</a:t>
             </a:r>
             <a:endParaRPr lang="en-US" sz="2100" dirty="0"/>
           </a:p>
@@ -11321,7 +12046,7 @@
         <p:spPr>
           <a:xfrm>
             <a:off x="4343251" y="3904357"/>
-            <a:ext cx="9889543" cy="2426791"/>
+            <a:ext cx="12303236" cy="4468462"/>
           </a:xfrm>
           <a:prstGeom prst="rect">
             <a:avLst/>
@@ -11331,7 +12056,7 @@
         </p:spPr>
         <p:txBody>
           <a:bodyPr wrap="square" lIns="25400" tIns="25400" rIns="25400" bIns="25400" rtlCol="0" anchor="t">
-            <a:normAutofit fontScale="62500" lnSpcReduction="20000"/>
+            <a:normAutofit fontScale="85000" lnSpcReduction="10000"/>
           </a:bodyPr>
           <a:lstStyle/>
           <a:p>
@@ -11342,7 +12067,7 @@
               <a:buNone/>
             </a:pPr>
             <a:r>
-              <a:rPr lang="en-US" sz="9900" b="1" kern="0" spc="-247" dirty="0">
+              <a:rPr lang="en-US" sz="9900" b="1" spc="-247" dirty="0">
                 <a:solidFill>
                   <a:srgbClr val="FFFFFF"/>
                 </a:solidFill>
@@ -11350,18 +12075,10 @@
                 <a:ea typeface="Montserrat" pitchFamily="34" charset="-122"/>
                 <a:cs typeface="Montserrat" pitchFamily="34" charset="-120"/>
               </a:rPr>
-              <a:t>(Screenshot of</a:t>
-            </a:r>
-          </a:p>
-          <a:p>
-            <a:pPr marL="0" indent="0" algn="l">
-              <a:lnSpc>
-                <a:spcPct val="95000"/>
-              </a:lnSpc>
-              <a:buNone/>
-            </a:pPr>
-            <a:r>
-              <a:rPr lang="en-US" sz="9900" b="1" kern="0" spc="-247" dirty="0">
+              <a:t>If you can’t </a:t>
+            </a:r>
+            <a:br>
+              <a:rPr lang="en-US" sz="9900" b="1" spc="-247" dirty="0">
                 <a:solidFill>
                   <a:srgbClr val="FFFFFF"/>
                 </a:solidFill>
@@ -11369,53 +12086,47 @@
                 <a:ea typeface="Montserrat" pitchFamily="34" charset="-122"/>
                 <a:cs typeface="Montserrat" pitchFamily="34" charset="-120"/>
               </a:rPr>
-              <a:t>context-engineered output)</a:t>
-            </a:r>
-            <a:endParaRPr lang="en-US" sz="9900" dirty="0"/>
-          </a:p>
-        </p:txBody>
-      </p:sp>
-      <p:sp>
-        <p:nvSpPr>
-          <p:cNvPr id="5" name="Text 3"/>
-          <p:cNvSpPr/>
-          <p:nvPr/>
-        </p:nvSpPr>
-        <p:spPr>
-          <a:xfrm>
-            <a:off x="4343251" y="6674048"/>
-            <a:ext cx="9889543" cy="479971"/>
-          </a:xfrm>
-          <a:prstGeom prst="rect">
-            <a:avLst/>
-          </a:prstGeom>
-          <a:noFill/>
-          <a:ln/>
-        </p:spPr>
-        <p:txBody>
-          <a:bodyPr wrap="square" lIns="25400" tIns="25400" rIns="25400" bIns="25400" rtlCol="0" anchor="t">
-            <a:normAutofit fontScale="47500" lnSpcReduction="20000"/>
-          </a:bodyPr>
-          <a:lstStyle/>
-          <a:p>
-            <a:pPr marL="0" indent="0" algn="l">
-              <a:lnSpc>
-                <a:spcPct val="145000"/>
-              </a:lnSpc>
-              <a:buNone/>
-            </a:pPr>
-            <a:r>
-              <a:rPr lang="en-US" sz="2400" dirty="0">
-                <a:solidFill>
-                  <a:srgbClr val="C9CBD1"/>
-                </a:solidFill>
-                <a:latin typeface="Inter" pitchFamily="34" charset="0"/>
-                <a:ea typeface="Inter" pitchFamily="34" charset="-122"/>
-                <a:cs typeface="Inter" pitchFamily="34" charset="-120"/>
-              </a:rPr>
-              <a:t>Replace this slide with a screenshot of the context-engineered output. Side-by-side with the previous slide makes the difference unmissable.</a:t>
-            </a:r>
-            <a:endParaRPr lang="en-US" sz="2400" dirty="0"/>
+            </a:br>
+            <a:r>
+              <a:rPr lang="en-US" sz="9900" b="1" spc="-247" dirty="0">
+                <a:solidFill>
+                  <a:srgbClr val="FFFFFF"/>
+                </a:solidFill>
+                <a:latin typeface="Montserrat" pitchFamily="34" charset="0"/>
+                <a:ea typeface="Montserrat" pitchFamily="34" charset="-122"/>
+                <a:cs typeface="Montserrat" pitchFamily="34" charset="-120"/>
+              </a:rPr>
+              <a:t>understand what to do </a:t>
+            </a:r>
+            <a:br>
+              <a:rPr lang="en-US" sz="9900" b="1" spc="-247" dirty="0">
+                <a:solidFill>
+                  <a:srgbClr val="FFFFFF"/>
+                </a:solidFill>
+                <a:latin typeface="Montserrat" pitchFamily="34" charset="0"/>
+                <a:ea typeface="Montserrat" pitchFamily="34" charset="-122"/>
+                <a:cs typeface="Montserrat" pitchFamily="34" charset="-120"/>
+              </a:rPr>
+            </a:br>
+            <a:r>
+              <a:rPr lang="en-US" sz="9900" b="1" spc="-247" dirty="0">
+                <a:solidFill>
+                  <a:srgbClr val="FFFFFF"/>
+                </a:solidFill>
+                <a:latin typeface="Montserrat" pitchFamily="34" charset="0"/>
+                <a:ea typeface="Montserrat" pitchFamily="34" charset="-122"/>
+                <a:cs typeface="Montserrat" pitchFamily="34" charset="-120"/>
+              </a:rPr>
+              <a:t>– neither can the LLM</a:t>
+            </a:r>
+            <a:endParaRPr lang="en-US" sz="9900" b="1" kern="0" spc="-247" dirty="0">
+              <a:solidFill>
+                <a:srgbClr val="FFFFFF"/>
+              </a:solidFill>
+              <a:latin typeface="Montserrat" pitchFamily="34" charset="0"/>
+              <a:ea typeface="Montserrat" pitchFamily="34" charset="-122"/>
+              <a:cs typeface="Montserrat" pitchFamily="34" charset="-120"/>
+            </a:endParaRPr>
           </a:p>
         </p:txBody>
       </p:sp>
@@ -12638,7 +13349,7 @@
         </p:spPr>
         <p:txBody>
           <a:bodyPr wrap="square" lIns="25400" tIns="25400" rIns="25400" bIns="25400" rtlCol="0" anchor="t">
-            <a:normAutofit fontScale="77500" lnSpcReduction="20000"/>
+            <a:normAutofit fontScale="92500" lnSpcReduction="10000"/>
           </a:bodyPr>
           <a:lstStyle/>
           <a:p>
@@ -12801,7 +13512,7 @@
         </p:spPr>
         <p:txBody>
           <a:bodyPr wrap="square" lIns="25400" tIns="25400" rIns="25400" bIns="25400" rtlCol="0" anchor="t">
-            <a:normAutofit fontScale="92500" lnSpcReduction="20000"/>
+            <a:normAutofit/>
           </a:bodyPr>
           <a:lstStyle/>
           <a:p>
@@ -12872,7 +13583,7 @@
         </p:spPr>
         <p:txBody>
           <a:bodyPr wrap="square" lIns="25400" tIns="25400" rIns="25400" bIns="25400" rtlCol="0" anchor="t">
-            <a:normAutofit fontScale="92500" lnSpcReduction="20000"/>
+            <a:normAutofit/>
           </a:bodyPr>
           <a:lstStyle/>
           <a:p>
@@ -13035,7 +13746,7 @@
         </p:spPr>
         <p:txBody>
           <a:bodyPr wrap="square" lIns="25400" tIns="25400" rIns="25400" bIns="25400" rtlCol="0" anchor="t">
-            <a:normAutofit fontScale="92500" lnSpcReduction="20000"/>
+            <a:normAutofit/>
           </a:bodyPr>
           <a:lstStyle/>
           <a:p>
@@ -13106,7 +13817,7 @@
         </p:spPr>
         <p:txBody>
           <a:bodyPr wrap="square" lIns="25400" tIns="25400" rIns="25400" bIns="25400" rtlCol="0" anchor="t">
-            <a:normAutofit fontScale="92500" lnSpcReduction="20000"/>
+            <a:normAutofit/>
           </a:bodyPr>
           <a:lstStyle/>
           <a:p>
@@ -13340,7 +14051,7 @@
         </p:spPr>
         <p:txBody>
           <a:bodyPr wrap="square" lIns="25400" tIns="25400" rIns="25400" bIns="25400" rtlCol="0" anchor="t">
-            <a:normAutofit fontScale="92500" lnSpcReduction="20000"/>
+            <a:normAutofit/>
           </a:bodyPr>
           <a:lstStyle/>
           <a:p>
@@ -15364,7 +16075,7 @@
         </p:spPr>
         <p:txBody>
           <a:bodyPr wrap="square" lIns="25400" tIns="25400" rIns="25400" bIns="25400" rtlCol="0" anchor="t">
-            <a:normAutofit fontScale="77500" lnSpcReduction="20000"/>
+            <a:normAutofit fontScale="47500" lnSpcReduction="20000"/>
           </a:bodyPr>
           <a:lstStyle/>
           <a:p>
@@ -15442,7 +16153,7 @@
         </p:spPr>
         <p:txBody>
           <a:bodyPr wrap="square" lIns="25400" tIns="25400" rIns="25400" bIns="25400" rtlCol="0" anchor="t">
-            <a:normAutofit/>
+            <a:normAutofit fontScale="77500" lnSpcReduction="20000"/>
           </a:bodyPr>
           <a:lstStyle/>
           <a:p>
@@ -15598,7 +16309,7 @@
         </p:spPr>
         <p:txBody>
           <a:bodyPr wrap="square" lIns="25400" tIns="25400" rIns="25400" bIns="25400" rtlCol="0" anchor="t">
-            <a:normAutofit fontScale="92500" lnSpcReduction="20000"/>
+            <a:normAutofit/>
           </a:bodyPr>
           <a:lstStyle/>
           <a:p>
@@ -15676,7 +16387,7 @@
         </p:spPr>
         <p:txBody>
           <a:bodyPr wrap="square" lIns="25400" tIns="25400" rIns="25400" bIns="25400" rtlCol="0" anchor="t">
-            <a:normAutofit/>
+            <a:normAutofit fontScale="77500" lnSpcReduction="20000"/>
           </a:bodyPr>
           <a:lstStyle/>
           <a:p>
@@ -15832,7 +16543,7 @@
         </p:spPr>
         <p:txBody>
           <a:bodyPr wrap="square" lIns="25400" tIns="25400" rIns="25400" bIns="25400" rtlCol="0" anchor="t">
-            <a:normAutofit fontScale="92500" lnSpcReduction="20000"/>
+            <a:normAutofit/>
           </a:bodyPr>
           <a:lstStyle/>
           <a:p>
@@ -16066,7 +16777,7 @@
         </p:spPr>
         <p:txBody>
           <a:bodyPr wrap="square" lIns="25400" tIns="25400" rIns="25400" bIns="25400" rtlCol="0" anchor="t">
-            <a:normAutofit fontScale="92500" lnSpcReduction="20000"/>
+            <a:normAutofit/>
           </a:bodyPr>
           <a:lstStyle/>
           <a:p>
@@ -16144,7 +16855,7 @@
         </p:spPr>
         <p:txBody>
           <a:bodyPr wrap="square" lIns="25400" tIns="25400" rIns="25400" bIns="25400" rtlCol="0" anchor="t">
-            <a:normAutofit/>
+            <a:normAutofit fontScale="62500" lnSpcReduction="20000"/>
           </a:bodyPr>
           <a:lstStyle/>
           <a:p>
@@ -16300,7 +17011,7 @@
         </p:spPr>
         <p:txBody>
           <a:bodyPr wrap="square" lIns="25400" tIns="25400" rIns="25400" bIns="25400" rtlCol="0" anchor="t">
-            <a:normAutofit fontScale="92500" lnSpcReduction="20000"/>
+            <a:normAutofit/>
           </a:bodyPr>
           <a:lstStyle/>
           <a:p>
@@ -16437,7 +17148,7 @@
         </p:spPr>
         <p:txBody>
           <a:bodyPr wrap="square" lIns="25400" tIns="25400" rIns="25400" bIns="25400" rtlCol="0" anchor="t">
-            <a:normAutofit fontScale="92500" lnSpcReduction="20000"/>
+            <a:normAutofit/>
           </a:bodyPr>
           <a:lstStyle/>
           <a:p>
@@ -16481,7 +17192,7 @@
         </p:spPr>
         <p:txBody>
           <a:bodyPr wrap="square" lIns="25400" tIns="25400" rIns="25400" bIns="25400" rtlCol="0" anchor="t">
-            <a:normAutofit fontScale="92500" lnSpcReduction="10000"/>
+            <a:normAutofit fontScale="77500" lnSpcReduction="20000"/>
           </a:bodyPr>
           <a:lstStyle/>
           <a:p>
@@ -16600,7 +17311,7 @@
         </p:spPr>
         <p:txBody>
           <a:bodyPr wrap="square" lIns="25400" tIns="25400" rIns="25400" bIns="25400" rtlCol="0" anchor="t">
-            <a:normAutofit fontScale="92500" lnSpcReduction="20000"/>
+            <a:normAutofit/>
           </a:bodyPr>
           <a:lstStyle/>
           <a:p>
@@ -16644,7 +17355,7 @@
         </p:spPr>
         <p:txBody>
           <a:bodyPr wrap="square" lIns="25400" tIns="25400" rIns="25400" bIns="25400" rtlCol="0" anchor="t">
-            <a:normAutofit fontScale="92500" lnSpcReduction="20000"/>
+            <a:normAutofit/>
           </a:bodyPr>
           <a:lstStyle/>
           <a:p>
@@ -16715,7 +17426,7 @@
         </p:spPr>
         <p:txBody>
           <a:bodyPr wrap="square" lIns="25400" tIns="25400" rIns="25400" bIns="25400" rtlCol="0" anchor="t">
-            <a:normAutofit fontScale="92500" lnSpcReduction="20000"/>
+            <a:normAutofit/>
           </a:bodyPr>
           <a:lstStyle/>
           <a:p>
@@ -16834,7 +17545,7 @@
         </p:spPr>
         <p:txBody>
           <a:bodyPr wrap="square" lIns="25400" tIns="25400" rIns="25400" bIns="25400" rtlCol="0" anchor="t">
-            <a:normAutofit fontScale="92500" lnSpcReduction="20000"/>
+            <a:normAutofit/>
           </a:bodyPr>
           <a:lstStyle/>
           <a:p>
@@ -16878,7 +17589,7 @@
         </p:spPr>
         <p:txBody>
           <a:bodyPr wrap="square" lIns="25400" tIns="25400" rIns="25400" bIns="25400" rtlCol="0" anchor="t">
-            <a:normAutofit fontScale="92500" lnSpcReduction="20000"/>
+            <a:normAutofit/>
           </a:bodyPr>
           <a:lstStyle/>
           <a:p>
@@ -16949,7 +17660,7 @@
         </p:spPr>
         <p:txBody>
           <a:bodyPr wrap="square" lIns="25400" tIns="25400" rIns="25400" bIns="25400" rtlCol="0" anchor="t">
-            <a:normAutofit fontScale="92500" lnSpcReduction="20000"/>
+            <a:normAutofit/>
           </a:bodyPr>
           <a:lstStyle/>
           <a:p>
@@ -17102,7 +17813,7 @@
                 <a:ea typeface="JetBrains Mono" pitchFamily="34" charset="-122"/>
                 <a:cs typeface="JetBrains Mono" pitchFamily="34" charset="-120"/>
               </a:rPr>
-              <a:t>UP NEXT · PART 03 / 06</a:t>
+              <a:t>BIG PICTURE</a:t>
             </a:r>
             <a:endParaRPr lang="en-US" sz="2100" dirty="0"/>
           </a:p>
@@ -17127,7 +17838,7 @@
         </p:spPr>
         <p:txBody>
           <a:bodyPr wrap="square" lIns="25400" tIns="25400" rIns="25400" bIns="25400" rtlCol="0" anchor="t">
-            <a:normAutofit fontScale="92500" lnSpcReduction="20000"/>
+            <a:normAutofit/>
           </a:bodyPr>
           <a:lstStyle/>
           <a:p>
@@ -17138,7 +17849,7 @@
               <a:buNone/>
             </a:pPr>
             <a:r>
-              <a:rPr lang="en-US" sz="9900" b="1" kern="0" spc="-247" dirty="0">
+              <a:rPr lang="en-US" sz="9900" b="1" spc="-247" dirty="0">
                 <a:solidFill>
                   <a:srgbClr val="FFFFFF"/>
                 </a:solidFill>
@@ -17146,7 +17857,7 @@
                 <a:ea typeface="Montserrat" pitchFamily="34" charset="-122"/>
                 <a:cs typeface="Montserrat" pitchFamily="34" charset="-120"/>
               </a:rPr>
-              <a:t>SDLC</a:t>
+              <a:t>What &gt; How</a:t>
             </a:r>
           </a:p>
           <a:p>
@@ -17156,18 +17867,14 @@
               </a:lnSpc>
               <a:buNone/>
             </a:pPr>
-            <a:r>
-              <a:rPr lang="en-US" sz="9900" b="1" kern="0" spc="-247" dirty="0">
-                <a:solidFill>
-                  <a:srgbClr val="FFFFFF"/>
-                </a:solidFill>
-                <a:latin typeface="Montserrat" pitchFamily="34" charset="0"/>
-                <a:ea typeface="Montserrat" pitchFamily="34" charset="-122"/>
-                <a:cs typeface="Montserrat" pitchFamily="34" charset="-120"/>
-              </a:rPr>
-              <a:t>Crash Course.</a:t>
-            </a:r>
-            <a:endParaRPr lang="en-US" sz="9900" dirty="0"/>
+            <a:endParaRPr lang="en-US" sz="9900" b="1" kern="0" spc="-247" dirty="0">
+              <a:solidFill>
+                <a:srgbClr val="FFFFFF"/>
+              </a:solidFill>
+              <a:latin typeface="Montserrat" pitchFamily="34" charset="0"/>
+              <a:ea typeface="Montserrat" pitchFamily="34" charset="-122"/>
+              <a:cs typeface="Montserrat" pitchFamily="34" charset="-120"/>
+            </a:endParaRPr>
           </a:p>
         </p:txBody>
       </p:sp>
@@ -17190,7 +17897,7 @@
         </p:spPr>
         <p:txBody>
           <a:bodyPr wrap="square" lIns="25400" tIns="25400" rIns="25400" bIns="25400" rtlCol="0" anchor="t">
-            <a:normAutofit fontScale="92500" lnSpcReduction="10000"/>
+            <a:noAutofit/>
           </a:bodyPr>
           <a:lstStyle/>
           <a:p>
@@ -17201,7 +17908,7 @@
               <a:buNone/>
             </a:pPr>
             <a:r>
-              <a:rPr lang="en-US" sz="2400" dirty="0">
+              <a:rPr lang="en-US" dirty="0">
                 <a:solidFill>
                   <a:srgbClr val="C9CBD1"/>
                 </a:solidFill>
@@ -17209,9 +17916,26 @@
                 <a:ea typeface="Inter" pitchFamily="34" charset="-122"/>
                 <a:cs typeface="Inter" pitchFamily="34" charset="-120"/>
               </a:rPr>
-              <a:t>We named the difference. Now we put it in a process you can ship from.</a:t>
-            </a:r>
-            <a:endParaRPr lang="en-US" sz="2400" dirty="0"/>
+              <a:t>This has always been true, but context engineering opens the door for those who know what to actually</a:t>
+            </a:r>
+          </a:p>
+          <a:p>
+            <a:pPr marL="0" indent="0" algn="l">
+              <a:lnSpc>
+                <a:spcPct val="145000"/>
+              </a:lnSpc>
+              <a:buNone/>
+            </a:pPr>
+            <a:r>
+              <a:rPr lang="en-US" dirty="0">
+                <a:solidFill>
+                  <a:srgbClr val="C9CBD1"/>
+                </a:solidFill>
+                <a:latin typeface="Inter" pitchFamily="34" charset="0"/>
+              </a:rPr>
+              <a:t>achieve the how, but there is no free lunch!</a:t>
+            </a:r>
+            <a:endParaRPr lang="en-US" dirty="0"/>
           </a:p>
         </p:txBody>
       </p:sp>
@@ -17479,6 +18203,206 @@
           </a:ln>
         </p:spPr>
       </p:pic>
+    </p:spTree>
+  </p:cSld>
+  <p:clrMapOvr>
+    <a:masterClrMapping/>
+  </p:clrMapOvr>
+</p:sld>
+</file>
+
+<file path=ppt/slides/slide30.xml><?xml version="1.0" encoding="utf-8"?>
+<p:sld xmlns:a="http://schemas.openxmlformats.org/drawingml/2006/main" xmlns:r="http://schemas.openxmlformats.org/officeDocument/2006/relationships" xmlns:p="http://schemas.openxmlformats.org/presentationml/2006/main">
+  <p:cSld>
+    <p:spTree>
+      <p:nvGrpSpPr>
+        <p:cNvPr id="1" name=""/>
+        <p:cNvGrpSpPr/>
+        <p:nvPr/>
+      </p:nvGrpSpPr>
+      <p:grpSpPr>
+        <a:xfrm>
+          <a:off x="0" y="0"/>
+          <a:ext cx="0" cy="0"/>
+          <a:chOff x="0" y="0"/>
+          <a:chExt cx="0" cy="0"/>
+        </a:xfrm>
+      </p:grpSpPr>
+      <p:sp>
+        <p:nvSpPr>
+          <p:cNvPr id="2" name="Shape 0"/>
+          <p:cNvSpPr/>
+          <p:nvPr/>
+        </p:nvSpPr>
+        <p:spPr>
+          <a:xfrm>
+            <a:off x="0" y="0"/>
+            <a:ext cx="18288000" cy="10287000"/>
+          </a:xfrm>
+          <a:prstGeom prst="rect">
+            <a:avLst/>
+          </a:prstGeom>
+          <a:solidFill>
+            <a:srgbClr val="1B1D24"/>
+          </a:solidFill>
+          <a:ln/>
+        </p:spPr>
+        <p:txBody>
+          <a:bodyPr/>
+          <a:lstStyle/>
+          <a:p>
+            <a:endParaRPr lang="en-US"/>
+          </a:p>
+        </p:txBody>
+      </p:sp>
+      <p:sp>
+        <p:nvSpPr>
+          <p:cNvPr id="3" name="Text 1"/>
+          <p:cNvSpPr/>
+          <p:nvPr/>
+        </p:nvSpPr>
+        <p:spPr>
+          <a:xfrm>
+            <a:off x="4343251" y="3170932"/>
+            <a:ext cx="9889543" cy="390525"/>
+          </a:xfrm>
+          <a:prstGeom prst="rect">
+            <a:avLst/>
+          </a:prstGeom>
+          <a:noFill/>
+          <a:ln/>
+        </p:spPr>
+        <p:txBody>
+          <a:bodyPr wrap="square" lIns="25400" tIns="25400" rIns="25400" bIns="25400" rtlCol="0" anchor="t">
+            <a:normAutofit/>
+          </a:bodyPr>
+          <a:lstStyle/>
+          <a:p>
+            <a:pPr marL="0" indent="0" algn="l">
+              <a:buNone/>
+            </a:pPr>
+            <a:r>
+              <a:rPr lang="en-US" sz="2100" kern="0" spc="840" dirty="0">
+                <a:solidFill>
+                  <a:srgbClr val="3FE0D0"/>
+                </a:solidFill>
+                <a:latin typeface="JetBrains Mono" pitchFamily="34" charset="0"/>
+                <a:ea typeface="JetBrains Mono" pitchFamily="34" charset="-122"/>
+                <a:cs typeface="JetBrains Mono" pitchFamily="34" charset="-120"/>
+              </a:rPr>
+              <a:t>UP NEXT · PART 03 / 06</a:t>
+            </a:r>
+            <a:endParaRPr lang="en-US" sz="2100" dirty="0"/>
+          </a:p>
+        </p:txBody>
+      </p:sp>
+      <p:sp>
+        <p:nvSpPr>
+          <p:cNvPr id="4" name="Text 2"/>
+          <p:cNvSpPr/>
+          <p:nvPr/>
+        </p:nvSpPr>
+        <p:spPr>
+          <a:xfrm>
+            <a:off x="4343251" y="3904357"/>
+            <a:ext cx="9889543" cy="2426791"/>
+          </a:xfrm>
+          <a:prstGeom prst="rect">
+            <a:avLst/>
+          </a:prstGeom>
+          <a:noFill/>
+          <a:ln/>
+        </p:spPr>
+        <p:txBody>
+          <a:bodyPr wrap="square" lIns="25400" tIns="25400" rIns="25400" bIns="25400" rtlCol="0" anchor="t">
+            <a:normAutofit fontScale="92500" lnSpcReduction="20000"/>
+          </a:bodyPr>
+          <a:lstStyle/>
+          <a:p>
+            <a:pPr marL="0" indent="0" algn="l">
+              <a:lnSpc>
+                <a:spcPct val="95000"/>
+              </a:lnSpc>
+              <a:buNone/>
+            </a:pPr>
+            <a:r>
+              <a:rPr lang="en-US" sz="9900" b="1" kern="0" spc="-247" dirty="0">
+                <a:solidFill>
+                  <a:srgbClr val="FFFFFF"/>
+                </a:solidFill>
+                <a:latin typeface="Montserrat" pitchFamily="34" charset="0"/>
+                <a:ea typeface="Montserrat" pitchFamily="34" charset="-122"/>
+                <a:cs typeface="Montserrat" pitchFamily="34" charset="-120"/>
+              </a:rPr>
+              <a:t>SDLC</a:t>
+            </a:r>
+          </a:p>
+          <a:p>
+            <a:pPr marL="0" indent="0" algn="l">
+              <a:lnSpc>
+                <a:spcPct val="95000"/>
+              </a:lnSpc>
+              <a:buNone/>
+            </a:pPr>
+            <a:r>
+              <a:rPr lang="en-US" sz="9900" b="1" kern="0" spc="-247" dirty="0">
+                <a:solidFill>
+                  <a:srgbClr val="FFFFFF"/>
+                </a:solidFill>
+                <a:latin typeface="Montserrat" pitchFamily="34" charset="0"/>
+                <a:ea typeface="Montserrat" pitchFamily="34" charset="-122"/>
+                <a:cs typeface="Montserrat" pitchFamily="34" charset="-120"/>
+              </a:rPr>
+              <a:t>Crash Course.</a:t>
+            </a:r>
+            <a:endParaRPr lang="en-US" sz="9900" dirty="0"/>
+          </a:p>
+        </p:txBody>
+      </p:sp>
+      <p:sp>
+        <p:nvSpPr>
+          <p:cNvPr id="5" name="Text 3"/>
+          <p:cNvSpPr/>
+          <p:nvPr/>
+        </p:nvSpPr>
+        <p:spPr>
+          <a:xfrm>
+            <a:off x="4343251" y="6674048"/>
+            <a:ext cx="9889543" cy="479971"/>
+          </a:xfrm>
+          <a:prstGeom prst="rect">
+            <a:avLst/>
+          </a:prstGeom>
+          <a:noFill/>
+          <a:ln/>
+        </p:spPr>
+        <p:txBody>
+          <a:bodyPr wrap="square" lIns="25400" tIns="25400" rIns="25400" bIns="25400" rtlCol="0" anchor="t">
+            <a:normAutofit fontScale="92500" lnSpcReduction="10000"/>
+          </a:bodyPr>
+          <a:lstStyle/>
+          <a:p>
+            <a:pPr marL="0" indent="0" algn="l">
+              <a:lnSpc>
+                <a:spcPct val="145000"/>
+              </a:lnSpc>
+              <a:buNone/>
+            </a:pPr>
+            <a:r>
+              <a:rPr lang="en-US" sz="2400" dirty="0">
+                <a:solidFill>
+                  <a:srgbClr val="C9CBD1"/>
+                </a:solidFill>
+                <a:latin typeface="Inter" pitchFamily="34" charset="0"/>
+                <a:ea typeface="Inter" pitchFamily="34" charset="-122"/>
+                <a:cs typeface="Inter" pitchFamily="34" charset="-120"/>
+              </a:rPr>
+              <a:t>We named the difference. Now we put it in a process you can ship from.</a:t>
+            </a:r>
+            <a:endParaRPr lang="en-US" sz="2400" dirty="0"/>
+          </a:p>
+        </p:txBody>
+      </p:sp>
     </p:spTree>
   </p:cSld>
   <p:clrMapOvr>

--- a/schedule/02-vibe-coding-vs-context-engineering/02-vibe-coding-vs-context-engineering.pptx
+++ b/schedule/02-vibe-coding-vs-context-engineering/02-vibe-coding-vs-context-engineering.pptx
@@ -44,14 +44,14 @@
   <p:notesSz cx="10287000" cy="18288000"/>
   <p:embeddedFontLst>
     <p:embeddedFont>
-      <p:font typeface="Inter" panose="02000503000000020004"/>
+      <p:font typeface="Inter" panose="02000503000000020004" pitchFamily="2" charset="0"/>
       <p:regular r:id="rId34"/>
       <p:bold r:id="rId35"/>
       <p:italic r:id="rId36"/>
       <p:boldItalic r:id="rId37"/>
     </p:embeddedFont>
     <p:embeddedFont>
-      <p:font typeface="JetBrains Mono" panose="02000009000000000000"/>
+      <p:font typeface="JetBrains Mono" panose="02000009000000000000" pitchFamily="49" charset="0"/>
       <p:regular r:id="rId38"/>
       <p:bold r:id="rId39"/>
       <p:italic r:id="rId40"/>
@@ -299,7 +299,7 @@
       <p15:sldGuideLst xmlns:p15="http://schemas.microsoft.com/office/powerpoint/2012/main"/>
     </p:ext>
     <p:ext uri="GoogleSlidesCustomDataVersion2">
-      <go:slidesCustomData xmlns:go="http://customooxmlschemas.google.com/" xmlns:ahyp="http://schemas.microsoft.com/office/drawing/2018/hyperlinkcolor" xmlns:p15="http://schemas.microsoft.com/office/powerpoint/2012/main" xmlns:p14="http://schemas.microsoft.com/office/powerpoint/2010/main" xmlns:com="http://schemas.openxmlformats.org/drawingml/2006/compatibility" xmlns:pvml="urn:schemas-microsoft-com:office:powerpoint" xmlns:v="urn:schemas-microsoft-com:vml" xmlns:o="urn:schemas-microsoft-com:office:office" xmlns:dgm="http://schemas.openxmlformats.org/drawingml/2006/diagram" xmlns:c="http://schemas.openxmlformats.org/drawingml/2006/chart" xmlns:mv="urn:schemas-microsoft-com:mac:vml" xmlns:mc="http://schemas.openxmlformats.org/markup-compatibility/2006" xmlns="" r:id="rId60" roundtripDataSignature="AMtx7mgvBL9m8TJysEvjfbWLYgqaddpdWw=="/>
+      <go:slidesCustomData xmlns="" xmlns:mc="http://schemas.openxmlformats.org/markup-compatibility/2006" xmlns:mv="urn:schemas-microsoft-com:mac:vml" xmlns:c="http://schemas.openxmlformats.org/drawingml/2006/chart" xmlns:dgm="http://schemas.openxmlformats.org/drawingml/2006/diagram" xmlns:o="urn:schemas-microsoft-com:office:office" xmlns:v="urn:schemas-microsoft-com:vml" xmlns:pvml="urn:schemas-microsoft-com:office:powerpoint" xmlns:com="http://schemas.openxmlformats.org/drawingml/2006/compatibility" xmlns:p14="http://schemas.microsoft.com/office/powerpoint/2010/main" xmlns:p15="http://schemas.microsoft.com/office/powerpoint/2012/main" xmlns:ahyp="http://schemas.microsoft.com/office/drawing/2018/hyperlinkcolor" xmlns:go="http://customooxmlschemas.google.com/" r:id="rId60" roundtripDataSignature="AMtx7mgvBL9m8TJysEvjfbWLYgqaddpdWw=="/>
     </p:ext>
   </p:extLst>
 </p:presentation>
@@ -11046,7 +11046,7 @@
                 <a:ea typeface="JetBrains Mono" pitchFamily="34" charset="-122"/>
                 <a:cs typeface="JetBrains Mono" pitchFamily="34" charset="-120"/>
               </a:rPr>
-              <a:t># Project: ACS Member Portal</a:t>
+              <a:t># Project: Church Member Portal</a:t>
             </a:r>
           </a:p>
           <a:p>
